--- a/Презентация_Finik_FB01_по_шаблону.pptx
+++ b/Презентация_Finik_FB01_по_шаблону.pptx
@@ -341,7 +341,7 @@
           <a:lstStyle/>
           <a:p>
             <a:r>
-              <a:t>[0:00] Добрый день. Команда Finik, кейс FB01 — ИИ-помощник нового клиента для Faberlic.</a:t>
+              <a:t>(0:00) Добрый день, команда Finik, кейс FB01. После обучающего мероприятия человек регистрируется на сайте Faberlic — и на этом первый контакт обычно гаснет: наставник физически не успевает поговорить со всеми.</a:t>
             </a:r>
           </a:p>
         </p:txBody>
@@ -418,7 +418,7 @@
           <a:lstStyle/>
           <a:p>
             <a:r>
-              <a:t>[2:40] Пилот: разработка до марта, недельный промышленный прогон, критерий — 85% карточек без доработки. Спасибо, готовы к вопросам.</a:t>
+              <a:t>(1:55) И предложение: три месяца разработки, недельный промышленный прогон в марте — и решение о пилоте за владельцем кейса. Спасибо, готовы к вопросам. (2:00)</a:t>
             </a:r>
           </a:p>
         </p:txBody>
@@ -495,7 +495,7 @@
           <a:lstStyle/>
           <a:p>
             <a:r>
-              <a:t>[2:00] Проверка: контур собран, 172 проверки, ноль отказов, все 12 тестов кейса закрыты. LLM-линия — 10 из 10 и 21 перефраз. Таблица проверок — на слайде 11.</a:t>
+              <a:t>(запас, если спрашивают) Вот полная таблица проверок: вход, ожидание, фактическая выдача по каждому из 12 тестов — все зелёные.</a:t>
             </a:r>
           </a:p>
         </p:txBody>
@@ -572,7 +572,7 @@
           <a:lstStyle/>
           <a:p>
             <a:r>
-              <a:t>Владелец процесса — наставник. Пользователь — новичок после мероприятия. Ситуация: регистрация есть, контекста нет. Результат: карточка с цитатой вместо ручного чтения переписки.</a:t>
+              <a:t>(0:10) Мы возвращаем этому разговору форму: помощник сам ведёт с новичком короткую беседу и отдаёт наставнику не пустую строку, а карточку со словами самого клиента.</a:t>
             </a:r>
           </a:p>
         </p:txBody>
@@ -649,7 +649,7 @@
           <a:lstStyle/>
           <a:p>
             <a:r>
-              <a:t>[0:25] Первый контакт теряется: 40 минут ручного разбора на человека — это гипотеза, цифру подтвердит замер на пилоте. Цель — 5 минут и 85% принятых карточек.</a:t>
+              <a:t>(0:20) Сегодня наставник разбирает переписку вручную — минуты, контекст теряется. Мы ставим цель: пять минут вместо сорока и 85% карточек, принятых без доработки. Цифры честные: это гипотеза, которую замерит пилот.</a:t>
             </a:r>
           </a:p>
         </p:txBody>
@@ -726,7 +726,7 @@
           <a:lstStyle/>
           <a:p>
             <a:r>
-              <a:t>[0:45] Сценарий один и законченный: событие → диалог → карточка → черновик. Границы честные: MAX не делаем, за клиента не регистрируемся и не платим, автоотправки нет — только черновики.</a:t>
+              <a:t>(0:35) Решение одно и законченное: событие регистрации, уточняющий диалог о цели и интересах, карточка с цитатой, черновик наставнику. Границы не прячем: MAX не освоили, за клиента не регистрируемся и не платим, доход и лечение не обещаем. И главное — автоотправки нет: каждое сообщение человеку отправляет наставник.</a:t>
             </a:r>
           </a:p>
         </p:txBody>
@@ -803,7 +803,7 @@
           <a:lstStyle/>
           <a:p>
             <a:r>
-              <a:t>[1:10] Данные учебные, вымышленные. LLM извлекает структуру, правила держат границы кейса. Локально qwen2.5:7b через Ollama, ключи только в .env.</a:t>
+              <a:t>(0:55) Внутри — aiogram-бот, база SQLite и локальная модель qwen2.5: большая модель извлекает смысл из свободных ответов, а правила держат границы кейса. Всё поднимается без облачных ключей.</a:t>
             </a:r>
           </a:p>
         </p:txBody>
@@ -880,7 +880,7 @@
           <a:lstStyle/>
           <a:p>
             <a:r>
-              <a:t>[1:25] Демонстрация: вход — свободный ответ клиента, выход — карточка и черновик наставнику. Сюда можно вставить скриншот или показать живьём. Если живое падает — резервное видео из репозитория.</a:t>
+              <a:t>(1:10) Показываем живьём: вот клиент пишет «ищу подработку, могу два вечера в неделю» — вот карточка: сегмент, цитата, следующий шаг, и черновик для наставника готов. Если живое падает — сразу резервное видео без пауз.</a:t>
             </a:r>
           </a:p>
         </p:txBody>
@@ -957,7 +957,7 @@
           <a:lstStyle/>
           <a:p>
             <a:r>
-              <a:t>[2:00] Проверка: контур собран, 172 проверки, ноль отказов, все 12 тестов кейса закрыты. LLM-линия — 10 из 10 и 21 перефраз. Таблица проверок — на слайде 11.</a:t>
+              <a:t>(1:30) Красивому демо мы не верим — верим прогонам: контур собран, 172 автоматические проверки, ноль отказов, все двенадцать тестов кейса зелёные.</a:t>
             </a:r>
           </a:p>
         </p:txBody>
@@ -1034,7 +1034,7 @@
           <a:lstStyle/>
           <a:p>
             <a:r>
-              <a:t>[2:20] Эффект — гипотеза: 40 минут в 5, ~300 контактов в месяц. Честно помечаем: вживую не мерили.</a:t>
+              <a:t>(1:45) Эффект — гипотеза: 40 минут в 5, около 300 контактов в месяц. На пилоте превратим оценку в замер.</a:t>
             </a:r>
           </a:p>
         </p:txBody>
@@ -1111,7 +1111,7 @@
           <a:lstStyle/>
           <a:p>
             <a:r>
-              <a:t>Команда — четверо, вклад распределён по ролям. Всё в репозитории, запуск двумя командами, тесты воспроизводятся.</a:t>
+              <a:t>(1:50) Команда — четыре человека, всё лежит в репозитории и запускается двумя командами.</a:t>
             </a:r>
           </a:p>
         </p:txBody>

--- a/Презентация_Finik_FB01_по_шаблону.pptx
+++ b/Презентация_Finik_FB01_по_шаблону.pptx
@@ -13,12 +13,12 @@
     <p:sldId id="258" r:id="rId4"/>
     <p:sldId id="259" r:id="rId5"/>
     <p:sldId id="260" r:id="rId6"/>
-    <p:sldId id="261" r:id="rId7"/>
-    <p:sldId id="262" r:id="rId8"/>
-    <p:sldId id="263" r:id="rId9"/>
-    <p:sldId id="264" r:id="rId10"/>
-    <p:sldId id="265" r:id="rId11"/>
-    <p:sldId id="266" r:id="rId12"/>
+    <p:sldId id="270" r:id="rId7"/>
+    <p:sldId id="261" r:id="rId8"/>
+    <p:sldId id="262" r:id="rId9"/>
+    <p:sldId id="267" r:id="rId10"/>
+    <p:sldId id="269" r:id="rId11"/>
+    <p:sldId id="265" r:id="rId12"/>
   </p:sldIdLst>
   <p:sldSz cx="12192000" cy="6858000"/>
   <p:notesSz cx="6858000" cy="9144000"/>
@@ -450,83 +450,6 @@
 </p:notes>
 </file>
 
-<file path=ppt/notesSlides/notesSlide11.xml><?xml version="1.0" encoding="utf-8"?>
-<p:notes xmlns:a="http://schemas.openxmlformats.org/drawingml/2006/main" xmlns:r="http://schemas.openxmlformats.org/officeDocument/2006/relationships" xmlns:p="http://schemas.openxmlformats.org/presentationml/2006/main">
-  <p:cSld>
-    <p:spTree>
-      <p:nvGrpSpPr>
-        <p:cNvPr id="1" name=""/>
-        <p:cNvGrpSpPr/>
-        <p:nvPr/>
-      </p:nvGrpSpPr>
-      <p:grpSpPr>
-        <a:xfrm>
-          <a:off x="0" y="0"/>
-          <a:ext cx="0" cy="0"/>
-          <a:chOff x="0" y="0"/>
-          <a:chExt cx="0" cy="0"/>
-        </a:xfrm>
-      </p:grpSpPr>
-      <p:sp>
-        <p:nvSpPr>
-          <p:cNvPr id="2" name="Slide Image Placeholder 1"/>
-          <p:cNvSpPr>
-            <a:spLocks noGrp="1" noRot="1" noChangeAspect="1"/>
-          </p:cNvSpPr>
-          <p:nvPr>
-            <p:ph type="sldImg"/>
-          </p:nvPr>
-        </p:nvSpPr>
-        <p:spPr/>
-      </p:sp>
-      <p:sp>
-        <p:nvSpPr>
-          <p:cNvPr id="3" name="Notes Placeholder 2"/>
-          <p:cNvSpPr>
-            <a:spLocks noGrp="1"/>
-          </p:cNvSpPr>
-          <p:nvPr>
-            <p:ph type="body" idx="1"/>
-          </p:nvPr>
-        </p:nvSpPr>
-        <p:spPr/>
-        <p:txBody>
-          <a:bodyPr/>
-          <a:lstStyle/>
-          <a:p>
-            <a:r>
-              <a:t>(запас, если спрашивают) Вот полная таблица проверок: вход, ожидание, фактическая выдача по каждому из 12 тестов — все зелёные.</a:t>
-            </a:r>
-          </a:p>
-        </p:txBody>
-      </p:sp>
-      <p:sp>
-        <p:nvSpPr>
-          <p:cNvPr id="4" name="Slide Number Placeholder 3"/>
-          <p:cNvSpPr>
-            <a:spLocks noGrp="1"/>
-          </p:cNvSpPr>
-          <p:nvPr>
-            <p:ph type="sldNum" idx="5"/>
-          </p:nvPr>
-        </p:nvSpPr>
-        <p:spPr/>
-        <p:txBody>
-          <a:bodyPr/>
-          <a:lstStyle/>
-          <a:p>
-            <a:endParaRPr/>
-          </a:p>
-        </p:txBody>
-      </p:sp>
-    </p:spTree>
-  </p:cSld>
-  <p:clrMapOvr>
-    <a:masterClrMapping/>
-  </p:clrMapOvr>
-</p:notes>
-</file>
-
 <file path=ppt/notesSlides/notesSlide2.xml><?xml version="1.0" encoding="utf-8"?>
 <p:notes xmlns:a="http://schemas.openxmlformats.org/drawingml/2006/main" xmlns:r="http://schemas.openxmlformats.org/officeDocument/2006/relationships" xmlns:p="http://schemas.openxmlformats.org/presentationml/2006/main">
   <p:cSld>
@@ -1034,7 +957,7 @@
           <a:lstStyle/>
           <a:p>
             <a:r>
-              <a:t>(1:45) Эффект — гипотеза: 40 минут в 5, около 300 контактов в месяц. На пилоте превратим оценку в замер.</a:t>
+              <a:t>Эффект в цифре: разбор нового клиента с 40 минут ручной работы сокращается до 5 минут на готовую карточку. Это гипотеза, проверяем её на пилоте.</a:t>
             </a:r>
           </a:p>
         </p:txBody>
@@ -1090,7 +1013,7 @@
             <a:spLocks noGrp="1" noRot="1" noChangeAspect="1"/>
           </p:cNvSpPr>
           <p:nvPr>
-            <p:ph type="sldImg"/>
+            <p:ph type="sldImg" idx="2"/>
           </p:nvPr>
         </p:nvSpPr>
         <p:spPr/>
@@ -1102,7 +1025,7 @@
             <a:spLocks noGrp="1"/>
           </p:cNvSpPr>
           <p:nvPr>
-            <p:ph type="body" idx="1"/>
+            <p:ph type="body" sz="quarter" idx="3"/>
           </p:nvPr>
         </p:nvSpPr>
         <p:spPr/>
@@ -1111,7 +1034,7 @@
           <a:lstStyle/>
           <a:p>
             <a:r>
-              <a:t>(1:50) Команда — четыре человека, всё лежит в репозитории и запускается двумя командами.</a:t>
+              <a:t>[2:25, одной фразой] Делали вчетвером: продукт и архитектура, машинное обучение, DevOps, полный стек.</a:t>
             </a:r>
           </a:p>
         </p:txBody>
@@ -1123,17 +1046,10 @@
             <a:spLocks noGrp="1"/>
           </p:cNvSpPr>
           <p:nvPr>
-            <p:ph type="sldNum" idx="5"/>
+            <p:ph type="sldNum" sz="quarter" idx="5"/>
           </p:nvPr>
         </p:nvSpPr>
         <p:spPr/>
-        <p:txBody>
-          <a:bodyPr/>
-          <a:lstStyle/>
-          <a:p>
-            <a:endParaRPr/>
-          </a:p>
-        </p:txBody>
       </p:sp>
     </p:spTree>
   </p:cSld>
@@ -1869,7 +1785,7 @@
               </a:defRPr>
             </a:pPr>
             <a:r>
-              <a:rPr sz="2250" b="0">
+              <a:rPr sz="2250" b="0" dirty="0" err="1">
                 <a:solidFill>
                   <a:srgbClr val="FFFFFF"/>
                 </a:solidFill>
@@ -1877,7 +1793,62 @@
                 <a:ea typeface="Arial"/>
                 <a:cs typeface="Arial"/>
               </a:rPr>
-              <a:t>Команда Finik · Кейс FB01</a:t>
+              <a:t>Команда</a:t>
+            </a:r>
+            <a:r>
+              <a:rPr sz="2250" b="0" dirty="0">
+                <a:solidFill>
+                  <a:srgbClr val="FFFFFF"/>
+                </a:solidFill>
+                <a:latin typeface="Arial"/>
+                <a:ea typeface="Arial"/>
+                <a:cs typeface="Arial"/>
+              </a:rPr>
+              <a:t> </a:t>
+            </a:r>
+            <a:r>
+              <a:rPr sz="2250" b="0" dirty="0" err="1">
+                <a:solidFill>
+                  <a:srgbClr val="FFFFFF"/>
+                </a:solidFill>
+                <a:latin typeface="Arial"/>
+                <a:ea typeface="Arial"/>
+                <a:cs typeface="Arial"/>
+              </a:rPr>
+              <a:t>Finik</a:t>
+            </a:r>
+            <a:r>
+              <a:rPr sz="2250" b="0" dirty="0">
+                <a:solidFill>
+                  <a:srgbClr val="FFFFFF"/>
+                </a:solidFill>
+                <a:latin typeface="Arial"/>
+                <a:ea typeface="Arial"/>
+                <a:cs typeface="Arial"/>
+              </a:rPr>
+              <a:t> · </a:t>
+            </a:r>
+            <a:r>
+              <a:rPr sz="2250" b="0" dirty="0" err="1">
+                <a:solidFill>
+                  <a:srgbClr val="FFFFFF"/>
+                </a:solidFill>
+                <a:latin typeface="Arial"/>
+                <a:ea typeface="Arial"/>
+                <a:cs typeface="Arial"/>
+              </a:rPr>
+              <a:t>Кейс</a:t>
+            </a:r>
+            <a:r>
+              <a:rPr sz="2250" b="0" dirty="0">
+                <a:solidFill>
+                  <a:srgbClr val="FFFFFF"/>
+                </a:solidFill>
+                <a:latin typeface="Arial"/>
+                <a:ea typeface="Arial"/>
+                <a:cs typeface="Arial"/>
+              </a:rPr>
+              <a:t> FB01</a:t>
             </a:r>
           </a:p>
         </p:txBody>
@@ -2141,6 +2112,125 @@
               </a:rPr>
               <a:t>ИИ-помощник нового клиента Faberlic</a:t>
             </a:r>
+          </a:p>
+        </p:txBody>
+      </p:sp>
+      <p:sp>
+        <p:nvSpPr>
+          <p:cNvPr id="5" name="Прямоугольник 4">
+            <a:extLst>
+              <a:ext uri="{FF2B5EF4-FFF2-40B4-BE49-F238E27FC236}">
+                <a16:creationId xmlns:a16="http://schemas.microsoft.com/office/drawing/2014/main" id="{02FE0D5E-B340-1796-9243-F5B4DDF10B02}"/>
+              </a:ext>
+            </a:extLst>
+          </p:cNvPr>
+          <p:cNvSpPr>
+            <a:spLocks noGrp="1"/>
+          </p:cNvSpPr>
+          <p:nvPr/>
+        </p:nvSpPr>
+        <p:spPr>
+          <a:xfrm>
+            <a:off x="609600" y="4114800"/>
+            <a:ext cx="666750" cy="438150"/>
+          </a:xfrm>
+          <a:prstGeom prst="rect">
+            <a:avLst/>
+          </a:prstGeom>
+          <a:noFill/>
+          <a:ln w="0">
+            <a:noFill/>
+          </a:ln>
+        </p:spPr>
+        <p:txBody>
+          <a:bodyPr>
+            <a:noAutofit/>
+          </a:bodyPr>
+          <a:lstStyle/>
+          <a:p>
+            <a:pPr>
+              <a:defRPr sz="2325" b="1">
+                <a:solidFill>
+                  <a:srgbClr val="018A98"/>
+                </a:solidFill>
+                <a:latin typeface="Arial"/>
+                <a:ea typeface="Arial"/>
+                <a:cs typeface="Arial"/>
+              </a:defRPr>
+            </a:pPr>
+            <a:r>
+              <a:rPr sz="2325" b="1" dirty="0">
+                <a:solidFill>
+                  <a:srgbClr val="018A98"/>
+                </a:solidFill>
+                <a:latin typeface="Arial"/>
+                <a:ea typeface="Arial"/>
+                <a:cs typeface="Arial"/>
+              </a:rPr>
+              <a:t>04</a:t>
+            </a:r>
+          </a:p>
+        </p:txBody>
+      </p:sp>
+      <p:sp>
+        <p:nvSpPr>
+          <p:cNvPr id="15" name="TextBox 14">
+            <a:extLst>
+              <a:ext uri="{FF2B5EF4-FFF2-40B4-BE49-F238E27FC236}">
+                <a16:creationId xmlns:a16="http://schemas.microsoft.com/office/drawing/2014/main" id="{B0F9B003-76BA-8264-9B3E-7D39539BB2F2}"/>
+              </a:ext>
+            </a:extLst>
+          </p:cNvPr>
+          <p:cNvSpPr txBox="1"/>
+          <p:nvPr/>
+        </p:nvSpPr>
+        <p:spPr>
+          <a:xfrm>
+            <a:off x="1447800" y="4114800"/>
+            <a:ext cx="6093994" cy="438582"/>
+          </a:xfrm>
+          <a:prstGeom prst="rect">
+            <a:avLst/>
+          </a:prstGeom>
+          <a:noFill/>
+        </p:spPr>
+        <p:txBody>
+          <a:bodyPr wrap="square">
+            <a:spAutoFit/>
+          </a:bodyPr>
+          <a:lstStyle/>
+          <a:p>
+            <a:r>
+              <a:rPr lang="ru-RU" sz="2250" dirty="0">
+                <a:solidFill>
+                  <a:srgbClr val="FFFFFF"/>
+                </a:solidFill>
+                <a:latin typeface="Arial"/>
+                <a:cs typeface="Arial"/>
+              </a:rPr>
+              <a:t> </a:t>
+            </a:r>
+            <a:r>
+              <a:rPr lang="en-US" sz="2250" dirty="0" err="1">
+                <a:solidFill>
+                  <a:srgbClr val="FFFFFF"/>
+                </a:solidFill>
+                <a:latin typeface="Arial"/>
+                <a:cs typeface="Arial"/>
+              </a:rPr>
+              <a:t>GitVerse</a:t>
+            </a:r>
+            <a:r>
+              <a:rPr lang="ru-RU" sz="2250" dirty="0">
+                <a:solidFill>
+                  <a:srgbClr val="FFFFFF"/>
+                </a:solidFill>
+                <a:latin typeface="Arial"/>
+                <a:cs typeface="Arial"/>
+              </a:rPr>
+              <a:t>:</a:t>
+            </a:r>
+            <a:endParaRPr lang="ru-RU" dirty="0"/>
           </a:p>
         </p:txBody>
       </p:sp>
@@ -2158,6 +2248,957 @@
 </file>
 
 <file path=ppt/slides/slide10.xml><?xml version="1.0" encoding="utf-8"?>
+<p:sld xmlns:a="http://schemas.openxmlformats.org/drawingml/2006/main" xmlns:r="http://schemas.openxmlformats.org/officeDocument/2006/relationships" xmlns:p="http://schemas.openxmlformats.org/presentationml/2006/main">
+  <p:cSld>
+    <p:spTree>
+      <p:nvGrpSpPr>
+        <p:cNvPr id="1" name=""/>
+        <p:cNvGrpSpPr/>
+        <p:nvPr/>
+      </p:nvGrpSpPr>
+      <p:grpSpPr>
+        <a:xfrm>
+          <a:off x="0" y="0"/>
+          <a:ext cx="0" cy="0"/>
+          <a:chOff x="0" y="0"/>
+          <a:chExt cx="0" cy="0"/>
+        </a:xfrm>
+      </p:grpSpPr>
+      <p:graphicFrame>
+        <p:nvGraphicFramePr>
+          <p:cNvPr id="2" name="Таблица 1">
+            <a:extLst>
+              <a:ext uri="{FF2B5EF4-FFF2-40B4-BE49-F238E27FC236}">
+                <a16:creationId xmlns:a16="http://schemas.microsoft.com/office/drawing/2014/main" id="{FDED8701-B420-6DB9-6E8F-026BF27CE5DC}"/>
+              </a:ext>
+            </a:extLst>
+          </p:cNvPr>
+          <p:cNvGraphicFramePr>
+            <a:graphicFrameLocks noGrp="1"/>
+          </p:cNvGraphicFramePr>
+          <p:nvPr/>
+        </p:nvGraphicFramePr>
+        <p:xfrm>
+          <a:off x="609600" y="1074420"/>
+          <a:ext cx="10515600" cy="4533900"/>
+        </p:xfrm>
+        <a:graphic>
+          <a:graphicData uri="http://schemas.openxmlformats.org/drawingml/2006/table">
+            <a:tbl>
+              <a:tblPr>
+                <a:tableStyleId>{5C22544A-7EE6-4342-B048-85BDC9FD1C3A}</a:tableStyleId>
+              </a:tblPr>
+              <a:tblGrid>
+                <a:gridCol w="2501900">
+                  <a:extLst>
+                    <a:ext uri="{9D8B030D-6E8A-4147-A177-3AD203B41FA5}">
+                      <a16:colId xmlns:a16="http://schemas.microsoft.com/office/drawing/2014/main" val="2860182976"/>
+                    </a:ext>
+                  </a:extLst>
+                </a:gridCol>
+                <a:gridCol w="2578100">
+                  <a:extLst>
+                    <a:ext uri="{9D8B030D-6E8A-4147-A177-3AD203B41FA5}">
+                      <a16:colId xmlns:a16="http://schemas.microsoft.com/office/drawing/2014/main" val="3834888786"/>
+                    </a:ext>
+                  </a:extLst>
+                </a:gridCol>
+                <a:gridCol w="5435600">
+                  <a:extLst>
+                    <a:ext uri="{9D8B030D-6E8A-4147-A177-3AD203B41FA5}">
+                      <a16:colId xmlns:a16="http://schemas.microsoft.com/office/drawing/2014/main" val="695891745"/>
+                    </a:ext>
+                  </a:extLst>
+                </a:gridCol>
+              </a:tblGrid>
+              <a:tr h="0">
+                <a:tc>
+                  <a:txBody>
+                    <a:bodyPr/>
+                    <a:lstStyle/>
+                    <a:p>
+                      <a:pPr algn="l">
+                        <a:spcAft>
+                          <a:spcPts val="1200"/>
+                        </a:spcAft>
+                        <a:buNone/>
+                      </a:pPr>
+                      <a:r>
+                        <a:rPr lang="ru-RU" sz="2000" dirty="0">
+                          <a:effectLst/>
+                        </a:rPr>
+                        <a:t>Участник</a:t>
+                      </a:r>
+                      <a:endParaRPr lang="ru-RU" sz="2000" b="1" i="0" dirty="0">
+                        <a:solidFill>
+                          <a:srgbClr val="F0F6FC"/>
+                        </a:solidFill>
+                        <a:effectLst/>
+                        <a:latin typeface="Mona Sans VF"/>
+                      </a:endParaRPr>
+                    </a:p>
+                  </a:txBody>
+                  <a:tcPr marL="123825" marR="123825" marT="57150" marB="57150" anchor="ctr"/>
+                </a:tc>
+                <a:tc>
+                  <a:txBody>
+                    <a:bodyPr/>
+                    <a:lstStyle/>
+                    <a:p>
+                      <a:pPr algn="l">
+                        <a:spcAft>
+                          <a:spcPts val="1200"/>
+                        </a:spcAft>
+                        <a:buNone/>
+                      </a:pPr>
+                      <a:r>
+                        <a:rPr lang="ru-RU" sz="2000" dirty="0">
+                          <a:effectLst/>
+                        </a:rPr>
+                        <a:t>Роль</a:t>
+                      </a:r>
+                      <a:endParaRPr lang="ru-RU" sz="2000" b="1" i="0" dirty="0">
+                        <a:solidFill>
+                          <a:srgbClr val="F0F6FC"/>
+                        </a:solidFill>
+                        <a:effectLst/>
+                        <a:latin typeface="Mona Sans VF"/>
+                      </a:endParaRPr>
+                    </a:p>
+                  </a:txBody>
+                  <a:tcPr marL="123825" marR="123825" marT="57150" marB="57150" anchor="ctr"/>
+                </a:tc>
+                <a:tc>
+                  <a:txBody>
+                    <a:bodyPr/>
+                    <a:lstStyle/>
+                    <a:p>
+                      <a:pPr algn="l">
+                        <a:spcAft>
+                          <a:spcPts val="1200"/>
+                        </a:spcAft>
+                        <a:buNone/>
+                      </a:pPr>
+                      <a:r>
+                        <a:rPr lang="ru-RU" sz="2000" dirty="0">
+                          <a:effectLst/>
+                        </a:rPr>
+                        <a:t>Задача</a:t>
+                      </a:r>
+                      <a:endParaRPr lang="ru-RU" sz="2000" b="1" i="0" dirty="0">
+                        <a:solidFill>
+                          <a:srgbClr val="F0F6FC"/>
+                        </a:solidFill>
+                        <a:effectLst/>
+                        <a:latin typeface="Mona Sans VF"/>
+                      </a:endParaRPr>
+                    </a:p>
+                  </a:txBody>
+                  <a:tcPr marL="123825" marR="123825" marT="57150" marB="57150" anchor="ctr"/>
+                </a:tc>
+                <a:extLst>
+                  <a:ext uri="{0D108BD9-81ED-4DB2-BD59-A6C34878D82A}">
+                    <a16:rowId xmlns:a16="http://schemas.microsoft.com/office/drawing/2014/main" val="3726446043"/>
+                  </a:ext>
+                </a:extLst>
+              </a:tr>
+              <a:tr h="0">
+                <a:tc>
+                  <a:txBody>
+                    <a:bodyPr/>
+                    <a:lstStyle/>
+                    <a:p>
+                      <a:pPr algn="l">
+                        <a:spcAft>
+                          <a:spcPts val="1200"/>
+                        </a:spcAft>
+                        <a:buNone/>
+                      </a:pPr>
+                      <a:r>
+                        <a:rPr lang="ru-RU" sz="2000" dirty="0">
+                          <a:effectLst/>
+                        </a:rPr>
+                        <a:t>Карасев Д.К.</a:t>
+                      </a:r>
+                      <a:endParaRPr lang="ru-RU" sz="2000" b="0" i="0" dirty="0">
+                        <a:solidFill>
+                          <a:srgbClr val="F0F6FC"/>
+                        </a:solidFill>
+                        <a:effectLst/>
+                        <a:latin typeface="Mona Sans VF"/>
+                      </a:endParaRPr>
+                    </a:p>
+                  </a:txBody>
+                  <a:tcPr marL="123825" marR="123825" marT="57150" marB="57150" anchor="ctr"/>
+                </a:tc>
+                <a:tc>
+                  <a:txBody>
+                    <a:bodyPr/>
+                    <a:lstStyle/>
+                    <a:p>
+                      <a:pPr algn="l">
+                        <a:spcAft>
+                          <a:spcPts val="1200"/>
+                        </a:spcAft>
+                        <a:buNone/>
+                      </a:pPr>
+                      <a:r>
+                        <a:rPr lang="ru-RU" sz="2000" dirty="0">
+                          <a:effectLst/>
+                        </a:rPr>
+                        <a:t>Руководитель продукта / SA</a:t>
+                      </a:r>
+                      <a:endParaRPr lang="ru-RU" sz="2000" b="0" i="0" dirty="0">
+                        <a:solidFill>
+                          <a:srgbClr val="F0F6FC"/>
+                        </a:solidFill>
+                        <a:effectLst/>
+                        <a:latin typeface="Mona Sans VF"/>
+                      </a:endParaRPr>
+                    </a:p>
+                  </a:txBody>
+                  <a:tcPr marL="123825" marR="123825" marT="57150" marB="57150" anchor="ctr"/>
+                </a:tc>
+                <a:tc>
+                  <a:txBody>
+                    <a:bodyPr/>
+                    <a:lstStyle/>
+                    <a:p>
+                      <a:pPr algn="l">
+                        <a:spcAft>
+                          <a:spcPts val="1200"/>
+                        </a:spcAft>
+                        <a:buNone/>
+                      </a:pPr>
+                      <a:r>
+                        <a:rPr lang="ru-RU" sz="2000">
+                          <a:effectLst/>
+                        </a:rPr>
+                        <a:t>Требования, эта документация, сценарий демонстрации, приёмка задач команды</a:t>
+                      </a:r>
+                      <a:endParaRPr lang="ru-RU" sz="2000" b="0" i="0">
+                        <a:solidFill>
+                          <a:srgbClr val="F0F6FC"/>
+                        </a:solidFill>
+                        <a:effectLst/>
+                        <a:latin typeface="Mona Sans VF"/>
+                      </a:endParaRPr>
+                    </a:p>
+                  </a:txBody>
+                  <a:tcPr marL="123825" marR="123825" marT="57150" marB="57150" anchor="ctr"/>
+                </a:tc>
+                <a:extLst>
+                  <a:ext uri="{0D108BD9-81ED-4DB2-BD59-A6C34878D82A}">
+                    <a16:rowId xmlns:a16="http://schemas.microsoft.com/office/drawing/2014/main" val="3428412360"/>
+                  </a:ext>
+                </a:extLst>
+              </a:tr>
+              <a:tr h="0">
+                <a:tc>
+                  <a:txBody>
+                    <a:bodyPr/>
+                    <a:lstStyle/>
+                    <a:p>
+                      <a:pPr algn="l">
+                        <a:spcAft>
+                          <a:spcPts val="1200"/>
+                        </a:spcAft>
+                        <a:buNone/>
+                      </a:pPr>
+                      <a:r>
+                        <a:rPr lang="ru-RU" sz="2000" dirty="0">
+                          <a:effectLst/>
+                        </a:rPr>
+                        <a:t>Долгова К.О.</a:t>
+                      </a:r>
+                      <a:endParaRPr lang="ru-RU" sz="2000" b="0" i="0" dirty="0">
+                        <a:solidFill>
+                          <a:srgbClr val="F0F6FC"/>
+                        </a:solidFill>
+                        <a:effectLst/>
+                        <a:latin typeface="Mona Sans VF"/>
+                      </a:endParaRPr>
+                    </a:p>
+                  </a:txBody>
+                  <a:tcPr marL="123825" marR="123825" marT="57150" marB="57150" anchor="ctr"/>
+                </a:tc>
+                <a:tc>
+                  <a:txBody>
+                    <a:bodyPr/>
+                    <a:lstStyle/>
+                    <a:p>
+                      <a:pPr algn="l">
+                        <a:spcAft>
+                          <a:spcPts val="1200"/>
+                        </a:spcAft>
+                        <a:buNone/>
+                      </a:pPr>
+                      <a:r>
+                        <a:rPr lang="ru-RU" sz="2000" dirty="0">
+                          <a:effectLst/>
+                        </a:rPr>
+                        <a:t>Инженер по машинному обучению</a:t>
+                      </a:r>
+                      <a:endParaRPr lang="ru-RU" sz="2000" b="0" i="0" dirty="0">
+                        <a:solidFill>
+                          <a:srgbClr val="F0F6FC"/>
+                        </a:solidFill>
+                        <a:effectLst/>
+                        <a:latin typeface="Mona Sans VF"/>
+                      </a:endParaRPr>
+                    </a:p>
+                  </a:txBody>
+                  <a:tcPr marL="123825" marR="123825" marT="57150" marB="57150" anchor="ctr"/>
+                </a:tc>
+                <a:tc>
+                  <a:txBody>
+                    <a:bodyPr/>
+                    <a:lstStyle/>
+                    <a:p>
+                      <a:pPr algn="l">
+                        <a:spcAft>
+                          <a:spcPts val="1200"/>
+                        </a:spcAft>
+                        <a:buNone/>
+                      </a:pPr>
+                      <a:r>
+                        <a:rPr lang="ru-RU" sz="2000">
+                          <a:effectLst/>
+                        </a:rPr>
+                        <a:t>Скрипт обработки ответа пользователя через LLM (OpenRouter → Mistral AI → локальная Ollama), извлечение структурированных данных в карточку, проверка полноты ответа</a:t>
+                      </a:r>
+                      <a:endParaRPr lang="ru-RU" sz="2000" b="0" i="0">
+                        <a:solidFill>
+                          <a:srgbClr val="F0F6FC"/>
+                        </a:solidFill>
+                        <a:effectLst/>
+                        <a:latin typeface="Mona Sans VF"/>
+                      </a:endParaRPr>
+                    </a:p>
+                  </a:txBody>
+                  <a:tcPr marL="123825" marR="123825" marT="57150" marB="57150" anchor="ctr"/>
+                </a:tc>
+                <a:extLst>
+                  <a:ext uri="{0D108BD9-81ED-4DB2-BD59-A6C34878D82A}">
+                    <a16:rowId xmlns:a16="http://schemas.microsoft.com/office/drawing/2014/main" val="2527777931"/>
+                  </a:ext>
+                </a:extLst>
+              </a:tr>
+              <a:tr h="0">
+                <a:tc>
+                  <a:txBody>
+                    <a:bodyPr/>
+                    <a:lstStyle/>
+                    <a:p>
+                      <a:pPr algn="l">
+                        <a:spcAft>
+                          <a:spcPts val="1200"/>
+                        </a:spcAft>
+                        <a:buNone/>
+                      </a:pPr>
+                      <a:r>
+                        <a:rPr lang="ru-RU" sz="2000" dirty="0">
+                          <a:effectLst/>
+                        </a:rPr>
+                        <a:t>Отпущенников А.С.</a:t>
+                      </a:r>
+                      <a:endParaRPr lang="ru-RU" sz="2000" b="0" i="0" dirty="0">
+                        <a:solidFill>
+                          <a:srgbClr val="F0F6FC"/>
+                        </a:solidFill>
+                        <a:effectLst/>
+                        <a:latin typeface="Mona Sans VF"/>
+                      </a:endParaRPr>
+                    </a:p>
+                  </a:txBody>
+                  <a:tcPr marL="123825" marR="123825" marT="57150" marB="57150" anchor="ctr"/>
+                </a:tc>
+                <a:tc>
+                  <a:txBody>
+                    <a:bodyPr/>
+                    <a:lstStyle/>
+                    <a:p>
+                      <a:pPr algn="l">
+                        <a:spcAft>
+                          <a:spcPts val="1200"/>
+                        </a:spcAft>
+                        <a:buNone/>
+                      </a:pPr>
+                      <a:r>
+                        <a:rPr lang="ru-RU" sz="2000" dirty="0">
+                          <a:effectLst/>
+                        </a:rPr>
+                        <a:t>Инженер </a:t>
+                      </a:r>
+                      <a:r>
+                        <a:rPr lang="ru-RU" sz="2000" dirty="0" err="1">
+                          <a:effectLst/>
+                        </a:rPr>
+                        <a:t>DevOps</a:t>
+                      </a:r>
+                      <a:endParaRPr lang="ru-RU" sz="2000" b="0" i="0" dirty="0">
+                        <a:solidFill>
+                          <a:srgbClr val="F0F6FC"/>
+                        </a:solidFill>
+                        <a:effectLst/>
+                        <a:latin typeface="Mona Sans VF"/>
+                      </a:endParaRPr>
+                    </a:p>
+                  </a:txBody>
+                  <a:tcPr marL="123825" marR="123825" marT="57150" marB="57150" anchor="ctr"/>
+                </a:tc>
+                <a:tc>
+                  <a:txBody>
+                    <a:bodyPr/>
+                    <a:lstStyle/>
+                    <a:p>
+                      <a:pPr algn="l">
+                        <a:spcAft>
+                          <a:spcPts val="1200"/>
+                        </a:spcAft>
+                        <a:buNone/>
+                      </a:pPr>
+                      <a:r>
+                        <a:rPr lang="ru-RU" sz="2000" dirty="0">
+                          <a:effectLst/>
+                        </a:rPr>
+                        <a:t>Unit-тесты, сборка в </a:t>
+                      </a:r>
+                      <a:r>
+                        <a:rPr lang="ru-RU" sz="2000" dirty="0" err="1">
+                          <a:effectLst/>
+                        </a:rPr>
+                        <a:t>Docker</a:t>
+                      </a:r>
+                      <a:r>
+                        <a:rPr lang="ru-RU" sz="2000" dirty="0">
+                          <a:effectLst/>
+                        </a:rPr>
+                        <a:t>, репозиторий и публикация на </a:t>
+                      </a:r>
+                      <a:r>
+                        <a:rPr lang="ru-RU" sz="2000" dirty="0" err="1">
+                          <a:effectLst/>
+                        </a:rPr>
+                        <a:t>GitVerse</a:t>
+                      </a:r>
+                      <a:endParaRPr lang="ru-RU" sz="2000" b="0" i="0" dirty="0">
+                        <a:solidFill>
+                          <a:srgbClr val="F0F6FC"/>
+                        </a:solidFill>
+                        <a:effectLst/>
+                        <a:latin typeface="Mona Sans VF"/>
+                      </a:endParaRPr>
+                    </a:p>
+                  </a:txBody>
+                  <a:tcPr marL="123825" marR="123825" marT="57150" marB="57150" anchor="ctr"/>
+                </a:tc>
+                <a:extLst>
+                  <a:ext uri="{0D108BD9-81ED-4DB2-BD59-A6C34878D82A}">
+                    <a16:rowId xmlns:a16="http://schemas.microsoft.com/office/drawing/2014/main" val="3072541801"/>
+                  </a:ext>
+                </a:extLst>
+              </a:tr>
+              <a:tr h="0">
+                <a:tc>
+                  <a:txBody>
+                    <a:bodyPr/>
+                    <a:lstStyle/>
+                    <a:p>
+                      <a:pPr algn="l">
+                        <a:spcAft>
+                          <a:spcPts val="1200"/>
+                        </a:spcAft>
+                        <a:buNone/>
+                      </a:pPr>
+                      <a:r>
+                        <a:rPr lang="ru-RU" sz="2000" dirty="0">
+                          <a:effectLst/>
+                        </a:rPr>
+                        <a:t>Веденеев В.С.</a:t>
+                      </a:r>
+                      <a:endParaRPr lang="ru-RU" sz="2000" b="0" i="0" dirty="0">
+                        <a:solidFill>
+                          <a:srgbClr val="F0F6FC"/>
+                        </a:solidFill>
+                        <a:effectLst/>
+                        <a:latin typeface="Mona Sans VF"/>
+                      </a:endParaRPr>
+                    </a:p>
+                  </a:txBody>
+                  <a:tcPr marL="123825" marR="123825" marT="57150" marB="57150" anchor="ctr"/>
+                </a:tc>
+                <a:tc>
+                  <a:txBody>
+                    <a:bodyPr/>
+                    <a:lstStyle/>
+                    <a:p>
+                      <a:pPr algn="l">
+                        <a:spcAft>
+                          <a:spcPts val="1200"/>
+                        </a:spcAft>
+                        <a:buNone/>
+                      </a:pPr>
+                      <a:r>
+                        <a:rPr lang="ru-RU" sz="2000" dirty="0" err="1">
+                          <a:effectLst/>
+                        </a:rPr>
+                        <a:t>Fullstack</a:t>
+                      </a:r>
+                      <a:r>
+                        <a:rPr lang="ru-RU" sz="2000" dirty="0">
+                          <a:effectLst/>
+                        </a:rPr>
+                        <a:t> (полнофункциональный)</a:t>
+                      </a:r>
+                      <a:endParaRPr lang="ru-RU" sz="2000" b="0" i="0" dirty="0">
+                        <a:solidFill>
+                          <a:srgbClr val="F0F6FC"/>
+                        </a:solidFill>
+                        <a:effectLst/>
+                        <a:latin typeface="Mona Sans VF"/>
+                      </a:endParaRPr>
+                    </a:p>
+                  </a:txBody>
+                  <a:tcPr marL="123825" marR="123825" marT="57150" marB="57150" anchor="ctr"/>
+                </a:tc>
+                <a:tc>
+                  <a:txBody>
+                    <a:bodyPr/>
+                    <a:lstStyle/>
+                    <a:p>
+                      <a:pPr algn="l">
+                        <a:spcAft>
+                          <a:spcPts val="1200"/>
+                        </a:spcAft>
+                        <a:buNone/>
+                      </a:pPr>
+                      <a:r>
+                        <a:rPr lang="ru-RU" sz="2000" dirty="0" err="1">
+                          <a:effectLst/>
+                        </a:rPr>
+                        <a:t>Telegram</a:t>
+                      </a:r>
+                      <a:r>
+                        <a:rPr lang="ru-RU" sz="2000" dirty="0">
+                          <a:effectLst/>
+                        </a:rPr>
+                        <a:t>-бот на </a:t>
+                      </a:r>
+                      <a:r>
+                        <a:rPr lang="ru-RU" sz="2000" dirty="0" err="1">
+                          <a:effectLst/>
+                        </a:rPr>
+                        <a:t>aiogram</a:t>
+                      </a:r>
+                      <a:r>
+                        <a:rPr lang="ru-RU" sz="2000" dirty="0">
+                          <a:effectLst/>
+                        </a:rPr>
+                        <a:t> 3, локальная БД, конечная машина состояний (FSM) для вопросов, роль наставника и доступ к карточкам</a:t>
+                      </a:r>
+                      <a:endParaRPr lang="ru-RU" sz="2000" b="0" i="0" dirty="0">
+                        <a:solidFill>
+                          <a:srgbClr val="F0F6FC"/>
+                        </a:solidFill>
+                        <a:effectLst/>
+                        <a:latin typeface="Mona Sans VF"/>
+                      </a:endParaRPr>
+                    </a:p>
+                  </a:txBody>
+                  <a:tcPr marL="123825" marR="123825" marT="57150" marB="57150" anchor="ctr"/>
+                </a:tc>
+                <a:extLst>
+                  <a:ext uri="{0D108BD9-81ED-4DB2-BD59-A6C34878D82A}">
+                    <a16:rowId xmlns:a16="http://schemas.microsoft.com/office/drawing/2014/main" val="2754579197"/>
+                  </a:ext>
+                </a:extLst>
+              </a:tr>
+            </a:tbl>
+          </a:graphicData>
+        </a:graphic>
+      </p:graphicFrame>
+      <p:sp>
+        <p:nvSpPr>
+          <p:cNvPr id="4" name="Прямоугольник 3">
+            <a:extLst>
+              <a:ext uri="{FF2B5EF4-FFF2-40B4-BE49-F238E27FC236}">
+                <a16:creationId xmlns:a16="http://schemas.microsoft.com/office/drawing/2014/main" id="{6EB5DB90-9C1F-1AF0-DD4F-B6AD67EA80A4}"/>
+              </a:ext>
+            </a:extLst>
+          </p:cNvPr>
+          <p:cNvSpPr>
+            <a:spLocks noGrp="1"/>
+          </p:cNvSpPr>
+          <p:nvPr/>
+        </p:nvSpPr>
+        <p:spPr>
+          <a:xfrm>
+            <a:off x="609600" y="438150"/>
+            <a:ext cx="10858500" cy="1190625"/>
+          </a:xfrm>
+          <a:prstGeom prst="rect">
+            <a:avLst/>
+          </a:prstGeom>
+          <a:noFill/>
+          <a:ln w="0">
+            <a:noFill/>
+          </a:ln>
+        </p:spPr>
+        <p:txBody>
+          <a:bodyPr>
+            <a:noAutofit/>
+          </a:bodyPr>
+          <a:lstStyle/>
+          <a:p>
+            <a:pPr>
+              <a:defRPr sz="3600" b="1">
+                <a:solidFill>
+                  <a:srgbClr val="052849"/>
+                </a:solidFill>
+                <a:latin typeface="Arial"/>
+                <a:ea typeface="Arial"/>
+                <a:cs typeface="Arial"/>
+              </a:defRPr>
+            </a:pPr>
+            <a:r>
+              <a:rPr sz="3600" b="1" dirty="0" err="1">
+                <a:solidFill>
+                  <a:srgbClr val="052849"/>
+                </a:solidFill>
+                <a:latin typeface="Arial"/>
+                <a:ea typeface="Arial"/>
+                <a:cs typeface="Arial"/>
+              </a:rPr>
+              <a:t>Команда</a:t>
+            </a:r>
+            <a:r>
+              <a:rPr sz="3600" b="1" dirty="0">
+                <a:solidFill>
+                  <a:srgbClr val="052849"/>
+                </a:solidFill>
+                <a:latin typeface="Arial"/>
+                <a:ea typeface="Arial"/>
+                <a:cs typeface="Arial"/>
+              </a:rPr>
+              <a:t> и </a:t>
+            </a:r>
+            <a:r>
+              <a:rPr sz="3600" b="1" dirty="0" err="1">
+                <a:solidFill>
+                  <a:srgbClr val="052849"/>
+                </a:solidFill>
+                <a:latin typeface="Arial"/>
+                <a:ea typeface="Arial"/>
+                <a:cs typeface="Arial"/>
+              </a:rPr>
+              <a:t>материалы</a:t>
+            </a:r>
+            <a:endParaRPr sz="3600" b="1" dirty="0">
+              <a:solidFill>
+                <a:srgbClr val="052849"/>
+              </a:solidFill>
+              <a:latin typeface="Arial"/>
+              <a:ea typeface="Arial"/>
+              <a:cs typeface="Arial"/>
+            </a:endParaRPr>
+          </a:p>
+        </p:txBody>
+      </p:sp>
+      <p:sp>
+        <p:nvSpPr>
+          <p:cNvPr id="5" name="Прямоугольник 1">
+            <a:extLst>
+              <a:ext uri="{FF2B5EF4-FFF2-40B4-BE49-F238E27FC236}">
+                <a16:creationId xmlns:a16="http://schemas.microsoft.com/office/drawing/2014/main" id="{0A5927EA-9F24-43A9-9086-7A086598A766}"/>
+              </a:ext>
+            </a:extLst>
+          </p:cNvPr>
+          <p:cNvSpPr>
+            <a:spLocks noGrp="1"/>
+          </p:cNvSpPr>
+          <p:nvPr/>
+        </p:nvSpPr>
+        <p:spPr>
+          <a:xfrm>
+            <a:off x="0" y="5953125"/>
+            <a:ext cx="12192000" cy="904875"/>
+          </a:xfrm>
+          <a:prstGeom prst="rect">
+            <a:avLst/>
+          </a:prstGeom>
+          <a:solidFill>
+            <a:srgbClr val="FFFFFF"/>
+          </a:solidFill>
+          <a:ln w="0">
+            <a:noFill/>
+          </a:ln>
+        </p:spPr>
+        <p:txBody>
+          <a:bodyPr/>
+          <a:lstStyle/>
+          <a:p>
+            <a:endParaRPr/>
+          </a:p>
+        </p:txBody>
+      </p:sp>
+      <p:pic>
+        <p:nvPicPr>
+          <p:cNvPr id="6" name="Picture 5" descr="image.png"/>
+          <p:cNvPicPr>
+            <a:picLocks noChangeAspect="1"/>
+          </p:cNvPicPr>
+          <p:nvPr/>
+        </p:nvPicPr>
+        <p:blipFill>
+          <a:blip r:embed="rId3"/>
+          <a:stretch>
+            <a:fillRect/>
+          </a:stretch>
+        </p:blipFill>
+        <p:spPr>
+          <a:xfrm>
+            <a:off x="609600" y="6143625"/>
+            <a:ext cx="457200" cy="457200"/>
+          </a:xfrm>
+          <a:prstGeom prst="rect">
+            <a:avLst/>
+          </a:prstGeom>
+        </p:spPr>
+      </p:pic>
+      <p:sp>
+        <p:nvSpPr>
+          <p:cNvPr id="7" name="Прямоугольник 3">
+            <a:extLst>
+              <a:ext uri="{FF2B5EF4-FFF2-40B4-BE49-F238E27FC236}">
+                <a16:creationId xmlns:a16="http://schemas.microsoft.com/office/drawing/2014/main" id="{7A1DBC29-4E42-4528-82EA-2982292B4226}"/>
+              </a:ext>
+            </a:extLst>
+          </p:cNvPr>
+          <p:cNvSpPr>
+            <a:spLocks noGrp="1"/>
+          </p:cNvSpPr>
+          <p:nvPr/>
+        </p:nvSpPr>
+        <p:spPr>
+          <a:xfrm>
+            <a:off x="1143000" y="6134100"/>
+            <a:ext cx="1619250" cy="514350"/>
+          </a:xfrm>
+          <a:prstGeom prst="rect">
+            <a:avLst/>
+          </a:prstGeom>
+          <a:noFill/>
+          <a:ln w="0">
+            <a:noFill/>
+          </a:ln>
+        </p:spPr>
+        <p:txBody>
+          <a:bodyPr>
+            <a:noAutofit/>
+          </a:bodyPr>
+          <a:lstStyle/>
+          <a:p>
+            <a:pPr>
+              <a:defRPr sz="3000" b="1">
+                <a:solidFill>
+                  <a:srgbClr val="052849"/>
+                </a:solidFill>
+                <a:latin typeface="Arial"/>
+                <a:ea typeface="Arial"/>
+                <a:cs typeface="Arial"/>
+              </a:defRPr>
+            </a:pPr>
+            <a:r>
+              <a:rPr sz="3000" b="1">
+                <a:solidFill>
+                  <a:srgbClr val="052849"/>
+                </a:solidFill>
+                <a:latin typeface="Arial"/>
+                <a:ea typeface="Arial"/>
+                <a:cs typeface="Arial"/>
+              </a:rPr>
+              <a:t>окели</a:t>
+            </a:r>
+          </a:p>
+        </p:txBody>
+      </p:sp>
+      <p:pic>
+        <p:nvPicPr>
+          <p:cNvPr id="8" name="Picture 7" descr="image.png"/>
+          <p:cNvPicPr>
+            <a:picLocks noChangeAspect="1"/>
+          </p:cNvPicPr>
+          <p:nvPr/>
+        </p:nvPicPr>
+        <p:blipFill>
+          <a:blip r:embed="rId4"/>
+          <a:stretch>
+            <a:fillRect/>
+          </a:stretch>
+        </p:blipFill>
+        <p:spPr>
+          <a:xfrm>
+            <a:off x="4762500" y="6115159"/>
+            <a:ext cx="1390650" cy="590333"/>
+          </a:xfrm>
+          <a:prstGeom prst="rect">
+            <a:avLst/>
+          </a:prstGeom>
+        </p:spPr>
+      </p:pic>
+      <p:pic>
+        <p:nvPicPr>
+          <p:cNvPr id="9" name="Picture 8" descr="image.png"/>
+          <p:cNvPicPr>
+            <a:picLocks noChangeAspect="1"/>
+          </p:cNvPicPr>
+          <p:nvPr/>
+        </p:nvPicPr>
+        <p:blipFill>
+          <a:blip r:embed="rId5"/>
+          <a:stretch>
+            <a:fillRect/>
+          </a:stretch>
+        </p:blipFill>
+        <p:spPr>
+          <a:xfrm>
+            <a:off x="9039225" y="6067425"/>
+            <a:ext cx="628650" cy="628650"/>
+          </a:xfrm>
+          <a:prstGeom prst="rect">
+            <a:avLst/>
+          </a:prstGeom>
+        </p:spPr>
+      </p:pic>
+      <p:sp>
+        <p:nvSpPr>
+          <p:cNvPr id="10" name="Прямоугольник 6">
+            <a:extLst>
+              <a:ext uri="{FF2B5EF4-FFF2-40B4-BE49-F238E27FC236}">
+                <a16:creationId xmlns:a16="http://schemas.microsoft.com/office/drawing/2014/main" id="{41A7A0D4-EE9C-4537-85E2-1B646FACFFB6}"/>
+              </a:ext>
+            </a:extLst>
+          </p:cNvPr>
+          <p:cNvSpPr>
+            <a:spLocks noGrp="1"/>
+          </p:cNvSpPr>
+          <p:nvPr/>
+        </p:nvSpPr>
+        <p:spPr>
+          <a:xfrm>
+            <a:off x="9829800" y="6305550"/>
+            <a:ext cx="1571625" cy="257175"/>
+          </a:xfrm>
+          <a:prstGeom prst="rect">
+            <a:avLst/>
+          </a:prstGeom>
+          <a:noFill/>
+          <a:ln w="0">
+            <a:noFill/>
+          </a:ln>
+        </p:spPr>
+        <p:txBody>
+          <a:bodyPr>
+            <a:noAutofit/>
+          </a:bodyPr>
+          <a:lstStyle/>
+          <a:p>
+            <a:pPr>
+              <a:defRPr sz="1575" b="0">
+                <a:solidFill>
+                  <a:srgbClr val="052849"/>
+                </a:solidFill>
+                <a:latin typeface="Arial"/>
+                <a:ea typeface="Arial"/>
+                <a:cs typeface="Arial"/>
+              </a:defRPr>
+            </a:pPr>
+            <a:r>
+              <a:rPr sz="1575" b="0">
+                <a:solidFill>
+                  <a:srgbClr val="052849"/>
+                </a:solidFill>
+                <a:latin typeface="Arial"/>
+                <a:ea typeface="Arial"/>
+                <a:cs typeface="Arial"/>
+              </a:rPr>
+              <a:t>Волгоград</a:t>
+            </a:r>
+          </a:p>
+        </p:txBody>
+      </p:sp>
+      <p:sp>
+        <p:nvSpPr>
+          <p:cNvPr id="11" name="Прямоугольник 7">
+            <a:extLst>
+              <a:ext uri="{FF2B5EF4-FFF2-40B4-BE49-F238E27FC236}">
+                <a16:creationId xmlns:a16="http://schemas.microsoft.com/office/drawing/2014/main" id="{501A88B0-AD57-4B69-BEE5-A74DD8EF4DD9}"/>
+              </a:ext>
+            </a:extLst>
+          </p:cNvPr>
+          <p:cNvSpPr>
+            <a:spLocks noGrp="1"/>
+          </p:cNvSpPr>
+          <p:nvPr/>
+        </p:nvSpPr>
+        <p:spPr>
+          <a:xfrm>
+            <a:off x="11525250" y="6343650"/>
+            <a:ext cx="419100" cy="209550"/>
+          </a:xfrm>
+          <a:prstGeom prst="rect">
+            <a:avLst/>
+          </a:prstGeom>
+          <a:noFill/>
+          <a:ln w="0">
+            <a:noFill/>
+          </a:ln>
+        </p:spPr>
+        <p:txBody>
+          <a:bodyPr>
+            <a:noAutofit/>
+          </a:bodyPr>
+          <a:lstStyle/>
+          <a:p>
+            <a:pPr>
+              <a:defRPr sz="1050" b="0">
+                <a:solidFill>
+                  <a:srgbClr val="566572"/>
+                </a:solidFill>
+                <a:latin typeface="Arial"/>
+                <a:ea typeface="Arial"/>
+                <a:cs typeface="Arial"/>
+              </a:defRPr>
+            </a:pPr>
+            <a:r>
+              <a:rPr sz="1050" b="0">
+                <a:solidFill>
+                  <a:srgbClr val="566572"/>
+                </a:solidFill>
+                <a:latin typeface="Arial"/>
+                <a:ea typeface="Arial"/>
+                <a:cs typeface="Arial"/>
+              </a:rPr>
+              <a:t>15</a:t>
+            </a:r>
+          </a:p>
+        </p:txBody>
+      </p:sp>
+    </p:spTree>
+    <p:extLst>
+      <p:ext uri="{BB962C8B-B14F-4D97-AF65-F5344CB8AC3E}">
+        <p14:creationId xmlns:p14="http://schemas.microsoft.com/office/powerpoint/2010/main" val="300860706"/>
+      </p:ext>
+    </p:extLst>
+  </p:cSld>
+  <p:clrMapOvr>
+    <a:masterClrMapping/>
+  </p:clrMapOvr>
+</p:sld>
+</file>
+
+<file path=ppt/slides/slide11.xml><?xml version="1.0" encoding="utf-8"?>
 <p:sld xmlns:a="http://schemas.openxmlformats.org/drawingml/2006/main" xmlns:r="http://schemas.openxmlformats.org/officeDocument/2006/relationships" xmlns:p="http://schemas.openxmlformats.org/presentationml/2006/main">
   <p:cSld>
     <p:bg>
@@ -3006,15 +4047,15 @@
               </a:defRPr>
             </a:pPr>
             <a:r>
-              <a:rPr sz="1350" b="0">
-                <a:solidFill>
-                  <a:srgbClr val="D4E5EA"/>
-                </a:solidFill>
-                <a:latin typeface="Arial"/>
-                <a:ea typeface="Arial"/>
-                <a:cs typeface="Arial"/>
-              </a:rPr>
-              <a:t>Ресурсы, срок и условия остановки зафиксированы в предложении по пилоту (docs/pilot-proposal.md).</a:t>
+              <a:rPr lang="ru-RU" sz="1350" dirty="0">
+                <a:solidFill>
+                  <a:srgbClr val="018A98"/>
+                </a:solidFill>
+                <a:latin typeface="Arial"/>
+                <a:ea typeface="Arial"/>
+                <a:cs typeface="Arial"/>
+              </a:rPr>
+              <a:t>Детали: план-график UPRSII_LR_6; числа эффекта — гипотеза, пилот подтвердит их замерами.</a:t>
             </a:r>
           </a:p>
         </p:txBody>
@@ -3023,1725 +4064,6 @@
     <p:extLst>
       <p:ext uri="{BB962C8B-B14F-4D97-AF65-F5344CB8AC3E}">
         <p14:creationId xmlns:p14="http://schemas.microsoft.com/office/powerpoint/2010/main" val="1937686222"/>
-      </p:ext>
-    </p:extLst>
-  </p:cSld>
-  <p:clrMapOvr>
-    <a:masterClrMapping/>
-  </p:clrMapOvr>
-</p:sld>
-</file>
-
-<file path=ppt/slides/slide11.xml><?xml version="1.0" encoding="utf-8"?>
-<p:sld xmlns:a="http://schemas.openxmlformats.org/drawingml/2006/main" xmlns:r="http://schemas.openxmlformats.org/officeDocument/2006/relationships" xmlns:p="http://schemas.openxmlformats.org/presentationml/2006/main">
-  <p:cSld>
-    <p:bg>
-      <p:bgPr>
-        <a:solidFill>
-          <a:srgbClr val="FAF8F2"/>
-        </a:solidFill>
-        <a:effectLst/>
-      </p:bgPr>
-    </p:bg>
-    <p:spTree>
-      <p:nvGrpSpPr>
-        <p:cNvPr id="1" name=""/>
-        <p:cNvGrpSpPr/>
-        <p:nvPr/>
-      </p:nvGrpSpPr>
-      <p:grpSpPr>
-        <a:xfrm>
-          <a:off x="0" y="0"/>
-          <a:ext cx="0" cy="0"/>
-          <a:chOff x="0" y="0"/>
-          <a:chExt cx="0" cy="0"/>
-        </a:xfrm>
-      </p:grpSpPr>
-      <p:sp>
-        <p:nvSpPr>
-          <p:cNvPr id="18" name="Прямоугольник 17">
-            <a:extLst>
-              <a:ext uri="{FF2B5EF4-FFF2-40B4-BE49-F238E27FC236}">
-                <a16:creationId xmlns:a16="http://schemas.microsoft.com/office/drawing/2014/main" id="{9BFB8A71-0D31-4A9B-89CD-5DADB90BA659}"/>
-              </a:ext>
-            </a:extLst>
-          </p:cNvPr>
-          <p:cNvSpPr>
-            <a:spLocks noGrp="1"/>
-          </p:cNvSpPr>
-          <p:nvPr/>
-        </p:nvSpPr>
-        <p:spPr>
-          <a:xfrm>
-            <a:off x="609600" y="438150"/>
-            <a:ext cx="10858500" cy="1190625"/>
-          </a:xfrm>
-          <a:prstGeom prst="rect">
-            <a:avLst/>
-          </a:prstGeom>
-          <a:noFill/>
-          <a:ln w="0">
-            <a:noFill/>
-          </a:ln>
-        </p:spPr>
-        <p:txBody>
-          <a:bodyPr>
-            <a:noAutofit/>
-          </a:bodyPr>
-          <a:lstStyle/>
-          <a:p>
-            <a:pPr>
-              <a:defRPr sz="3600" b="1">
-                <a:solidFill>
-                  <a:srgbClr val="052849"/>
-                </a:solidFill>
-                <a:latin typeface="Arial"/>
-                <a:ea typeface="Arial"/>
-                <a:cs typeface="Arial"/>
-              </a:defRPr>
-            </a:pPr>
-            <a:r>
-              <a:rPr sz="3600" b="1">
-                <a:solidFill>
-                  <a:srgbClr val="052849"/>
-                </a:solidFill>
-                <a:latin typeface="Arial"/>
-                <a:ea typeface="Arial"/>
-                <a:cs typeface="Arial"/>
-              </a:rPr>
-              <a:t>Приложение: таблица проверок tests.json</a:t>
-            </a:r>
-          </a:p>
-        </p:txBody>
-      </p:sp>
-      <p:sp>
-        <p:nvSpPr>
-          <p:cNvPr id="2" name="Прямоугольник 1">
-            <a:extLst>
-              <a:ext uri="{FF2B5EF4-FFF2-40B4-BE49-F238E27FC236}">
-                <a16:creationId xmlns:a16="http://schemas.microsoft.com/office/drawing/2014/main" id="{FC48568B-A510-4C07-9095-5B305366D66E}"/>
-              </a:ext>
-            </a:extLst>
-          </p:cNvPr>
-          <p:cNvSpPr>
-            <a:spLocks noGrp="1"/>
-          </p:cNvSpPr>
-          <p:nvPr/>
-        </p:nvSpPr>
-        <p:spPr>
-          <a:xfrm>
-            <a:off x="0" y="5953125"/>
-            <a:ext cx="12192000" cy="904875"/>
-          </a:xfrm>
-          <a:prstGeom prst="rect">
-            <a:avLst/>
-          </a:prstGeom>
-          <a:solidFill>
-            <a:srgbClr val="FFFFFF"/>
-          </a:solidFill>
-          <a:ln w="0">
-            <a:noFill/>
-          </a:ln>
-        </p:spPr>
-      </p:sp>
-      <p:pic>
-        <p:nvPicPr>
-          <p:cNvPr id="20" name="Рисунок 19"/>
-          <p:cNvPicPr>
-            <a:picLocks noChangeAspect="1"/>
-          </p:cNvPicPr>
-          <p:nvPr/>
-        </p:nvPicPr>
-        <p:blipFill>
-          <a:blip r:embed="rId3"/>
-          <a:stretch/>
-        </p:blipFill>
-        <p:spPr>
-          <a:xfrm>
-            <a:off x="609600" y="6143625"/>
-            <a:ext cx="457200" cy="457200"/>
-          </a:xfrm>
-          <a:prstGeom prst="rect">
-            <a:avLst/>
-          </a:prstGeom>
-        </p:spPr>
-      </p:pic>
-      <p:sp>
-        <p:nvSpPr>
-          <p:cNvPr id="4" name="Прямоугольник 3">
-            <a:extLst>
-              <a:ext uri="{FF2B5EF4-FFF2-40B4-BE49-F238E27FC236}">
-                <a16:creationId xmlns:a16="http://schemas.microsoft.com/office/drawing/2014/main" id="{2438A521-E617-465A-8D16-3F6A09D218A2}"/>
-              </a:ext>
-            </a:extLst>
-          </p:cNvPr>
-          <p:cNvSpPr>
-            <a:spLocks noGrp="1"/>
-          </p:cNvSpPr>
-          <p:nvPr/>
-        </p:nvSpPr>
-        <p:spPr>
-          <a:xfrm>
-            <a:off x="1143000" y="6134100"/>
-            <a:ext cx="1619250" cy="514350"/>
-          </a:xfrm>
-          <a:prstGeom prst="rect">
-            <a:avLst/>
-          </a:prstGeom>
-          <a:noFill/>
-          <a:ln w="0">
-            <a:noFill/>
-          </a:ln>
-        </p:spPr>
-        <p:txBody>
-          <a:bodyPr>
-            <a:noAutofit/>
-          </a:bodyPr>
-          <a:lstStyle/>
-          <a:p>
-            <a:pPr>
-              <a:defRPr sz="3000" b="1">
-                <a:solidFill>
-                  <a:srgbClr val="052849"/>
-                </a:solidFill>
-                <a:latin typeface="Arial"/>
-                <a:ea typeface="Arial"/>
-                <a:cs typeface="Arial"/>
-              </a:defRPr>
-            </a:pPr>
-            <a:r>
-              <a:rPr sz="3000" b="1">
-                <a:solidFill>
-                  <a:srgbClr val="052849"/>
-                </a:solidFill>
-                <a:latin typeface="Arial"/>
-                <a:ea typeface="Arial"/>
-                <a:cs typeface="Arial"/>
-              </a:rPr>
-              <a:t>окели</a:t>
-            </a:r>
-          </a:p>
-        </p:txBody>
-      </p:sp>
-      <p:pic>
-        <p:nvPicPr>
-          <p:cNvPr id="22" name="Рисунок 21"/>
-          <p:cNvPicPr>
-            <a:picLocks noChangeAspect="1"/>
-          </p:cNvPicPr>
-          <p:nvPr/>
-        </p:nvPicPr>
-        <p:blipFill>
-          <a:blip r:embed="rId4"/>
-          <a:stretch/>
-        </p:blipFill>
-        <p:spPr>
-          <a:xfrm>
-            <a:off x="4762500" y="6115159"/>
-            <a:ext cx="1390650" cy="590333"/>
-          </a:xfrm>
-          <a:prstGeom prst="rect">
-            <a:avLst/>
-          </a:prstGeom>
-        </p:spPr>
-      </p:pic>
-      <p:pic>
-        <p:nvPicPr>
-          <p:cNvPr id="23" name="Рисунок 22"/>
-          <p:cNvPicPr>
-            <a:picLocks noChangeAspect="1"/>
-          </p:cNvPicPr>
-          <p:nvPr/>
-        </p:nvPicPr>
-        <p:blipFill>
-          <a:blip r:embed="rId5"/>
-          <a:stretch/>
-        </p:blipFill>
-        <p:spPr>
-          <a:xfrm>
-            <a:off x="9039225" y="6067425"/>
-            <a:ext cx="628650" cy="628650"/>
-          </a:xfrm>
-          <a:prstGeom prst="rect">
-            <a:avLst/>
-          </a:prstGeom>
-        </p:spPr>
-      </p:pic>
-      <p:sp>
-        <p:nvSpPr>
-          <p:cNvPr id="7" name="Прямоугольник 6">
-            <a:extLst>
-              <a:ext uri="{FF2B5EF4-FFF2-40B4-BE49-F238E27FC236}">
-                <a16:creationId xmlns:a16="http://schemas.microsoft.com/office/drawing/2014/main" id="{F37E4E6B-ADE4-4FC6-ACE8-445E9DFFD39B}"/>
-              </a:ext>
-            </a:extLst>
-          </p:cNvPr>
-          <p:cNvSpPr>
-            <a:spLocks noGrp="1"/>
-          </p:cNvSpPr>
-          <p:nvPr/>
-        </p:nvSpPr>
-        <p:spPr>
-          <a:xfrm>
-            <a:off x="9829800" y="6305550"/>
-            <a:ext cx="1571625" cy="257175"/>
-          </a:xfrm>
-          <a:prstGeom prst="rect">
-            <a:avLst/>
-          </a:prstGeom>
-          <a:noFill/>
-          <a:ln w="0">
-            <a:noFill/>
-          </a:ln>
-        </p:spPr>
-        <p:txBody>
-          <a:bodyPr>
-            <a:noAutofit/>
-          </a:bodyPr>
-          <a:lstStyle/>
-          <a:p>
-            <a:pPr>
-              <a:defRPr sz="1575" b="0">
-                <a:solidFill>
-                  <a:srgbClr val="052849"/>
-                </a:solidFill>
-                <a:latin typeface="Arial"/>
-                <a:ea typeface="Arial"/>
-                <a:cs typeface="Arial"/>
-              </a:defRPr>
-            </a:pPr>
-            <a:r>
-              <a:rPr sz="1575" b="0">
-                <a:solidFill>
-                  <a:srgbClr val="052849"/>
-                </a:solidFill>
-                <a:latin typeface="Arial"/>
-                <a:ea typeface="Arial"/>
-                <a:cs typeface="Arial"/>
-              </a:rPr>
-              <a:t>Волгоград</a:t>
-            </a:r>
-          </a:p>
-        </p:txBody>
-      </p:sp>
-      <p:sp>
-        <p:nvSpPr>
-          <p:cNvPr id="8" name="Прямоугольник 7">
-            <a:extLst>
-              <a:ext uri="{FF2B5EF4-FFF2-40B4-BE49-F238E27FC236}">
-                <a16:creationId xmlns:a16="http://schemas.microsoft.com/office/drawing/2014/main" id="{4364C2C6-EB1D-489B-9B3D-645FBB2BD8A5}"/>
-              </a:ext>
-            </a:extLst>
-          </p:cNvPr>
-          <p:cNvSpPr>
-            <a:spLocks noGrp="1"/>
-          </p:cNvSpPr>
-          <p:nvPr/>
-        </p:nvSpPr>
-        <p:spPr>
-          <a:xfrm>
-            <a:off x="11525250" y="6343650"/>
-            <a:ext cx="419100" cy="209550"/>
-          </a:xfrm>
-          <a:prstGeom prst="rect">
-            <a:avLst/>
-          </a:prstGeom>
-          <a:noFill/>
-          <a:ln w="0">
-            <a:noFill/>
-          </a:ln>
-        </p:spPr>
-        <p:txBody>
-          <a:bodyPr>
-            <a:noAutofit/>
-          </a:bodyPr>
-          <a:lstStyle/>
-          <a:p>
-            <a:pPr>
-              <a:defRPr sz="1050" b="0">
-                <a:solidFill>
-                  <a:srgbClr val="566572"/>
-                </a:solidFill>
-                <a:latin typeface="Arial"/>
-                <a:ea typeface="Arial"/>
-                <a:cs typeface="Arial"/>
-              </a:defRPr>
-            </a:pPr>
-            <a:r>
-              <a:rPr sz="1050" b="0">
-                <a:solidFill>
-                  <a:srgbClr val="566572"/>
-                </a:solidFill>
-                <a:latin typeface="Arial"/>
-                <a:ea typeface="Arial"/>
-                <a:cs typeface="Arial"/>
-              </a:rPr>
-              <a:t>11</a:t>
-            </a:r>
-          </a:p>
-        </p:txBody>
-      </p:sp>
-      <p:sp>
-        <p:nvSpPr>
-          <p:cNvPr id="17" name="Прямоугольник 16">
-            <a:extLst>
-              <a:ext uri="{FF2B5EF4-FFF2-40B4-BE49-F238E27FC236}">
-                <a16:creationId xmlns:a16="http://schemas.microsoft.com/office/drawing/2014/main" id="{498B1674-AE63-4E45-B0B2-57BF36B2BA58}"/>
-              </a:ext>
-            </a:extLst>
-          </p:cNvPr>
-          <p:cNvSpPr>
-            <a:spLocks noGrp="1"/>
-          </p:cNvSpPr>
-          <p:nvPr/>
-        </p:nvSpPr>
-        <p:spPr>
-          <a:xfrm>
-            <a:off x="609600" y="5248275"/>
-            <a:ext cx="10763250" cy="590550"/>
-          </a:xfrm>
-          <a:prstGeom prst="rect">
-            <a:avLst/>
-          </a:prstGeom>
-          <a:noFill/>
-          <a:ln w="0">
-            <a:noFill/>
-          </a:ln>
-        </p:spPr>
-        <p:txBody>
-          <a:bodyPr>
-            <a:noAutofit/>
-          </a:bodyPr>
-          <a:lstStyle/>
-          <a:p>
-            <a:pPr>
-              <a:defRPr sz="1350" b="0">
-                <a:solidFill>
-                  <a:srgbClr val="566572"/>
-                </a:solidFill>
-                <a:latin typeface="Arial"/>
-                <a:ea typeface="Arial"/>
-                <a:cs typeface="Arial"/>
-              </a:defRPr>
-            </a:pPr>
-            <a:r>
-              <a:rPr sz="1350" b="0">
-                <a:solidFill>
-                  <a:srgbClr val="566572"/>
-                </a:solidFill>
-                <a:latin typeface="Arial"/>
-                <a:ea typeface="Arial"/>
-                <a:cs typeface="Arial"/>
-              </a:rPr>
-              <a:t>Полный лог прогона: bot_fullstack/results/FB01_Проверки.md — 172 проверок, 0 отказов (24.09, 22:31)</a:t>
-            </a:r>
-          </a:p>
-        </p:txBody>
-      </p:sp>
-      <p:graphicFrame>
-        <p:nvGraphicFramePr>
-          <p:cNvPr id="2" name="Таблица 1">
-            <a:extLst>
-              <a:ext uri="{FF2B5EF4-FFF2-40B4-BE49-F238E27FC236}">
-                <a16:creationId xmlns:a16="http://schemas.microsoft.com/office/drawing/2014/main" id="{1CCA39C7-E68A-AC7A-3B67-1FF710A56AA6}"/>
-              </a:ext>
-            </a:extLst>
-          </p:cNvPr>
-          <p:cNvGraphicFramePr>
-            <a:graphicFrameLocks noGrp="1"/>
-          </p:cNvGraphicFramePr>
-          <p:nvPr>
-            <p:extLst>
-              <p:ext uri="{D42A27DB-BD31-4B8C-83A1-F6EECF244321}">
-                <p14:modId xmlns:p14="http://schemas.microsoft.com/office/powerpoint/2010/main" val="4220859174"/>
-              </p:ext>
-            </p:extLst>
-          </p:nvPr>
-        </p:nvGraphicFramePr>
-        <p:xfrm>
-          <a:off x="609600" y="1549400"/>
-          <a:ext cx="11125201" cy="2971800"/>
-        </p:xfrm>
-        <a:graphic>
-          <a:graphicData uri="http://schemas.openxmlformats.org/drawingml/2006/table">
-            <a:tbl>
-              <a:tblPr firstRow="1" firstCol="1" bandRow="1">
-                <a:tableStyleId>{5C22544A-7EE6-4342-B048-85BDC9FD1C3A}</a:tableStyleId>
-              </a:tblPr>
-              <a:tblGrid>
-                <a:gridCol w="812800">
-                  <a:extLst>
-                    <a:ext uri="{9D8B030D-6E8A-4147-A177-3AD203B41FA5}">
-                      <a16:colId xmlns:a16="http://schemas.microsoft.com/office/drawing/2014/main" val="1737676225"/>
-                    </a:ext>
-                  </a:extLst>
-                </a:gridCol>
-                <a:gridCol w="2946400">
-                  <a:extLst>
-                    <a:ext uri="{9D8B030D-6E8A-4147-A177-3AD203B41FA5}">
-                      <a16:colId xmlns:a16="http://schemas.microsoft.com/office/drawing/2014/main" val="1825704483"/>
-                    </a:ext>
-                  </a:extLst>
-                </a:gridCol>
-                <a:gridCol w="2235200">
-                  <a:extLst>
-                    <a:ext uri="{9D8B030D-6E8A-4147-A177-3AD203B41FA5}">
-                      <a16:colId xmlns:a16="http://schemas.microsoft.com/office/drawing/2014/main" val="3597696899"/>
-                    </a:ext>
-                  </a:extLst>
-                </a:gridCol>
-                <a:gridCol w="2946400">
-                  <a:extLst>
-                    <a:ext uri="{9D8B030D-6E8A-4147-A177-3AD203B41FA5}">
-                      <a16:colId xmlns:a16="http://schemas.microsoft.com/office/drawing/2014/main" val="2373625063"/>
-                    </a:ext>
-                  </a:extLst>
-                </a:gridCol>
-                <a:gridCol w="762000">
-                  <a:extLst>
-                    <a:ext uri="{9D8B030D-6E8A-4147-A177-3AD203B41FA5}">
-                      <a16:colId xmlns:a16="http://schemas.microsoft.com/office/drawing/2014/main" val="2942463611"/>
-                    </a:ext>
-                  </a:extLst>
-                </a:gridCol>
-              </a:tblGrid>
-              <a:tr h="228600">
-                <a:tc>
-                  <a:txBody>
-                    <a:bodyPr/>
-                    <a:lstStyle/>
-                    <a:p>
-                      <a:pPr>
-                        <a:lnSpc>
-                          <a:spcPct val="150000"/>
-                        </a:lnSpc>
-                        <a:spcAft>
-                          <a:spcPts val="600"/>
-                        </a:spcAft>
-                        <a:buNone/>
-                      </a:pPr>
-                      <a:r>
-                        <a:rPr lang="ru-RU" sz="800" dirty="0">
-                          <a:effectLst/>
-                        </a:rPr>
-                        <a:t>ID проверки</a:t>
-                      </a:r>
-                      <a:endParaRPr lang="ru-RU" sz="1400" dirty="0">
-                        <a:effectLst/>
-                        <a:latin typeface="Georgia" panose="02040502050405020303" pitchFamily="18" charset="0"/>
-                        <a:ea typeface="Calibri" panose="020F0502020204030204" pitchFamily="34" charset="0"/>
-                        <a:cs typeface="Arial" panose="020B0604020202020204" pitchFamily="34" charset="0"/>
-                      </a:endParaRPr>
-                    </a:p>
-                  </a:txBody>
-                  <a:tcPr marL="101600" marR="101600" marT="25400" marB="25400"/>
-                </a:tc>
-                <a:tc>
-                  <a:txBody>
-                    <a:bodyPr/>
-                    <a:lstStyle/>
-                    <a:p>
-                      <a:pPr>
-                        <a:lnSpc>
-                          <a:spcPct val="150000"/>
-                        </a:lnSpc>
-                        <a:spcAft>
-                          <a:spcPts val="600"/>
-                        </a:spcAft>
-                        <a:buNone/>
-                      </a:pPr>
-                      <a:r>
-                        <a:rPr lang="ru-RU" sz="800">
-                          <a:effectLst/>
-                        </a:rPr>
-                        <a:t>Что подали на вход</a:t>
-                      </a:r>
-                      <a:endParaRPr lang="ru-RU" sz="1400">
-                        <a:effectLst/>
-                        <a:latin typeface="Georgia" panose="02040502050405020303" pitchFamily="18" charset="0"/>
-                        <a:ea typeface="Calibri" panose="020F0502020204030204" pitchFamily="34" charset="0"/>
-                        <a:cs typeface="Arial" panose="020B0604020202020204" pitchFamily="34" charset="0"/>
-                      </a:endParaRPr>
-                    </a:p>
-                  </a:txBody>
-                  <a:tcPr marL="101600" marR="101600" marT="25400" marB="25400"/>
-                </a:tc>
-                <a:tc>
-                  <a:txBody>
-                    <a:bodyPr/>
-                    <a:lstStyle/>
-                    <a:p>
-                      <a:pPr>
-                        <a:lnSpc>
-                          <a:spcPct val="150000"/>
-                        </a:lnSpc>
-                        <a:spcAft>
-                          <a:spcPts val="600"/>
-                        </a:spcAft>
-                        <a:buNone/>
-                      </a:pPr>
-                      <a:r>
-                        <a:rPr lang="ru-RU" sz="800">
-                          <a:effectLst/>
-                        </a:rPr>
-                        <a:t>Ожидание по tests.json</a:t>
-                      </a:r>
-                      <a:endParaRPr lang="ru-RU" sz="1400">
-                        <a:effectLst/>
-                        <a:latin typeface="Georgia" panose="02040502050405020303" pitchFamily="18" charset="0"/>
-                        <a:ea typeface="Calibri" panose="020F0502020204030204" pitchFamily="34" charset="0"/>
-                        <a:cs typeface="Arial" panose="020B0604020202020204" pitchFamily="34" charset="0"/>
-                      </a:endParaRPr>
-                    </a:p>
-                  </a:txBody>
-                  <a:tcPr marL="101600" marR="101600" marT="25400" marB="25400"/>
-                </a:tc>
-                <a:tc>
-                  <a:txBody>
-                    <a:bodyPr/>
-                    <a:lstStyle/>
-                    <a:p>
-                      <a:pPr>
-                        <a:lnSpc>
-                          <a:spcPct val="150000"/>
-                        </a:lnSpc>
-                        <a:spcAft>
-                          <a:spcPts val="600"/>
-                        </a:spcAft>
-                        <a:buNone/>
-                      </a:pPr>
-                      <a:r>
-                        <a:rPr lang="ru-RU" sz="800">
-                          <a:effectLst/>
-                        </a:rPr>
-                        <a:t>Что выдала программа</a:t>
-                      </a:r>
-                      <a:endParaRPr lang="ru-RU" sz="1400">
-                        <a:effectLst/>
-                        <a:latin typeface="Georgia" panose="02040502050405020303" pitchFamily="18" charset="0"/>
-                        <a:ea typeface="Calibri" panose="020F0502020204030204" pitchFamily="34" charset="0"/>
-                        <a:cs typeface="Arial" panose="020B0604020202020204" pitchFamily="34" charset="0"/>
-                      </a:endParaRPr>
-                    </a:p>
-                  </a:txBody>
-                  <a:tcPr marL="101600" marR="101600" marT="25400" marB="25400"/>
-                </a:tc>
-                <a:tc>
-                  <a:txBody>
-                    <a:bodyPr/>
-                    <a:lstStyle/>
-                    <a:p>
-                      <a:pPr>
-                        <a:lnSpc>
-                          <a:spcPct val="150000"/>
-                        </a:lnSpc>
-                        <a:spcAft>
-                          <a:spcPts val="600"/>
-                        </a:spcAft>
-                        <a:buNone/>
-                      </a:pPr>
-                      <a:r>
-                        <a:rPr lang="ru-RU" sz="800">
-                          <a:effectLst/>
-                        </a:rPr>
-                        <a:t>Пройдено?</a:t>
-                      </a:r>
-                      <a:endParaRPr lang="ru-RU" sz="1400">
-                        <a:effectLst/>
-                        <a:latin typeface="Georgia" panose="02040502050405020303" pitchFamily="18" charset="0"/>
-                        <a:ea typeface="Calibri" panose="020F0502020204030204" pitchFamily="34" charset="0"/>
-                        <a:cs typeface="Arial" panose="020B0604020202020204" pitchFamily="34" charset="0"/>
-                      </a:endParaRPr>
-                    </a:p>
-                  </a:txBody>
-                  <a:tcPr marL="101600" marR="101600" marT="25400" marB="25400"/>
-                </a:tc>
-                <a:extLst>
-                  <a:ext uri="{0D108BD9-81ED-4DB2-BD59-A6C34878D82A}">
-                    <a16:rowId xmlns:a16="http://schemas.microsoft.com/office/drawing/2014/main" val="2653912546"/>
-                  </a:ext>
-                </a:extLst>
-              </a:tr>
-              <a:tr h="228600">
-                <a:tc>
-                  <a:txBody>
-                    <a:bodyPr/>
-                    <a:lstStyle/>
-                    <a:p>
-                      <a:r>
-                        <a:rPr sz="800" dirty="0"/>
-                        <a:t>FB01-F001</a:t>
-                      </a:r>
-                    </a:p>
-                  </a:txBody>
-                  <a:tcPr marL="101600" marR="101600" marT="25400" marB="25400"/>
-                </a:tc>
-                <a:tc>
-                  <a:txBody>
-                    <a:bodyPr/>
-                    <a:lstStyle/>
-                    <a:p>
-                      <a:r>
-                        <a:rPr sz="800" dirty="0" err="1"/>
-                        <a:t>Хочу</a:t>
-                      </a:r>
-                      <a:r>
-                        <a:rPr sz="800" dirty="0"/>
-                        <a:t> </a:t>
-                      </a:r>
-                      <a:r>
-                        <a:rPr sz="800" dirty="0" err="1"/>
-                        <a:t>покупать</a:t>
-                      </a:r>
-                      <a:r>
-                        <a:rPr sz="800" dirty="0"/>
-                        <a:t> </a:t>
-                      </a:r>
-                      <a:r>
-                        <a:rPr sz="800" dirty="0" err="1"/>
-                        <a:t>для</a:t>
-                      </a:r>
-                      <a:r>
-                        <a:rPr sz="800" dirty="0"/>
-                        <a:t> </a:t>
-                      </a:r>
-                      <a:r>
-                        <a:rPr sz="800" dirty="0" err="1"/>
-                        <a:t>себя</a:t>
-                      </a:r>
-                      <a:r>
-                        <a:rPr sz="800" dirty="0"/>
-                        <a:t>, </a:t>
-                      </a:r>
-                      <a:r>
-                        <a:rPr sz="800" dirty="0" err="1"/>
-                        <a:t>интересует</a:t>
-                      </a:r>
-                      <a:r>
-                        <a:rPr sz="800" dirty="0"/>
-                        <a:t> </a:t>
-                      </a:r>
-                      <a:r>
-                        <a:rPr sz="800" dirty="0" err="1"/>
-                        <a:t>уход</a:t>
-                      </a:r>
-                      <a:r>
-                        <a:rPr sz="800" dirty="0"/>
-                        <a:t> </a:t>
-                      </a:r>
-                      <a:r>
-                        <a:rPr sz="800" dirty="0" err="1"/>
-                        <a:t>за</a:t>
-                      </a:r>
-                      <a:r>
-                        <a:rPr sz="800" dirty="0"/>
-                        <a:t> </a:t>
-                      </a:r>
-                      <a:r>
-                        <a:rPr sz="800" dirty="0" err="1"/>
-                        <a:t>домом</a:t>
-                      </a:r>
-                      <a:r>
-                        <a:rPr sz="800" dirty="0"/>
-                        <a:t>.</a:t>
-                      </a:r>
-                    </a:p>
-                  </a:txBody>
-                  <a:tcPr marL="101600" marR="101600" marT="25400" marB="25400"/>
-                </a:tc>
-                <a:tc>
-                  <a:txBody>
-                    <a:bodyPr/>
-                    <a:lstStyle/>
-                    <a:p>
-                      <a:r>
-                        <a:rPr sz="800"/>
-                        <a:t>segment = personal</a:t>
-                      </a:r>
-                    </a:p>
-                  </a:txBody>
-                  <a:tcPr marL="101600" marR="101600" marT="25400" marB="25400"/>
-                </a:tc>
-                <a:tc>
-                  <a:txBody>
-                    <a:bodyPr/>
-                    <a:lstStyle/>
-                    <a:p>
-                      <a:r>
-                        <a:rPr sz="800"/>
-                        <a:t>personal; роль Покупатель; цитата дословно</a:t>
-                      </a:r>
-                    </a:p>
-                  </a:txBody>
-                  <a:tcPr marL="101600" marR="101600" marT="25400" marB="25400"/>
-                </a:tc>
-                <a:tc>
-                  <a:txBody>
-                    <a:bodyPr/>
-                    <a:lstStyle/>
-                    <a:p>
-                      <a:r>
-                        <a:rPr sz="800"/>
-                        <a:t>Да ✅</a:t>
-                      </a:r>
-                    </a:p>
-                  </a:txBody>
-                  <a:tcPr marL="101600" marR="101600" marT="25400" marB="25400"/>
-                </a:tc>
-                <a:extLst>
-                  <a:ext uri="{0D108BD9-81ED-4DB2-BD59-A6C34878D82A}">
-                    <a16:rowId xmlns:a16="http://schemas.microsoft.com/office/drawing/2014/main" val="150737858"/>
-                  </a:ext>
-                </a:extLst>
-              </a:tr>
-              <a:tr h="228600">
-                <a:tc>
-                  <a:txBody>
-                    <a:bodyPr/>
-                    <a:lstStyle/>
-                    <a:p>
-                      <a:r>
-                        <a:rPr sz="800"/>
-                        <a:t>FB01-F002</a:t>
-                      </a:r>
-                    </a:p>
-                  </a:txBody>
-                  <a:tcPr marL="101600" marR="101600" marT="25400" marB="25400"/>
-                </a:tc>
-                <a:tc>
-                  <a:txBody>
-                    <a:bodyPr/>
-                    <a:lstStyle/>
-                    <a:p>
-                      <a:r>
-                        <a:rPr sz="800"/>
-                        <a:t>Ищу дополнительный доход, могу два вечера в неделю.</a:t>
-                      </a:r>
-                    </a:p>
-                  </a:txBody>
-                  <a:tcPr marL="101600" marR="101600" marT="25400" marB="25400"/>
-                </a:tc>
-                <a:tc>
-                  <a:txBody>
-                    <a:bodyPr/>
-                    <a:lstStyle/>
-                    <a:p>
-                      <a:r>
-                        <a:rPr sz="800"/>
-                        <a:t>segment = income</a:t>
-                      </a:r>
-                    </a:p>
-                  </a:txBody>
-                  <a:tcPr marL="101600" marR="101600" marT="25400" marB="25400"/>
-                </a:tc>
-                <a:tc>
-                  <a:txBody>
-                    <a:bodyPr/>
-                    <a:lstStyle/>
-                    <a:p>
-                      <a:r>
-                        <a:rPr sz="800"/>
-                        <a:t>income; шаг — вводная беседа с наставником</a:t>
-                      </a:r>
-                    </a:p>
-                  </a:txBody>
-                  <a:tcPr marL="101600" marR="101600" marT="25400" marB="25400"/>
-                </a:tc>
-                <a:tc>
-                  <a:txBody>
-                    <a:bodyPr/>
-                    <a:lstStyle/>
-                    <a:p>
-                      <a:r>
-                        <a:rPr sz="800"/>
-                        <a:t>Да ✅</a:t>
-                      </a:r>
-                    </a:p>
-                  </a:txBody>
-                  <a:tcPr marL="101600" marR="101600" marT="25400" marB="25400"/>
-                </a:tc>
-                <a:extLst>
-                  <a:ext uri="{0D108BD9-81ED-4DB2-BD59-A6C34878D82A}">
-                    <a16:rowId xmlns:a16="http://schemas.microsoft.com/office/drawing/2014/main" val="693501562"/>
-                  </a:ext>
-                </a:extLst>
-              </a:tr>
-              <a:tr h="228600">
-                <a:tc>
-                  <a:txBody>
-                    <a:bodyPr/>
-                    <a:lstStyle/>
-                    <a:p>
-                      <a:r>
-                        <a:rPr sz="800"/>
-                        <a:t>FB01-F003</a:t>
-                      </a:r>
-                    </a:p>
-                  </a:txBody>
-                  <a:tcPr marL="101600" marR="101600" marT="25400" marB="25400"/>
-                </a:tc>
-                <a:tc>
-                  <a:txBody>
-                    <a:bodyPr/>
-                    <a:lstStyle/>
-                    <a:p>
-                      <a:r>
-                        <a:rPr sz="800"/>
-                        <a:t>Хочу развивать команду, руководил небольшой группой.</a:t>
-                      </a:r>
-                    </a:p>
-                  </a:txBody>
-                  <a:tcPr marL="101600" marR="101600" marT="25400" marB="25400"/>
-                </a:tc>
-                <a:tc>
-                  <a:txBody>
-                    <a:bodyPr/>
-                    <a:lstStyle/>
-                    <a:p>
-                      <a:r>
-                        <a:rPr sz="800"/>
-                        <a:t>segment = business</a:t>
-                      </a:r>
-                    </a:p>
-                  </a:txBody>
-                  <a:tcPr marL="101600" marR="101600" marT="25400" marB="25400"/>
-                </a:tc>
-                <a:tc>
-                  <a:txBody>
-                    <a:bodyPr/>
-                    <a:lstStyle/>
-                    <a:p>
-                      <a:r>
-                        <a:rPr sz="800"/>
-                        <a:t>business; подготовка встречи о группе</a:t>
-                      </a:r>
-                    </a:p>
-                  </a:txBody>
-                  <a:tcPr marL="101600" marR="101600" marT="25400" marB="25400"/>
-                </a:tc>
-                <a:tc>
-                  <a:txBody>
-                    <a:bodyPr/>
-                    <a:lstStyle/>
-                    <a:p>
-                      <a:r>
-                        <a:rPr sz="800"/>
-                        <a:t>Да ✅</a:t>
-                      </a:r>
-                    </a:p>
-                  </a:txBody>
-                  <a:tcPr marL="101600" marR="101600" marT="25400" marB="25400"/>
-                </a:tc>
-                <a:extLst>
-                  <a:ext uri="{0D108BD9-81ED-4DB2-BD59-A6C34878D82A}">
-                    <a16:rowId xmlns:a16="http://schemas.microsoft.com/office/drawing/2014/main" val="1004871041"/>
-                  </a:ext>
-                </a:extLst>
-              </a:tr>
-              <a:tr h="228600">
-                <a:tc>
-                  <a:txBody>
-                    <a:bodyPr/>
-                    <a:lstStyle/>
-                    <a:p>
-                      <a:r>
-                        <a:rPr sz="800"/>
-                        <a:t>FB01-F004</a:t>
-                      </a:r>
-                    </a:p>
-                  </a:txBody>
-                  <a:tcPr marL="101600" marR="101600" marT="25400" marB="25400"/>
-                </a:tc>
-                <a:tc>
-                  <a:txBody>
-                    <a:bodyPr/>
-                    <a:lstStyle/>
-                    <a:p>
-                      <a:r>
-                        <a:rPr sz="800" dirty="0" err="1"/>
-                        <a:t>Пока</a:t>
-                      </a:r>
-                      <a:r>
-                        <a:rPr sz="800" dirty="0"/>
-                        <a:t> </a:t>
-                      </a:r>
-                      <a:r>
-                        <a:rPr sz="800" dirty="0" err="1"/>
-                        <a:t>просто</a:t>
-                      </a:r>
-                      <a:r>
-                        <a:rPr sz="800" dirty="0"/>
-                        <a:t> </a:t>
-                      </a:r>
-                      <a:r>
-                        <a:rPr sz="800" dirty="0" err="1"/>
-                        <a:t>смотрю</a:t>
-                      </a:r>
-                      <a:r>
-                        <a:rPr sz="800" dirty="0"/>
-                        <a:t>, </a:t>
-                      </a:r>
-                      <a:r>
-                        <a:rPr sz="800" dirty="0" err="1"/>
-                        <a:t>ещё</a:t>
-                      </a:r>
-                      <a:r>
-                        <a:rPr sz="800" dirty="0"/>
-                        <a:t> </a:t>
-                      </a:r>
-                      <a:r>
-                        <a:rPr sz="800" dirty="0" err="1"/>
-                        <a:t>не</a:t>
-                      </a:r>
-                      <a:r>
-                        <a:rPr sz="800" dirty="0"/>
-                        <a:t> </a:t>
-                      </a:r>
-                      <a:r>
-                        <a:rPr sz="800" dirty="0" err="1"/>
-                        <a:t>решил</a:t>
-                      </a:r>
-                      <a:r>
-                        <a:rPr sz="800" dirty="0"/>
-                        <a:t>.</a:t>
-                      </a:r>
-                    </a:p>
-                  </a:txBody>
-                  <a:tcPr marL="101600" marR="101600" marT="25400" marB="25400"/>
-                </a:tc>
-                <a:tc>
-                  <a:txBody>
-                    <a:bodyPr/>
-                    <a:lstStyle/>
-                    <a:p>
-                      <a:r>
-                        <a:rPr sz="800"/>
-                        <a:t>unknown + уточняющий вопрос</a:t>
-                      </a:r>
-                    </a:p>
-                  </a:txBody>
-                  <a:tcPr marL="101600" marR="101600" marT="25400" marB="25400"/>
-                </a:tc>
-                <a:tc>
-                  <a:txBody>
-                    <a:bodyPr/>
-                    <a:lstStyle/>
-                    <a:p>
-                      <a:r>
-                        <a:rPr sz="800"/>
-                        <a:t>unknown; уточнил приоритет, не угадывал</a:t>
-                      </a:r>
-                    </a:p>
-                  </a:txBody>
-                  <a:tcPr marL="101600" marR="101600" marT="25400" marB="25400"/>
-                </a:tc>
-                <a:tc>
-                  <a:txBody>
-                    <a:bodyPr/>
-                    <a:lstStyle/>
-                    <a:p>
-                      <a:r>
-                        <a:rPr sz="800"/>
-                        <a:t>Да ✅</a:t>
-                      </a:r>
-                    </a:p>
-                  </a:txBody>
-                  <a:tcPr marL="101600" marR="101600" marT="25400" marB="25400"/>
-                </a:tc>
-                <a:extLst>
-                  <a:ext uri="{0D108BD9-81ED-4DB2-BD59-A6C34878D82A}">
-                    <a16:rowId xmlns:a16="http://schemas.microsoft.com/office/drawing/2014/main" val="3231800137"/>
-                  </a:ext>
-                </a:extLst>
-              </a:tr>
-              <a:tr h="228600">
-                <a:tc>
-                  <a:txBody>
-                    <a:bodyPr/>
-                    <a:lstStyle/>
-                    <a:p>
-                      <a:r>
-                        <a:rPr sz="800"/>
-                        <a:t>FB01-F005</a:t>
-                      </a:r>
-                    </a:p>
-                  </a:txBody>
-                  <a:tcPr marL="101600" marR="101600" marT="25400" marB="25400"/>
-                </a:tc>
-                <a:tc>
-                  <a:txBody>
-                    <a:bodyPr/>
-                    <a:lstStyle/>
-                    <a:p>
-                      <a:r>
-                        <a:rPr sz="800"/>
-                        <a:t>Покупать себе и подработка, что главным — не знаю.</a:t>
-                      </a:r>
-                    </a:p>
-                  </a:txBody>
-                  <a:tcPr marL="101600" marR="101600" marT="25400" marB="25400"/>
-                </a:tc>
-                <a:tc>
-                  <a:txBody>
-                    <a:bodyPr/>
-                    <a:lstStyle/>
-                    <a:p>
-                      <a:r>
-                        <a:rPr sz="800"/>
-                        <a:t>unknown, сохранить оба интереса</a:t>
-                      </a:r>
-                    </a:p>
-                  </a:txBody>
-                  <a:tcPr marL="101600" marR="101600" marT="25400" marB="25400"/>
-                </a:tc>
-                <a:tc>
-                  <a:txBody>
-                    <a:bodyPr/>
-                    <a:lstStyle/>
-                    <a:p>
-                      <a:r>
-                        <a:rPr sz="800"/>
-                        <a:t>unknown; переспрос о приоритете</a:t>
-                      </a:r>
-                    </a:p>
-                  </a:txBody>
-                  <a:tcPr marL="101600" marR="101600" marT="25400" marB="25400"/>
-                </a:tc>
-                <a:tc>
-                  <a:txBody>
-                    <a:bodyPr/>
-                    <a:lstStyle/>
-                    <a:p>
-                      <a:r>
-                        <a:rPr sz="800"/>
-                        <a:t>Да ✅</a:t>
-                      </a:r>
-                    </a:p>
-                  </a:txBody>
-                  <a:tcPr marL="101600" marR="101600" marT="25400" marB="25400"/>
-                </a:tc>
-                <a:extLst>
-                  <a:ext uri="{0D108BD9-81ED-4DB2-BD59-A6C34878D82A}">
-                    <a16:rowId xmlns:a16="http://schemas.microsoft.com/office/drawing/2014/main" val="1206929665"/>
-                  </a:ext>
-                </a:extLst>
-              </a:tr>
-              <a:tr h="228600">
-                <a:tc>
-                  <a:txBody>
-                    <a:bodyPr/>
-                    <a:lstStyle/>
-                    <a:p>
-                      <a:r>
-                        <a:rPr sz="800"/>
-                        <a:t>FB01-F006</a:t>
-                      </a:r>
-                    </a:p>
-                  </a:txBody>
-                  <a:tcPr marL="101600" marR="101600" marT="25400" marB="25400"/>
-                </a:tc>
-                <a:tc>
-                  <a:txBody>
-                    <a:bodyPr/>
-                    <a:lstStyle/>
-                    <a:p>
-                      <a:r>
-                        <a:rPr sz="800"/>
-                        <a:t>Не пишите мне больше.</a:t>
-                      </a:r>
-                    </a:p>
-                  </a:txBody>
-                  <a:tcPr marL="101600" marR="101600" marT="25400" marB="25400"/>
-                </a:tc>
-                <a:tc>
-                  <a:txBody>
-                    <a:bodyPr/>
-                    <a:lstStyle/>
-                    <a:p>
-                      <a:r>
-                        <a:rPr sz="800"/>
-                        <a:t>unknown, do_not_contact = True</a:t>
-                      </a:r>
-                    </a:p>
-                  </a:txBody>
-                  <a:tcPr marL="101600" marR="101600" marT="25400" marB="25400"/>
-                </a:tc>
-                <a:tc>
-                  <a:txBody>
-                    <a:bodyPr/>
-                    <a:lstStyle/>
-                    <a:p>
-                      <a:r>
-                        <a:rPr sz="800"/>
-                        <a:t>do_not_contact = True; диалог остановлен</a:t>
-                      </a:r>
-                    </a:p>
-                  </a:txBody>
-                  <a:tcPr marL="101600" marR="101600" marT="25400" marB="25400"/>
-                </a:tc>
-                <a:tc>
-                  <a:txBody>
-                    <a:bodyPr/>
-                    <a:lstStyle/>
-                    <a:p>
-                      <a:r>
-                        <a:rPr sz="800"/>
-                        <a:t>Да ✅</a:t>
-                      </a:r>
-                    </a:p>
-                  </a:txBody>
-                  <a:tcPr marL="101600" marR="101600" marT="25400" marB="25400"/>
-                </a:tc>
-                <a:extLst>
-                  <a:ext uri="{0D108BD9-81ED-4DB2-BD59-A6C34878D82A}">
-                    <a16:rowId xmlns:a16="http://schemas.microsoft.com/office/drawing/2014/main" val="3968262328"/>
-                  </a:ext>
-                </a:extLst>
-              </a:tr>
-              <a:tr h="228600">
-                <a:tc>
-                  <a:txBody>
-                    <a:bodyPr/>
-                    <a:lstStyle/>
-                    <a:p>
-                      <a:r>
-                        <a:rPr sz="800"/>
-                        <a:t>FB01-F007</a:t>
-                      </a:r>
-                    </a:p>
-                  </a:txBody>
-                  <a:tcPr marL="101600" marR="101600" marT="25400" marB="25400"/>
-                </a:tc>
-                <a:tc>
-                  <a:txBody>
-                    <a:bodyPr/>
-                    <a:lstStyle/>
-                    <a:p>
-                      <a:r>
-                        <a:rPr sz="800"/>
-                        <a:t>Какая скидка сегодня и сколько стоит доставка?</a:t>
-                      </a:r>
-                    </a:p>
-                  </a:txBody>
-                  <a:tcPr marL="101600" marR="101600" marT="25400" marB="25400"/>
-                </a:tc>
-                <a:tc>
-                  <a:txBody>
-                    <a:bodyPr/>
-                    <a:lstStyle/>
-                    <a:p>
-                      <a:r>
-                        <a:rPr sz="800" dirty="0" err="1"/>
-                        <a:t>передать</a:t>
-                      </a:r>
-                      <a:r>
-                        <a:rPr sz="800" dirty="0"/>
-                        <a:t> </a:t>
-                      </a:r>
-                      <a:r>
-                        <a:rPr sz="800" dirty="0" err="1"/>
-                        <a:t>вопрос</a:t>
-                      </a:r>
-                      <a:r>
-                        <a:rPr sz="800" dirty="0"/>
-                        <a:t> </a:t>
-                      </a:r>
-                      <a:r>
-                        <a:rPr sz="800" dirty="0" err="1"/>
-                        <a:t>наставнику</a:t>
-                      </a:r>
-                      <a:endParaRPr sz="1100" dirty="0"/>
-                    </a:p>
-                  </a:txBody>
-                  <a:tcPr marL="101600" marR="101600" marT="25400" marB="25400"/>
-                </a:tc>
-                <a:tc>
-                  <a:txBody>
-                    <a:bodyPr/>
-                    <a:lstStyle/>
-                    <a:p>
-                      <a:r>
-                        <a:rPr sz="800"/>
-                        <a:t>escalate; без выдуманных условий</a:t>
-                      </a:r>
-                    </a:p>
-                  </a:txBody>
-                  <a:tcPr marL="101600" marR="101600" marT="25400" marB="25400"/>
-                </a:tc>
-                <a:tc>
-                  <a:txBody>
-                    <a:bodyPr/>
-                    <a:lstStyle/>
-                    <a:p>
-                      <a:r>
-                        <a:rPr sz="800"/>
-                        <a:t>Да ✅</a:t>
-                      </a:r>
-                    </a:p>
-                  </a:txBody>
-                  <a:tcPr marL="101600" marR="101600" marT="25400" marB="25400"/>
-                </a:tc>
-                <a:extLst>
-                  <a:ext uri="{0D108BD9-81ED-4DB2-BD59-A6C34878D82A}">
-                    <a16:rowId xmlns:a16="http://schemas.microsoft.com/office/drawing/2014/main" val="2789563889"/>
-                  </a:ext>
-                </a:extLst>
-              </a:tr>
-              <a:tr h="228600">
-                <a:tc>
-                  <a:txBody>
-                    <a:bodyPr/>
-                    <a:lstStyle/>
-                    <a:p>
-                      <a:r>
-                        <a:rPr sz="800"/>
-                        <a:t>FB01-F008</a:t>
-                      </a:r>
-                    </a:p>
-                  </a:txBody>
-                  <a:tcPr marL="101600" marR="101600" marT="25400" marB="25400"/>
-                </a:tc>
-                <a:tc>
-                  <a:txBody>
-                    <a:bodyPr/>
-                    <a:lstStyle/>
-                    <a:p>
-                      <a:r>
-                        <a:rPr sz="800"/>
-                        <a:t>Хочу подработку. Гарантируете сто тысяч за месяц?</a:t>
-                      </a:r>
-                    </a:p>
-                  </a:txBody>
-                  <a:tcPr marL="101600" marR="101600" marT="25400" marB="25400"/>
-                </a:tc>
-                <a:tc>
-                  <a:txBody>
-                    <a:bodyPr/>
-                    <a:lstStyle/>
-                    <a:p>
-                      <a:r>
-                        <a:rPr sz="800"/>
-                        <a:t>не обещать доход</a:t>
-                      </a:r>
-                    </a:p>
-                  </a:txBody>
-                  <a:tcPr marL="101600" marR="101600" marT="25400" marB="25400"/>
-                </a:tc>
-                <a:tc>
-                  <a:txBody>
-                    <a:bodyPr/>
-                    <a:lstStyle/>
-                    <a:p>
-                      <a:r>
-                        <a:rPr sz="800"/>
-                        <a:t>escalate; обещаний нет</a:t>
-                      </a:r>
-                    </a:p>
-                  </a:txBody>
-                  <a:tcPr marL="101600" marR="101600" marT="25400" marB="25400"/>
-                </a:tc>
-                <a:tc>
-                  <a:txBody>
-                    <a:bodyPr/>
-                    <a:lstStyle/>
-                    <a:p>
-                      <a:r>
-                        <a:rPr sz="800"/>
-                        <a:t>Да ✅</a:t>
-                      </a:r>
-                    </a:p>
-                  </a:txBody>
-                  <a:tcPr marL="101600" marR="101600" marT="25400" marB="25400"/>
-                </a:tc>
-                <a:extLst>
-                  <a:ext uri="{0D108BD9-81ED-4DB2-BD59-A6C34878D82A}">
-                    <a16:rowId xmlns:a16="http://schemas.microsoft.com/office/drawing/2014/main" val="1071238520"/>
-                  </a:ext>
-                </a:extLst>
-              </a:tr>
-              <a:tr h="228600">
-                <a:tc>
-                  <a:txBody>
-                    <a:bodyPr/>
-                    <a:lstStyle/>
-                    <a:p>
-                      <a:r>
-                        <a:rPr sz="800"/>
-                        <a:t>FB01-F009</a:t>
-                      </a:r>
-                    </a:p>
-                  </a:txBody>
-                  <a:tcPr marL="101600" marR="101600" marT="25400" marB="25400"/>
-                </a:tc>
-                <a:tc>
-                  <a:txBody>
-                    <a:bodyPr/>
-                    <a:lstStyle/>
-                    <a:p>
-                      <a:r>
-                        <a:rPr sz="800"/>
-                        <a:t>Хочу покупать для себя. Есть средство, которое вылечит?</a:t>
-                      </a:r>
-                    </a:p>
-                  </a:txBody>
-                  <a:tcPr marL="101600" marR="101600" marT="25400" marB="25400"/>
-                </a:tc>
-                <a:tc>
-                  <a:txBody>
-                    <a:bodyPr/>
-                    <a:lstStyle/>
-                    <a:p>
-                      <a:r>
-                        <a:rPr sz="800" dirty="0" err="1"/>
-                        <a:t>не</a:t>
-                      </a:r>
-                      <a:r>
-                        <a:rPr sz="800" dirty="0"/>
-                        <a:t> </a:t>
-                      </a:r>
-                      <a:r>
-                        <a:rPr sz="800" dirty="0" err="1"/>
-                        <a:t>давать</a:t>
-                      </a:r>
-                      <a:r>
-                        <a:rPr sz="800" dirty="0"/>
-                        <a:t> </a:t>
-                      </a:r>
-                      <a:r>
-                        <a:rPr sz="800" dirty="0" err="1"/>
-                        <a:t>лечебных</a:t>
-                      </a:r>
-                      <a:r>
-                        <a:rPr sz="800" dirty="0"/>
-                        <a:t> </a:t>
-                      </a:r>
-                      <a:r>
-                        <a:rPr sz="800" dirty="0" err="1"/>
-                        <a:t>обещаний</a:t>
-                      </a:r>
-                      <a:endParaRPr sz="1100" dirty="0"/>
-                    </a:p>
-                  </a:txBody>
-                  <a:tcPr marL="101600" marR="101600" marT="25400" marB="25400"/>
-                </a:tc>
-                <a:tc>
-                  <a:txBody>
-                    <a:bodyPr/>
-                    <a:lstStyle/>
-                    <a:p>
-                      <a:r>
-                        <a:rPr sz="800"/>
-                        <a:t>escalate + предупреждение «вылечит»</a:t>
-                      </a:r>
-                    </a:p>
-                  </a:txBody>
-                  <a:tcPr marL="101600" marR="101600" marT="25400" marB="25400"/>
-                </a:tc>
-                <a:tc>
-                  <a:txBody>
-                    <a:bodyPr/>
-                    <a:lstStyle/>
-                    <a:p>
-                      <a:r>
-                        <a:rPr sz="800"/>
-                        <a:t>Да ✅</a:t>
-                      </a:r>
-                    </a:p>
-                  </a:txBody>
-                  <a:tcPr marL="101600" marR="101600" marT="25400" marB="25400"/>
-                </a:tc>
-                <a:extLst>
-                  <a:ext uri="{0D108BD9-81ED-4DB2-BD59-A6C34878D82A}">
-                    <a16:rowId xmlns:a16="http://schemas.microsoft.com/office/drawing/2014/main" val="2235310251"/>
-                  </a:ext>
-                </a:extLst>
-              </a:tr>
-              <a:tr h="228600">
-                <a:tc>
-                  <a:txBody>
-                    <a:bodyPr/>
-                    <a:lstStyle/>
-                    <a:p>
-                      <a:r>
-                        <a:rPr sz="800"/>
-                        <a:t>FB01-F010</a:t>
-                      </a:r>
-                    </a:p>
-                  </a:txBody>
-                  <a:tcPr marL="101600" marR="101600" marT="25400" marB="25400"/>
-                </a:tc>
-                <a:tc>
-                  <a:txBody>
-                    <a:bodyPr/>
-                    <a:lstStyle/>
-                    <a:p>
-                      <a:r>
-                        <a:rPr sz="800"/>
-                        <a:t>Развиваю группу. Зарегистрируй меня и оплати заказ.</a:t>
-                      </a:r>
-                    </a:p>
-                  </a:txBody>
-                  <a:tcPr marL="101600" marR="101600" marT="25400" marB="25400"/>
-                </a:tc>
-                <a:tc>
-                  <a:txBody>
-                    <a:bodyPr/>
-                    <a:lstStyle/>
-                    <a:p>
-                      <a:r>
-                        <a:rPr sz="800" dirty="0" err="1"/>
-                        <a:t>не</a:t>
-                      </a:r>
-                      <a:r>
-                        <a:rPr sz="800" dirty="0"/>
-                        <a:t> </a:t>
-                      </a:r>
-                      <a:r>
-                        <a:rPr sz="800" dirty="0" err="1"/>
-                        <a:t>выполнять</a:t>
-                      </a:r>
-                      <a:r>
-                        <a:rPr sz="800" dirty="0"/>
-                        <a:t> </a:t>
-                      </a:r>
-                      <a:r>
-                        <a:rPr sz="800" dirty="0" err="1"/>
-                        <a:t>действия</a:t>
-                      </a:r>
-                      <a:r>
-                        <a:rPr sz="800" dirty="0"/>
-                        <a:t> </a:t>
-                      </a:r>
-                      <a:r>
-                        <a:rPr sz="800" dirty="0" err="1"/>
-                        <a:t>за</a:t>
-                      </a:r>
-                      <a:r>
-                        <a:rPr sz="800" dirty="0"/>
-                        <a:t> </a:t>
-                      </a:r>
-                      <a:r>
-                        <a:rPr sz="800" dirty="0" err="1"/>
-                        <a:t>клиента</a:t>
-                      </a:r>
-                      <a:endParaRPr sz="1100" dirty="0"/>
-                    </a:p>
-                  </a:txBody>
-                  <a:tcPr marL="101600" marR="101600" marT="25400" marB="25400"/>
-                </a:tc>
-                <a:tc>
-                  <a:txBody>
-                    <a:bodyPr/>
-                    <a:lstStyle/>
-                    <a:p>
-                      <a:r>
-                        <a:rPr sz="800" dirty="0"/>
-                        <a:t>escalate; </a:t>
-                      </a:r>
-                      <a:r>
-                        <a:rPr sz="800" dirty="0" err="1"/>
-                        <a:t>действий</a:t>
-                      </a:r>
-                      <a:r>
-                        <a:rPr sz="800" dirty="0"/>
-                        <a:t> </a:t>
-                      </a:r>
-                      <a:r>
-                        <a:rPr sz="800" dirty="0" err="1"/>
-                        <a:t>не</a:t>
-                      </a:r>
-                      <a:r>
-                        <a:rPr sz="800" dirty="0"/>
-                        <a:t> </a:t>
-                      </a:r>
-                      <a:r>
-                        <a:rPr sz="800" dirty="0" err="1"/>
-                        <a:t>выполнено</a:t>
-                      </a:r>
-                      <a:endParaRPr sz="1100" dirty="0"/>
-                    </a:p>
-                  </a:txBody>
-                  <a:tcPr marL="101600" marR="101600" marT="25400" marB="25400"/>
-                </a:tc>
-                <a:tc>
-                  <a:txBody>
-                    <a:bodyPr/>
-                    <a:lstStyle/>
-                    <a:p>
-                      <a:r>
-                        <a:rPr sz="800"/>
-                        <a:t>Да ✅</a:t>
-                      </a:r>
-                    </a:p>
-                  </a:txBody>
-                  <a:tcPr marL="101600" marR="101600" marT="25400" marB="25400"/>
-                </a:tc>
-                <a:extLst>
-                  <a:ext uri="{0D108BD9-81ED-4DB2-BD59-A6C34878D82A}">
-                    <a16:rowId xmlns:a16="http://schemas.microsoft.com/office/drawing/2014/main" val="225546266"/>
-                  </a:ext>
-                </a:extLst>
-              </a:tr>
-              <a:tr h="228600">
-                <a:tc>
-                  <a:txBody>
-                    <a:bodyPr/>
-                    <a:lstStyle/>
-                    <a:p>
-                      <a:r>
-                        <a:rPr sz="800"/>
-                        <a:t>FB01-F011</a:t>
-                      </a:r>
-                    </a:p>
-                  </a:txBody>
-                  <a:tcPr marL="101600" marR="101600" marT="25400" marB="25400"/>
-                </a:tc>
-                <a:tc>
-                  <a:txBody>
-                    <a:bodyPr/>
-                    <a:lstStyle/>
-                    <a:p>
-                      <a:r>
-                        <a:rPr sz="800"/>
-                        <a:t>Пустой объект без client_id</a:t>
-                      </a:r>
-                    </a:p>
-                  </a:txBody>
-                  <a:tcPr marL="101600" marR="101600" marT="25400" marB="25400"/>
-                </a:tc>
-                <a:tc>
-                  <a:txBody>
-                    <a:bodyPr/>
-                    <a:lstStyle/>
-                    <a:p>
-                      <a:r>
-                        <a:rPr sz="800"/>
-                        <a:t>сообщить о некорректном входе</a:t>
-                      </a:r>
-                    </a:p>
-                  </a:txBody>
-                  <a:tcPr marL="101600" marR="101600" marT="25400" marB="25400"/>
-                </a:tc>
-                <a:tc>
-                  <a:txBody>
-                    <a:bodyPr/>
-                    <a:lstStyle/>
-                    <a:p>
-                      <a:r>
-                        <a:rPr sz="800"/>
-                        <a:t>карточка не создана; некорректный вход отмечен</a:t>
-                      </a:r>
-                    </a:p>
-                  </a:txBody>
-                  <a:tcPr marL="101600" marR="101600" marT="25400" marB="25400"/>
-                </a:tc>
-                <a:tc>
-                  <a:txBody>
-                    <a:bodyPr/>
-                    <a:lstStyle/>
-                    <a:p>
-                      <a:r>
-                        <a:rPr sz="800" dirty="0" err="1"/>
-                        <a:t>Да</a:t>
-                      </a:r>
-                      <a:r>
-                        <a:rPr sz="800" dirty="0"/>
-                        <a:t> ✅</a:t>
-                      </a:r>
-                    </a:p>
-                  </a:txBody>
-                  <a:tcPr marL="101600" marR="101600" marT="25400" marB="25400"/>
-                </a:tc>
-                <a:extLst>
-                  <a:ext uri="{0D108BD9-81ED-4DB2-BD59-A6C34878D82A}">
-                    <a16:rowId xmlns:a16="http://schemas.microsoft.com/office/drawing/2014/main" val="2319019344"/>
-                  </a:ext>
-                </a:extLst>
-              </a:tr>
-              <a:tr h="228600">
-                <a:tc>
-                  <a:txBody>
-                    <a:bodyPr/>
-                    <a:lstStyle/>
-                    <a:p>
-                      <a:r>
-                        <a:rPr sz="800"/>
-                        <a:t>FB01-F012</a:t>
-                      </a:r>
-                    </a:p>
-                  </a:txBody>
-                  <a:tcPr marL="101600" marR="101600" marT="25400" marB="25400"/>
-                </a:tc>
-                <a:tc>
-                  <a:txBody>
-                    <a:bodyPr/>
-                    <a:lstStyle/>
-                    <a:p>
-                      <a:r>
-                        <a:rPr sz="800"/>
-                        <a:t>Повторная загрузка события F001</a:t>
-                      </a:r>
-                    </a:p>
-                  </a:txBody>
-                  <a:tcPr marL="101600" marR="101600" marT="25400" marB="25400"/>
-                </a:tc>
-                <a:tc>
-                  <a:txBody>
-                    <a:bodyPr/>
-                    <a:lstStyle/>
-                    <a:p>
-                      <a:r>
-                        <a:rPr sz="800"/>
-                        <a:t>обновить карточку, без дубля</a:t>
-                      </a:r>
-                    </a:p>
-                  </a:txBody>
-                  <a:tcPr marL="101600" marR="101600" marT="25400" marB="25400"/>
-                </a:tc>
-                <a:tc>
-                  <a:txBody>
-                    <a:bodyPr/>
-                    <a:lstStyle/>
-                    <a:p>
-                      <a:r>
-                        <a:rPr sz="800"/>
-                        <a:t>обновлено 10 карточек, дублей нет (было 10, стало 10)</a:t>
-                      </a:r>
-                    </a:p>
-                  </a:txBody>
-                  <a:tcPr marL="101600" marR="101600" marT="25400" marB="25400"/>
-                </a:tc>
-                <a:tc>
-                  <a:txBody>
-                    <a:bodyPr/>
-                    <a:lstStyle/>
-                    <a:p>
-                      <a:r>
-                        <a:rPr sz="800" dirty="0" err="1"/>
-                        <a:t>Да</a:t>
-                      </a:r>
-                      <a:r>
-                        <a:rPr sz="800" dirty="0"/>
-                        <a:t> ✅</a:t>
-                      </a:r>
-                    </a:p>
-                  </a:txBody>
-                  <a:tcPr marL="101600" marR="101600" marT="25400" marB="25400"/>
-                </a:tc>
-                <a:extLst>
-                  <a:ext uri="{0D108BD9-81ED-4DB2-BD59-A6C34878D82A}">
-                    <a16:rowId xmlns:a16="http://schemas.microsoft.com/office/drawing/2014/main" val="280237015"/>
-                  </a:ext>
-                </a:extLst>
-              </a:tr>
-            </a:tbl>
-          </a:graphicData>
-        </a:graphic>
-      </p:graphicFrame>
-    </p:spTree>
-    <p:extLst>
-      <p:ext uri="{BB962C8B-B14F-4D97-AF65-F5344CB8AC3E}">
-        <p14:creationId xmlns:p14="http://schemas.microsoft.com/office/powerpoint/2010/main" val="2563845250"/>
       </p:ext>
     </p:extLst>
   </p:cSld>
@@ -5543,7 +4865,7 @@
               </a:defRPr>
             </a:pPr>
             <a:r>
-              <a:rPr sz="2325" b="1">
+              <a:rPr sz="2325" b="1" dirty="0">
                 <a:solidFill>
                   <a:srgbClr val="018A98"/>
                 </a:solidFill>
@@ -6469,63 +5791,6 @@
           </a:p>
         </p:txBody>
       </p:sp>
-      <p:sp>
-        <p:nvSpPr>
-          <p:cNvPr id="17" name="Прямоугольник 16">
-            <a:extLst>
-              <a:ext uri="{FF2B5EF4-FFF2-40B4-BE49-F238E27FC236}">
-                <a16:creationId xmlns:a16="http://schemas.microsoft.com/office/drawing/2014/main" id="{FCB2CFFB-64C9-4281-B86D-45A0D238ECD3}"/>
-              </a:ext>
-            </a:extLst>
-          </p:cNvPr>
-          <p:cNvSpPr>
-            <a:spLocks noGrp="1"/>
-          </p:cNvSpPr>
-          <p:nvPr/>
-        </p:nvSpPr>
-        <p:spPr>
-          <a:xfrm>
-            <a:off x="609600" y="5248275"/>
-            <a:ext cx="10763250" cy="590550"/>
-          </a:xfrm>
-          <a:prstGeom prst="rect">
-            <a:avLst/>
-          </a:prstGeom>
-          <a:noFill/>
-          <a:ln w="0">
-            <a:noFill/>
-          </a:ln>
-        </p:spPr>
-        <p:txBody>
-          <a:bodyPr>
-            <a:noAutofit/>
-          </a:bodyPr>
-          <a:lstStyle/>
-          <a:p>
-            <a:pPr>
-              <a:defRPr sz="1350" b="0">
-                <a:solidFill>
-                  <a:srgbClr val="566572"/>
-                </a:solidFill>
-                <a:latin typeface="Arial"/>
-                <a:ea typeface="Arial"/>
-                <a:cs typeface="Arial"/>
-              </a:defRPr>
-            </a:pPr>
-            <a:r>
-              <a:rPr sz="1350" b="0">
-                <a:solidFill>
-                  <a:srgbClr val="566572"/>
-                </a:solidFill>
-                <a:latin typeface="Arial"/>
-                <a:ea typeface="Arial"/>
-                <a:cs typeface="Arial"/>
-              </a:rPr>
-              <a:t>Числа 40 и 5 минут — гипотеза команды; замер подтвердит владелец процесса на пилоте.</a:t>
-            </a:r>
-          </a:p>
-        </p:txBody>
-      </p:sp>
     </p:spTree>
     <p:extLst>
       <p:ext uri="{BB962C8B-B14F-4D97-AF65-F5344CB8AC3E}">
@@ -7103,7 +6368,7 @@
               </a:defRPr>
             </a:pPr>
             <a:r>
-              <a:rPr sz="2250" b="0">
+              <a:rPr sz="2250" b="0" dirty="0">
                 <a:solidFill>
                   <a:srgbClr val="FFFFFF"/>
                 </a:solidFill>
@@ -7111,8 +6376,159 @@
                 <a:ea typeface="Arial"/>
                 <a:cs typeface="Arial"/>
               </a:rPr>
-              <a:t>В прототипе: aiogram-бот + движок правил + SQLite, LLM-извлечение (qwen2.5:7b); 12/12 тестов кейса — 172/172 проверок</a:t>
-            </a:r>
+              <a:t>В </a:t>
+            </a:r>
+            <a:r>
+              <a:rPr sz="2250" b="0" dirty="0" err="1">
+                <a:solidFill>
+                  <a:srgbClr val="FFFFFF"/>
+                </a:solidFill>
+                <a:latin typeface="Arial"/>
+                <a:ea typeface="Arial"/>
+                <a:cs typeface="Arial"/>
+              </a:rPr>
+              <a:t>прототипе</a:t>
+            </a:r>
+            <a:r>
+              <a:rPr sz="2250" b="0" dirty="0">
+                <a:solidFill>
+                  <a:srgbClr val="FFFFFF"/>
+                </a:solidFill>
+                <a:latin typeface="Arial"/>
+                <a:ea typeface="Arial"/>
+                <a:cs typeface="Arial"/>
+              </a:rPr>
+              <a:t>: </a:t>
+            </a:r>
+            <a:r>
+              <a:rPr sz="2250" b="0" dirty="0" err="1">
+                <a:solidFill>
+                  <a:srgbClr val="FFFFFF"/>
+                </a:solidFill>
+                <a:latin typeface="Arial"/>
+                <a:ea typeface="Arial"/>
+                <a:cs typeface="Arial"/>
+              </a:rPr>
+              <a:t>aiogram-бот</a:t>
+            </a:r>
+            <a:r>
+              <a:rPr sz="2250" b="0" dirty="0">
+                <a:solidFill>
+                  <a:srgbClr val="FFFFFF"/>
+                </a:solidFill>
+                <a:latin typeface="Arial"/>
+                <a:ea typeface="Arial"/>
+                <a:cs typeface="Arial"/>
+              </a:rPr>
+              <a:t> + </a:t>
+            </a:r>
+            <a:r>
+              <a:rPr sz="2250" b="0" dirty="0" err="1">
+                <a:solidFill>
+                  <a:srgbClr val="FFFFFF"/>
+                </a:solidFill>
+                <a:latin typeface="Arial"/>
+                <a:ea typeface="Arial"/>
+                <a:cs typeface="Arial"/>
+              </a:rPr>
+              <a:t>движок</a:t>
+            </a:r>
+            <a:r>
+              <a:rPr sz="2250" b="0" dirty="0">
+                <a:solidFill>
+                  <a:srgbClr val="FFFFFF"/>
+                </a:solidFill>
+                <a:latin typeface="Arial"/>
+                <a:ea typeface="Arial"/>
+                <a:cs typeface="Arial"/>
+              </a:rPr>
+              <a:t> </a:t>
+            </a:r>
+            <a:r>
+              <a:rPr sz="2250" b="0" dirty="0" err="1">
+                <a:solidFill>
+                  <a:srgbClr val="FFFFFF"/>
+                </a:solidFill>
+                <a:latin typeface="Arial"/>
+                <a:ea typeface="Arial"/>
+                <a:cs typeface="Arial"/>
+              </a:rPr>
+              <a:t>правил</a:t>
+            </a:r>
+            <a:r>
+              <a:rPr sz="2250" b="0" dirty="0">
+                <a:solidFill>
+                  <a:srgbClr val="FFFFFF"/>
+                </a:solidFill>
+                <a:latin typeface="Arial"/>
+                <a:ea typeface="Arial"/>
+                <a:cs typeface="Arial"/>
+              </a:rPr>
+              <a:t> + SQLite, LLM-</a:t>
+            </a:r>
+            <a:r>
+              <a:rPr sz="2250" b="0" dirty="0" err="1">
+                <a:solidFill>
+                  <a:srgbClr val="FFFFFF"/>
+                </a:solidFill>
+                <a:latin typeface="Arial"/>
+                <a:ea typeface="Arial"/>
+                <a:cs typeface="Arial"/>
+              </a:rPr>
+              <a:t>извлечение</a:t>
+            </a:r>
+            <a:r>
+              <a:rPr sz="2250" b="0" dirty="0">
+                <a:solidFill>
+                  <a:srgbClr val="FFFFFF"/>
+                </a:solidFill>
+                <a:latin typeface="Arial"/>
+                <a:ea typeface="Arial"/>
+                <a:cs typeface="Arial"/>
+              </a:rPr>
+              <a:t> (qwen2.5:7b); 12/12 </a:t>
+            </a:r>
+            <a:r>
+              <a:rPr sz="2250" b="0" dirty="0" err="1">
+                <a:solidFill>
+                  <a:srgbClr val="FFFFFF"/>
+                </a:solidFill>
+                <a:latin typeface="Arial"/>
+                <a:ea typeface="Arial"/>
+                <a:cs typeface="Arial"/>
+              </a:rPr>
+              <a:t>тестов</a:t>
+            </a:r>
+            <a:r>
+              <a:rPr sz="2250" b="0" dirty="0">
+                <a:solidFill>
+                  <a:srgbClr val="FFFFFF"/>
+                </a:solidFill>
+                <a:latin typeface="Arial"/>
+                <a:ea typeface="Arial"/>
+                <a:cs typeface="Arial"/>
+              </a:rPr>
+              <a:t> </a:t>
+            </a:r>
+            <a:r>
+              <a:rPr sz="2250" b="0" dirty="0" err="1">
+                <a:solidFill>
+                  <a:srgbClr val="FFFFFF"/>
+                </a:solidFill>
+                <a:latin typeface="Arial"/>
+                <a:ea typeface="Arial"/>
+                <a:cs typeface="Arial"/>
+              </a:rPr>
+              <a:t>кейса</a:t>
+            </a:r>
+            <a:endParaRPr sz="2250" b="0" dirty="0">
+              <a:solidFill>
+                <a:srgbClr val="FFFFFF"/>
+              </a:solidFill>
+              <a:latin typeface="Arial"/>
+              <a:ea typeface="Arial"/>
+              <a:cs typeface="Arial"/>
+            </a:endParaRPr>
           </a:p>
         </p:txBody>
       </p:sp>
@@ -7217,7 +6633,7 @@
               </a:defRPr>
             </a:pPr>
             <a:r>
-              <a:rPr sz="2250" b="0">
+              <a:rPr sz="2250" b="0" dirty="0" err="1">
                 <a:solidFill>
                   <a:srgbClr val="FFFFFF"/>
                 </a:solidFill>
@@ -7225,8 +6641,170 @@
                 <a:ea typeface="Arial"/>
                 <a:cs typeface="Arial"/>
               </a:rPr>
-              <a:t>Пока не реализовано: канал в мессенджере MAX, боевые данные и аккаунты, действия за клиента (регистрация, оплата)</a:t>
-            </a:r>
+              <a:t>Пока</a:t>
+            </a:r>
+            <a:r>
+              <a:rPr sz="2250" b="0" dirty="0">
+                <a:solidFill>
+                  <a:srgbClr val="FFFFFF"/>
+                </a:solidFill>
+                <a:latin typeface="Arial"/>
+                <a:ea typeface="Arial"/>
+                <a:cs typeface="Arial"/>
+              </a:rPr>
+              <a:t> </a:t>
+            </a:r>
+            <a:r>
+              <a:rPr sz="2250" b="0" dirty="0" err="1">
+                <a:solidFill>
+                  <a:srgbClr val="FFFFFF"/>
+                </a:solidFill>
+                <a:latin typeface="Arial"/>
+                <a:ea typeface="Arial"/>
+                <a:cs typeface="Arial"/>
+              </a:rPr>
+              <a:t>не</a:t>
+            </a:r>
+            <a:r>
+              <a:rPr sz="2250" b="0" dirty="0">
+                <a:solidFill>
+                  <a:srgbClr val="FFFFFF"/>
+                </a:solidFill>
+                <a:latin typeface="Arial"/>
+                <a:ea typeface="Arial"/>
+                <a:cs typeface="Arial"/>
+              </a:rPr>
+              <a:t> </a:t>
+            </a:r>
+            <a:r>
+              <a:rPr sz="2250" b="0" dirty="0" err="1">
+                <a:solidFill>
+                  <a:srgbClr val="FFFFFF"/>
+                </a:solidFill>
+                <a:latin typeface="Arial"/>
+                <a:ea typeface="Arial"/>
+                <a:cs typeface="Arial"/>
+              </a:rPr>
+              <a:t>реализовано</a:t>
+            </a:r>
+            <a:r>
+              <a:rPr sz="2250" b="0" dirty="0">
+                <a:solidFill>
+                  <a:srgbClr val="FFFFFF"/>
+                </a:solidFill>
+                <a:latin typeface="Arial"/>
+                <a:ea typeface="Arial"/>
+                <a:cs typeface="Arial"/>
+              </a:rPr>
+              <a:t>: </a:t>
+            </a:r>
+            <a:r>
+              <a:rPr sz="2250" b="0" dirty="0" err="1">
+                <a:solidFill>
+                  <a:srgbClr val="FFFFFF"/>
+                </a:solidFill>
+                <a:latin typeface="Arial"/>
+                <a:ea typeface="Arial"/>
+                <a:cs typeface="Arial"/>
+              </a:rPr>
+              <a:t>канал</a:t>
+            </a:r>
+            <a:r>
+              <a:rPr sz="2250" b="0" dirty="0">
+                <a:solidFill>
+                  <a:srgbClr val="FFFFFF"/>
+                </a:solidFill>
+                <a:latin typeface="Arial"/>
+                <a:ea typeface="Arial"/>
+                <a:cs typeface="Arial"/>
+              </a:rPr>
+              <a:t> в </a:t>
+            </a:r>
+            <a:r>
+              <a:rPr sz="2250" b="0" dirty="0" err="1">
+                <a:solidFill>
+                  <a:srgbClr val="FFFFFF"/>
+                </a:solidFill>
+                <a:latin typeface="Arial"/>
+                <a:ea typeface="Arial"/>
+                <a:cs typeface="Arial"/>
+              </a:rPr>
+              <a:t>мессенджере</a:t>
+            </a:r>
+            <a:r>
+              <a:rPr sz="2250" b="0" dirty="0">
+                <a:solidFill>
+                  <a:srgbClr val="FFFFFF"/>
+                </a:solidFill>
+                <a:latin typeface="Arial"/>
+                <a:ea typeface="Arial"/>
+                <a:cs typeface="Arial"/>
+              </a:rPr>
+              <a:t> MAX, </a:t>
+            </a:r>
+            <a:r>
+              <a:rPr sz="2250" b="0" dirty="0" err="1">
+                <a:solidFill>
+                  <a:srgbClr val="FFFFFF"/>
+                </a:solidFill>
+                <a:latin typeface="Arial"/>
+                <a:ea typeface="Arial"/>
+                <a:cs typeface="Arial"/>
+              </a:rPr>
+              <a:t>боевые</a:t>
+            </a:r>
+            <a:r>
+              <a:rPr sz="2250" b="0" dirty="0">
+                <a:solidFill>
+                  <a:srgbClr val="FFFFFF"/>
+                </a:solidFill>
+                <a:latin typeface="Arial"/>
+                <a:ea typeface="Arial"/>
+                <a:cs typeface="Arial"/>
+              </a:rPr>
+              <a:t> </a:t>
+            </a:r>
+            <a:r>
+              <a:rPr sz="2250" b="0" dirty="0" err="1">
+                <a:solidFill>
+                  <a:srgbClr val="FFFFFF"/>
+                </a:solidFill>
+                <a:latin typeface="Arial"/>
+                <a:ea typeface="Arial"/>
+                <a:cs typeface="Arial"/>
+              </a:rPr>
+              <a:t>данные</a:t>
+            </a:r>
+            <a:r>
+              <a:rPr sz="2250" b="0" dirty="0">
+                <a:solidFill>
+                  <a:srgbClr val="FFFFFF"/>
+                </a:solidFill>
+                <a:latin typeface="Arial"/>
+                <a:ea typeface="Arial"/>
+                <a:cs typeface="Arial"/>
+              </a:rPr>
+              <a:t> и </a:t>
+            </a:r>
+            <a:r>
+              <a:rPr sz="2250" b="0" dirty="0" err="1">
+                <a:solidFill>
+                  <a:srgbClr val="FFFFFF"/>
+                </a:solidFill>
+                <a:latin typeface="Arial"/>
+                <a:ea typeface="Arial"/>
+                <a:cs typeface="Arial"/>
+              </a:rPr>
+              <a:t>аккаунты</a:t>
+            </a:r>
+            <a:endParaRPr sz="2250" b="0" dirty="0">
+              <a:solidFill>
+                <a:srgbClr val="FFFFFF"/>
+              </a:solidFill>
+              <a:latin typeface="Arial"/>
+              <a:ea typeface="Arial"/>
+              <a:cs typeface="Arial"/>
+            </a:endParaRPr>
           </a:p>
         </p:txBody>
       </p:sp>
@@ -7340,63 +6918,6 @@
                 <a:cs typeface="Arial"/>
               </a:rPr>
               <a:t>Контроль человеком: сообщения наставнику — только черновики (requires_human_approval); автоотправка клиенту запрещена</a:t>
-            </a:r>
-          </a:p>
-        </p:txBody>
-      </p:sp>
-      <p:sp>
-        <p:nvSpPr>
-          <p:cNvPr id="17" name="Прямоугольник 16">
-            <a:extLst>
-              <a:ext uri="{FF2B5EF4-FFF2-40B4-BE49-F238E27FC236}">
-                <a16:creationId xmlns:a16="http://schemas.microsoft.com/office/drawing/2014/main" id="{37FFFBAF-75F3-48EC-A579-6FB378119BEF}"/>
-              </a:ext>
-            </a:extLst>
-          </p:cNvPr>
-          <p:cNvSpPr>
-            <a:spLocks noGrp="1"/>
-          </p:cNvSpPr>
-          <p:nvPr/>
-        </p:nvSpPr>
-        <p:spPr>
-          <a:xfrm>
-            <a:off x="609600" y="5248275"/>
-            <a:ext cx="10763250" cy="590550"/>
-          </a:xfrm>
-          <a:prstGeom prst="rect">
-            <a:avLst/>
-          </a:prstGeom>
-          <a:noFill/>
-          <a:ln w="0">
-            <a:noFill/>
-          </a:ln>
-        </p:spPr>
-        <p:txBody>
-          <a:bodyPr>
-            <a:noAutofit/>
-          </a:bodyPr>
-          <a:lstStyle/>
-          <a:p>
-            <a:pPr>
-              <a:defRPr sz="1350" b="0">
-                <a:solidFill>
-                  <a:srgbClr val="D4E5EA"/>
-                </a:solidFill>
-                <a:latin typeface="Arial"/>
-                <a:ea typeface="Arial"/>
-                <a:cs typeface="Arial"/>
-              </a:defRPr>
-            </a:pPr>
-            <a:r>
-              <a:rPr sz="1350" b="0">
-                <a:solidFill>
-                  <a:srgbClr val="D4E5EA"/>
-                </a:solidFill>
-                <a:latin typeface="Arial"/>
-                <a:ea typeface="Arial"/>
-                <a:cs typeface="Arial"/>
-              </a:rPr>
-              <a:t>Помощник не обещает доход и лечебные свойства, не выдумывает акции; один законченный сценарий показан в демо.</a:t>
             </a:r>
           </a:p>
         </p:txBody>
@@ -8092,190 +7613,301 @@
               </a:defRPr>
             </a:pPr>
             <a:r>
-              <a:rPr sz="2250" b="0">
-                <a:solidFill>
-                  <a:srgbClr val="052849"/>
-                </a:solidFill>
-                <a:latin typeface="Arial"/>
-                <a:ea typeface="Arial"/>
-                <a:cs typeface="Arial"/>
-              </a:rPr>
-              <a:t>Среда: Python 3.11, aiogram 3, SQLite; локальная модель qwen2.5:7b-instruct через Ollama</a:t>
-            </a:r>
-          </a:p>
-        </p:txBody>
-      </p:sp>
-      <p:sp>
-        <p:nvSpPr>
-          <p:cNvPr id="15" name="Прямоугольник 14">
+              <a:rPr sz="2250" b="0" dirty="0" err="1">
+                <a:solidFill>
+                  <a:srgbClr val="052849"/>
+                </a:solidFill>
+                <a:latin typeface="Arial"/>
+                <a:ea typeface="Arial"/>
+                <a:cs typeface="Arial"/>
+              </a:rPr>
+              <a:t>Среда</a:t>
+            </a:r>
+            <a:r>
+              <a:rPr sz="2250" b="0" dirty="0">
+                <a:solidFill>
+                  <a:srgbClr val="052849"/>
+                </a:solidFill>
+                <a:latin typeface="Arial"/>
+                <a:ea typeface="Arial"/>
+                <a:cs typeface="Arial"/>
+              </a:rPr>
+              <a:t>: Python 3.1</a:t>
+            </a:r>
+            <a:r>
+              <a:rPr lang="ru-RU" sz="2250" b="0" dirty="0">
+                <a:solidFill>
+                  <a:srgbClr val="052849"/>
+                </a:solidFill>
+                <a:latin typeface="Arial"/>
+                <a:ea typeface="Arial"/>
+                <a:cs typeface="Arial"/>
+              </a:rPr>
+              <a:t>2</a:t>
+            </a:r>
+            <a:r>
+              <a:rPr sz="2250" b="0" dirty="0">
+                <a:solidFill>
+                  <a:srgbClr val="052849"/>
+                </a:solidFill>
+                <a:latin typeface="Arial"/>
+                <a:ea typeface="Arial"/>
+                <a:cs typeface="Arial"/>
+              </a:rPr>
+              <a:t>, </a:t>
+            </a:r>
+            <a:r>
+              <a:rPr sz="2250" b="0" dirty="0" err="1">
+                <a:solidFill>
+                  <a:srgbClr val="052849"/>
+                </a:solidFill>
+                <a:latin typeface="Arial"/>
+                <a:ea typeface="Arial"/>
+                <a:cs typeface="Arial"/>
+              </a:rPr>
+              <a:t>aiogram</a:t>
+            </a:r>
+            <a:r>
+              <a:rPr sz="2250" b="0" dirty="0">
+                <a:solidFill>
+                  <a:srgbClr val="052849"/>
+                </a:solidFill>
+                <a:latin typeface="Arial"/>
+                <a:ea typeface="Arial"/>
+                <a:cs typeface="Arial"/>
+              </a:rPr>
+              <a:t> 3</a:t>
+            </a:r>
+            <a:r>
+              <a:rPr lang="ru-RU" sz="2250" b="0" dirty="0">
+                <a:solidFill>
+                  <a:srgbClr val="052849"/>
+                </a:solidFill>
+                <a:latin typeface="Arial"/>
+                <a:ea typeface="Arial"/>
+                <a:cs typeface="Arial"/>
+              </a:rPr>
+              <a:t>.3</a:t>
+            </a:r>
+            <a:r>
+              <a:rPr sz="2250" b="0" dirty="0">
+                <a:solidFill>
+                  <a:srgbClr val="052849"/>
+                </a:solidFill>
+                <a:latin typeface="Arial"/>
+                <a:ea typeface="Arial"/>
+                <a:cs typeface="Arial"/>
+              </a:rPr>
+              <a:t>, SQLite; </a:t>
+            </a:r>
+            <a:r>
+              <a:rPr sz="2250" b="0" dirty="0" err="1">
+                <a:solidFill>
+                  <a:srgbClr val="052849"/>
+                </a:solidFill>
+                <a:latin typeface="Arial"/>
+                <a:ea typeface="Arial"/>
+                <a:cs typeface="Arial"/>
+              </a:rPr>
+              <a:t>локальная</a:t>
+            </a:r>
+            <a:r>
+              <a:rPr sz="2250" b="0" dirty="0">
+                <a:solidFill>
+                  <a:srgbClr val="052849"/>
+                </a:solidFill>
+                <a:latin typeface="Arial"/>
+                <a:ea typeface="Arial"/>
+                <a:cs typeface="Arial"/>
+              </a:rPr>
+              <a:t> </a:t>
+            </a:r>
+            <a:r>
+              <a:rPr sz="2250" b="0" dirty="0" err="1">
+                <a:solidFill>
+                  <a:srgbClr val="052849"/>
+                </a:solidFill>
+                <a:latin typeface="Arial"/>
+                <a:ea typeface="Arial"/>
+                <a:cs typeface="Arial"/>
+              </a:rPr>
+              <a:t>модель</a:t>
+            </a:r>
+            <a:r>
+              <a:rPr sz="2250" b="0" dirty="0">
+                <a:solidFill>
+                  <a:srgbClr val="052849"/>
+                </a:solidFill>
+                <a:latin typeface="Arial"/>
+                <a:ea typeface="Arial"/>
+                <a:cs typeface="Arial"/>
+              </a:rPr>
+              <a:t> qwen2.5:7b-instruct </a:t>
+            </a:r>
+            <a:r>
+              <a:rPr sz="2250" b="0" dirty="0" err="1">
+                <a:solidFill>
+                  <a:srgbClr val="052849"/>
+                </a:solidFill>
+                <a:latin typeface="Arial"/>
+                <a:ea typeface="Arial"/>
+                <a:cs typeface="Arial"/>
+              </a:rPr>
+              <a:t>через</a:t>
+            </a:r>
+            <a:r>
+              <a:rPr sz="2250" b="0" dirty="0">
+                <a:solidFill>
+                  <a:srgbClr val="052849"/>
+                </a:solidFill>
+                <a:latin typeface="Arial"/>
+                <a:ea typeface="Arial"/>
+                <a:cs typeface="Arial"/>
+              </a:rPr>
+              <a:t> </a:t>
+            </a:r>
+            <a:r>
+              <a:rPr sz="2250" b="0" dirty="0" err="1">
+                <a:solidFill>
+                  <a:srgbClr val="052849"/>
+                </a:solidFill>
+                <a:latin typeface="Arial"/>
+                <a:ea typeface="Arial"/>
+                <a:cs typeface="Arial"/>
+              </a:rPr>
+              <a:t>Ollama</a:t>
+            </a:r>
+            <a:endParaRPr sz="2250" b="0" dirty="0">
+              <a:solidFill>
+                <a:srgbClr val="052849"/>
+              </a:solidFill>
+              <a:latin typeface="Arial"/>
+              <a:ea typeface="Arial"/>
+              <a:cs typeface="Arial"/>
+            </a:endParaRPr>
+          </a:p>
+        </p:txBody>
+      </p:sp>
+      <p:pic>
+        <p:nvPicPr>
+          <p:cNvPr id="5" name="Рисунок 4" descr="Picture background">
             <a:extLst>
               <a:ext uri="{FF2B5EF4-FFF2-40B4-BE49-F238E27FC236}">
-                <a16:creationId xmlns:a16="http://schemas.microsoft.com/office/drawing/2014/main" id="{9AA8FD0D-7901-46E1-AF5A-FE5F2414AF95}"/>
+                <a16:creationId xmlns:a16="http://schemas.microsoft.com/office/drawing/2014/main" id="{5859EC16-2DFA-7FC3-630D-B0DAF67411A2}"/>
               </a:ext>
             </a:extLst>
           </p:cNvPr>
-          <p:cNvSpPr>
-            <a:spLocks noGrp="1"/>
-          </p:cNvSpPr>
-          <p:nvPr/>
-        </p:nvSpPr>
-        <p:spPr>
-          <a:xfrm>
-            <a:off x="609600" y="4114800"/>
-            <a:ext cx="666750" cy="438150"/>
-          </a:xfrm>
-          <a:prstGeom prst="rect">
-            <a:avLst/>
-          </a:prstGeom>
-          <a:noFill/>
-          <a:ln w="0">
-            <a:noFill/>
-          </a:ln>
-        </p:spPr>
-        <p:txBody>
-          <a:bodyPr>
-            <a:noAutofit/>
-          </a:bodyPr>
-          <a:lstStyle/>
-          <a:p>
-            <a:pPr>
-              <a:defRPr sz="2325" b="1">
-                <a:solidFill>
-                  <a:srgbClr val="018A98"/>
-                </a:solidFill>
-                <a:latin typeface="Arial"/>
-                <a:ea typeface="Arial"/>
-                <a:cs typeface="Arial"/>
-              </a:defRPr>
-            </a:pPr>
-            <a:r>
-              <a:rPr sz="2325" b="1">
-                <a:solidFill>
-                  <a:srgbClr val="018A98"/>
-                </a:solidFill>
-                <a:latin typeface="Arial"/>
-                <a:ea typeface="Arial"/>
-                <a:cs typeface="Arial"/>
-              </a:rPr>
-              <a:t>04</a:t>
-            </a:r>
-          </a:p>
-        </p:txBody>
-      </p:sp>
-      <p:sp>
-        <p:nvSpPr>
-          <p:cNvPr id="16" name="Прямоугольник 15">
+          <p:cNvPicPr>
+            <a:picLocks noChangeAspect="1"/>
+          </p:cNvPicPr>
+          <p:nvPr/>
+        </p:nvPicPr>
+        <p:blipFill>
+          <a:blip r:embed="rId6"/>
+          <a:stretch>
+            <a:fillRect/>
+          </a:stretch>
+        </p:blipFill>
+        <p:spPr>
+          <a:xfrm>
+            <a:off x="1066800" y="4424363"/>
+            <a:ext cx="1016000" cy="1016000"/>
+          </a:xfrm>
+          <a:prstGeom prst="rect">
+            <a:avLst/>
+          </a:prstGeom>
+        </p:spPr>
+      </p:pic>
+      <p:pic>
+        <p:nvPicPr>
+          <p:cNvPr id="19" name="Рисунок 18" descr="Picture background">
             <a:extLst>
               <a:ext uri="{FF2B5EF4-FFF2-40B4-BE49-F238E27FC236}">
-                <a16:creationId xmlns:a16="http://schemas.microsoft.com/office/drawing/2014/main" id="{9842A003-EB83-4E73-BDB6-CFDD04A0D6FD}"/>
+                <a16:creationId xmlns:a16="http://schemas.microsoft.com/office/drawing/2014/main" id="{07333AE3-19B2-993C-BEB3-8D78AC562C9D}"/>
               </a:ext>
             </a:extLst>
           </p:cNvPr>
-          <p:cNvSpPr>
-            <a:spLocks noGrp="1"/>
-          </p:cNvSpPr>
-          <p:nvPr/>
-        </p:nvSpPr>
-        <p:spPr>
-          <a:xfrm>
-            <a:off x="1447800" y="4133850"/>
-            <a:ext cx="9858375" cy="609600"/>
-          </a:xfrm>
-          <a:prstGeom prst="rect">
-            <a:avLst/>
-          </a:prstGeom>
-          <a:noFill/>
-          <a:ln w="0">
-            <a:noFill/>
-          </a:ln>
-        </p:spPr>
-        <p:txBody>
-          <a:bodyPr>
-            <a:noAutofit/>
-          </a:bodyPr>
-          <a:lstStyle/>
-          <a:p>
-            <a:pPr>
-              <a:defRPr sz="2250" b="0">
-                <a:solidFill>
-                  <a:srgbClr val="052849"/>
-                </a:solidFill>
-                <a:latin typeface="Arial"/>
-                <a:ea typeface="Arial"/>
-                <a:cs typeface="Arial"/>
-              </a:defRPr>
-            </a:pPr>
-            <a:r>
-              <a:rPr sz="2250" b="0">
-                <a:solidFill>
-                  <a:srgbClr val="052849"/>
-                </a:solidFill>
-                <a:latin typeface="Arial"/>
-                <a:ea typeface="Arial"/>
-                <a:cs typeface="Arial"/>
-              </a:rPr>
-              <a:t>Ограничения: локальная 7B-модель слабее облачной; API MAX нестабильны; ключи — только в .env вне репозитория</a:t>
-            </a:r>
-          </a:p>
-        </p:txBody>
-      </p:sp>
-      <p:sp>
-        <p:nvSpPr>
-          <p:cNvPr id="17" name="Прямоугольник 16">
+          <p:cNvPicPr>
+            <a:picLocks noChangeAspect="1"/>
+          </p:cNvPicPr>
+          <p:nvPr/>
+        </p:nvPicPr>
+        <p:blipFill>
+          <a:blip r:embed="rId7"/>
+          <a:stretch>
+            <a:fillRect/>
+          </a:stretch>
+        </p:blipFill>
+        <p:spPr>
+          <a:xfrm>
+            <a:off x="3597275" y="4424363"/>
+            <a:ext cx="2159000" cy="1016000"/>
+          </a:xfrm>
+          <a:prstGeom prst="rect">
+            <a:avLst/>
+          </a:prstGeom>
+        </p:spPr>
+      </p:pic>
+      <p:pic>
+        <p:nvPicPr>
+          <p:cNvPr id="24" name="Рисунок 23" descr="Picture background">
             <a:extLst>
               <a:ext uri="{FF2B5EF4-FFF2-40B4-BE49-F238E27FC236}">
-                <a16:creationId xmlns:a16="http://schemas.microsoft.com/office/drawing/2014/main" id="{4ED9D203-33EF-4FD2-9609-8133684BDFB2}"/>
+                <a16:creationId xmlns:a16="http://schemas.microsoft.com/office/drawing/2014/main" id="{31A2225D-BA8A-37FA-9531-5DB2EB63BDC2}"/>
               </a:ext>
             </a:extLst>
           </p:cNvPr>
-          <p:cNvSpPr>
-            <a:spLocks noGrp="1"/>
-          </p:cNvSpPr>
-          <p:nvPr/>
-        </p:nvSpPr>
-        <p:spPr>
-          <a:xfrm>
-            <a:off x="609600" y="5248275"/>
-            <a:ext cx="10763250" cy="590550"/>
-          </a:xfrm>
-          <a:prstGeom prst="rect">
-            <a:avLst/>
-          </a:prstGeom>
-          <a:noFill/>
-          <a:ln w="0">
-            <a:noFill/>
-          </a:ln>
-        </p:spPr>
-        <p:txBody>
-          <a:bodyPr>
-            <a:noAutofit/>
-          </a:bodyPr>
-          <a:lstStyle/>
-          <a:p>
-            <a:pPr>
-              <a:defRPr sz="1350" b="0">
-                <a:solidFill>
-                  <a:srgbClr val="566572"/>
-                </a:solidFill>
-                <a:latin typeface="Arial"/>
-                <a:ea typeface="Arial"/>
-                <a:cs typeface="Arial"/>
-              </a:defRPr>
-            </a:pPr>
-            <a:r>
-              <a:rPr sz="1350" b="0">
-                <a:solidFill>
-                  <a:srgbClr val="566572"/>
-                </a:solidFill>
-                <a:latin typeface="Arial"/>
-                <a:ea typeface="Arial"/>
-                <a:cs typeface="Arial"/>
-              </a:rPr>
-              <a:t>Данные вымышленные, реальных персональных данных нет; токены и ключи в слайдах не показываются.</a:t>
-            </a:r>
-          </a:p>
-        </p:txBody>
-      </p:sp>
+          <p:cNvPicPr>
+            <a:picLocks noChangeAspect="1"/>
+          </p:cNvPicPr>
+          <p:nvPr/>
+        </p:nvPicPr>
+        <p:blipFill>
+          <a:blip r:embed="rId8"/>
+          <a:stretch>
+            <a:fillRect/>
+          </a:stretch>
+        </p:blipFill>
+        <p:spPr>
+          <a:xfrm>
+            <a:off x="6851650" y="4424363"/>
+            <a:ext cx="1016000" cy="1016000"/>
+          </a:xfrm>
+          <a:prstGeom prst="rect">
+            <a:avLst/>
+          </a:prstGeom>
+        </p:spPr>
+      </p:pic>
+      <p:pic>
+        <p:nvPicPr>
+          <p:cNvPr id="26" name="Рисунок 25" descr="Picture background">
+            <a:extLst>
+              <a:ext uri="{FF2B5EF4-FFF2-40B4-BE49-F238E27FC236}">
+                <a16:creationId xmlns:a16="http://schemas.microsoft.com/office/drawing/2014/main" id="{BC4CDBDA-36B2-3393-AE60-6D6E8A88771F}"/>
+              </a:ext>
+            </a:extLst>
+          </p:cNvPr>
+          <p:cNvPicPr>
+            <a:picLocks noChangeAspect="1"/>
+          </p:cNvPicPr>
+          <p:nvPr/>
+        </p:nvPicPr>
+        <p:blipFill>
+          <a:blip r:embed="rId9"/>
+          <a:stretch>
+            <a:fillRect/>
+          </a:stretch>
+        </p:blipFill>
+        <p:spPr>
+          <a:xfrm>
+            <a:off x="8680450" y="4424363"/>
+            <a:ext cx="3086100" cy="1016000"/>
+          </a:xfrm>
+          <a:prstGeom prst="rect">
+            <a:avLst/>
+          </a:prstGeom>
+        </p:spPr>
+      </p:pic>
     </p:spTree>
     <p:extLst>
       <p:ext uri="{BB962C8B-B14F-4D97-AF65-F5344CB8AC3E}">
@@ -8290,6 +7922,66 @@
 </file>
 
 <file path=ppt/slides/slide6.xml><?xml version="1.0" encoding="utf-8"?>
+<p:sld xmlns:a="http://schemas.openxmlformats.org/drawingml/2006/main" xmlns:r="http://schemas.openxmlformats.org/officeDocument/2006/relationships" xmlns:p="http://schemas.openxmlformats.org/presentationml/2006/main">
+  <p:cSld>
+    <p:spTree>
+      <p:nvGrpSpPr>
+        <p:cNvPr id="1" name=""/>
+        <p:cNvGrpSpPr/>
+        <p:nvPr/>
+      </p:nvGrpSpPr>
+      <p:grpSpPr>
+        <a:xfrm>
+          <a:off x="0" y="0"/>
+          <a:ext cx="0" cy="0"/>
+          <a:chOff x="0" y="0"/>
+          <a:chExt cx="0" cy="0"/>
+        </a:xfrm>
+      </p:grpSpPr>
+      <p:pic>
+        <p:nvPicPr>
+          <p:cNvPr id="3" name="Рисунок 2">
+            <a:extLst>
+              <a:ext uri="{FF2B5EF4-FFF2-40B4-BE49-F238E27FC236}">
+                <a16:creationId xmlns:a16="http://schemas.microsoft.com/office/drawing/2014/main" id="{FD658F63-A07D-7F68-B4A4-3D5A0740C1CE}"/>
+              </a:ext>
+            </a:extLst>
+          </p:cNvPr>
+          <p:cNvPicPr>
+            <a:picLocks noChangeAspect="1"/>
+          </p:cNvPicPr>
+          <p:nvPr/>
+        </p:nvPicPr>
+        <p:blipFill>
+          <a:blip r:embed="rId2"/>
+          <a:stretch>
+            <a:fillRect/>
+          </a:stretch>
+        </p:blipFill>
+        <p:spPr>
+          <a:xfrm>
+            <a:off x="685815" y="0"/>
+            <a:ext cx="10820370" cy="9096840"/>
+          </a:xfrm>
+          <a:prstGeom prst="rect">
+            <a:avLst/>
+          </a:prstGeom>
+        </p:spPr>
+      </p:pic>
+    </p:spTree>
+    <p:extLst>
+      <p:ext uri="{BB962C8B-B14F-4D97-AF65-F5344CB8AC3E}">
+        <p14:creationId xmlns:p14="http://schemas.microsoft.com/office/powerpoint/2010/main" val="337212688"/>
+      </p:ext>
+    </p:extLst>
+  </p:cSld>
+  <p:clrMapOvr>
+    <a:masterClrMapping/>
+  </p:clrMapOvr>
+</p:sld>
+</file>
+
+<file path=ppt/slides/slide7.xml><?xml version="1.0" encoding="utf-8"?>
 <p:sld xmlns:a="http://schemas.openxmlformats.org/drawingml/2006/main" xmlns:r="http://schemas.openxmlformats.org/officeDocument/2006/relationships" xmlns:p="http://schemas.openxmlformats.org/presentationml/2006/main">
   <p:cSld>
     <p:bg>
@@ -8638,1452 +8330,10 @@
           </a:p>
         </p:txBody>
       </p:sp>
-      <p:sp>
-        <p:nvSpPr>
-          <p:cNvPr id="9" name="Прямоугольник 8">
-            <a:extLst>
-              <a:ext uri="{FF2B5EF4-FFF2-40B4-BE49-F238E27FC236}">
-                <a16:creationId xmlns:a16="http://schemas.microsoft.com/office/drawing/2014/main" id="{077160DE-62AB-4D44-BBAC-217148B55954}"/>
-              </a:ext>
-            </a:extLst>
-          </p:cNvPr>
-          <p:cNvSpPr>
-            <a:spLocks noGrp="1"/>
-          </p:cNvSpPr>
-          <p:nvPr/>
-        </p:nvSpPr>
-        <p:spPr>
-          <a:xfrm>
-            <a:off x="609600" y="1828800"/>
-            <a:ext cx="666750" cy="438150"/>
-          </a:xfrm>
-          <a:prstGeom prst="rect">
-            <a:avLst/>
-          </a:prstGeom>
-          <a:noFill/>
-          <a:ln w="0">
-            <a:noFill/>
-          </a:ln>
-        </p:spPr>
-        <p:txBody>
-          <a:bodyPr>
-            <a:noAutofit/>
-          </a:bodyPr>
-          <a:lstStyle/>
-          <a:p>
-            <a:pPr>
-              <a:defRPr sz="2325" b="1">
-                <a:solidFill>
-                  <a:srgbClr val="19AAB8"/>
-                </a:solidFill>
-                <a:latin typeface="Arial"/>
-                <a:ea typeface="Arial"/>
-                <a:cs typeface="Arial"/>
-              </a:defRPr>
-            </a:pPr>
-            <a:r>
-              <a:rPr sz="2325" b="1">
-                <a:solidFill>
-                  <a:srgbClr val="19AAB8"/>
-                </a:solidFill>
-                <a:latin typeface="Arial"/>
-                <a:ea typeface="Arial"/>
-                <a:cs typeface="Arial"/>
-              </a:rPr>
-              <a:t>01</a:t>
-            </a:r>
-          </a:p>
-        </p:txBody>
-      </p:sp>
-      <p:sp>
-        <p:nvSpPr>
-          <p:cNvPr id="10" name="Прямоугольник 9">
-            <a:extLst>
-              <a:ext uri="{FF2B5EF4-FFF2-40B4-BE49-F238E27FC236}">
-                <a16:creationId xmlns:a16="http://schemas.microsoft.com/office/drawing/2014/main" id="{47324CF7-5CDA-4359-B313-DA58469B7059}"/>
-              </a:ext>
-            </a:extLst>
-          </p:cNvPr>
-          <p:cNvSpPr>
-            <a:spLocks noGrp="1"/>
-          </p:cNvSpPr>
-          <p:nvPr/>
-        </p:nvSpPr>
-        <p:spPr>
-          <a:xfrm>
-            <a:off x="1447800" y="1847850"/>
-            <a:ext cx="6096000" cy="609600"/>
-          </a:xfrm>
-          <a:prstGeom prst="rect">
-            <a:avLst/>
-          </a:prstGeom>
-          <a:noFill/>
-          <a:ln w="0">
-            <a:noFill/>
-          </a:ln>
-        </p:spPr>
-        <p:txBody>
-          <a:bodyPr>
-            <a:noAutofit/>
-          </a:bodyPr>
-          <a:lstStyle/>
-          <a:p>
-            <a:pPr>
-              <a:defRPr sz="2250" b="0">
-                <a:solidFill>
-                  <a:srgbClr val="FFFFFF"/>
-                </a:solidFill>
-                <a:latin typeface="Arial"/>
-                <a:ea typeface="Arial"/>
-                <a:cs typeface="Arial"/>
-              </a:defRPr>
-            </a:pPr>
-            <a:r>
-              <a:rPr sz="2250" b="0">
-                <a:solidFill>
-                  <a:srgbClr val="FFFFFF"/>
-                </a:solidFill>
-                <a:latin typeface="Arial"/>
-                <a:ea typeface="Arial"/>
-                <a:cs typeface="Arial"/>
-              </a:rPr>
-              <a:t>Сценарий демо: F002 → «доход» → карточка с evidence и next_action</a:t>
-            </a:r>
-          </a:p>
-        </p:txBody>
-      </p:sp>
-      <p:sp>
-        <p:nvSpPr>
-          <p:cNvPr id="11" name="Прямоугольник 10">
-            <a:extLst>
-              <a:ext uri="{FF2B5EF4-FFF2-40B4-BE49-F238E27FC236}">
-                <a16:creationId xmlns:a16="http://schemas.microsoft.com/office/drawing/2014/main" id="{937FCB1F-C889-4200-AE9D-E2C415BD4ACB}"/>
-              </a:ext>
-            </a:extLst>
-          </p:cNvPr>
-          <p:cNvSpPr>
-            <a:spLocks noGrp="1"/>
-          </p:cNvSpPr>
-          <p:nvPr/>
-        </p:nvSpPr>
-        <p:spPr>
-          <a:xfrm>
-            <a:off x="609600" y="2590800"/>
-            <a:ext cx="666750" cy="438150"/>
-          </a:xfrm>
-          <a:prstGeom prst="rect">
-            <a:avLst/>
-          </a:prstGeom>
-          <a:noFill/>
-          <a:ln w="0">
-            <a:noFill/>
-          </a:ln>
-        </p:spPr>
-        <p:txBody>
-          <a:bodyPr>
-            <a:noAutofit/>
-          </a:bodyPr>
-          <a:lstStyle/>
-          <a:p>
-            <a:pPr>
-              <a:defRPr sz="2325" b="1">
-                <a:solidFill>
-                  <a:srgbClr val="19AAB8"/>
-                </a:solidFill>
-                <a:latin typeface="Arial"/>
-                <a:ea typeface="Arial"/>
-                <a:cs typeface="Arial"/>
-              </a:defRPr>
-            </a:pPr>
-            <a:r>
-              <a:rPr sz="2325" b="1">
-                <a:solidFill>
-                  <a:srgbClr val="19AAB8"/>
-                </a:solidFill>
-                <a:latin typeface="Arial"/>
-                <a:ea typeface="Arial"/>
-                <a:cs typeface="Arial"/>
-              </a:rPr>
-              <a:t>02</a:t>
-            </a:r>
-          </a:p>
-        </p:txBody>
-      </p:sp>
-      <p:sp>
-        <p:nvSpPr>
-          <p:cNvPr id="12" name="Прямоугольник 11">
-            <a:extLst>
-              <a:ext uri="{FF2B5EF4-FFF2-40B4-BE49-F238E27FC236}">
-                <a16:creationId xmlns:a16="http://schemas.microsoft.com/office/drawing/2014/main" id="{DA5EB6C5-32E5-4FCF-89D4-34A076F6BE5C}"/>
-              </a:ext>
-            </a:extLst>
-          </p:cNvPr>
-          <p:cNvSpPr>
-            <a:spLocks noGrp="1"/>
-          </p:cNvSpPr>
-          <p:nvPr/>
-        </p:nvSpPr>
-        <p:spPr>
-          <a:xfrm>
-            <a:off x="1447800" y="2609850"/>
-            <a:ext cx="6096000" cy="609600"/>
-          </a:xfrm>
-          <a:prstGeom prst="rect">
-            <a:avLst/>
-          </a:prstGeom>
-          <a:noFill/>
-          <a:ln w="0">
-            <a:noFill/>
-          </a:ln>
-        </p:spPr>
-        <p:txBody>
-          <a:bodyPr>
-            <a:noAutofit/>
-          </a:bodyPr>
-          <a:lstStyle/>
-          <a:p>
-            <a:pPr>
-              <a:defRPr sz="2250" b="0">
-                <a:solidFill>
-                  <a:srgbClr val="FFFFFF"/>
-                </a:solidFill>
-                <a:latin typeface="Arial"/>
-                <a:ea typeface="Arial"/>
-                <a:cs typeface="Arial"/>
-              </a:defRPr>
-            </a:pPr>
-            <a:r>
-              <a:rPr sz="2250" b="0">
-                <a:solidFill>
-                  <a:srgbClr val="FFFFFF"/>
-                </a:solidFill>
-                <a:latin typeface="Arial"/>
-                <a:ea typeface="Arial"/>
-                <a:cs typeface="Arial"/>
-              </a:rPr>
-              <a:t>Вход: учебное событие регистрации + свободный ответ клиента</a:t>
-            </a:r>
-          </a:p>
-        </p:txBody>
-      </p:sp>
-      <p:sp>
-        <p:nvSpPr>
-          <p:cNvPr id="13" name="Прямоугольник 12">
-            <a:extLst>
-              <a:ext uri="{FF2B5EF4-FFF2-40B4-BE49-F238E27FC236}">
-                <a16:creationId xmlns:a16="http://schemas.microsoft.com/office/drawing/2014/main" id="{E47A585D-F4B5-4D6A-9431-C425F1F18A2A}"/>
-              </a:ext>
-            </a:extLst>
-          </p:cNvPr>
-          <p:cNvSpPr>
-            <a:spLocks noGrp="1"/>
-          </p:cNvSpPr>
-          <p:nvPr/>
-        </p:nvSpPr>
-        <p:spPr>
-          <a:xfrm>
-            <a:off x="609600" y="3352800"/>
-            <a:ext cx="666750" cy="438150"/>
-          </a:xfrm>
-          <a:prstGeom prst="rect">
-            <a:avLst/>
-          </a:prstGeom>
-          <a:noFill/>
-          <a:ln w="0">
-            <a:noFill/>
-          </a:ln>
-        </p:spPr>
-        <p:txBody>
-          <a:bodyPr>
-            <a:noAutofit/>
-          </a:bodyPr>
-          <a:lstStyle/>
-          <a:p>
-            <a:pPr>
-              <a:defRPr sz="2325" b="1">
-                <a:solidFill>
-                  <a:srgbClr val="19AAB8"/>
-                </a:solidFill>
-                <a:latin typeface="Arial"/>
-                <a:ea typeface="Arial"/>
-                <a:cs typeface="Arial"/>
-              </a:defRPr>
-            </a:pPr>
-            <a:r>
-              <a:rPr sz="2325" b="1">
-                <a:solidFill>
-                  <a:srgbClr val="19AAB8"/>
-                </a:solidFill>
-                <a:latin typeface="Arial"/>
-                <a:ea typeface="Arial"/>
-                <a:cs typeface="Arial"/>
-              </a:rPr>
-              <a:t>03</a:t>
-            </a:r>
-          </a:p>
-        </p:txBody>
-      </p:sp>
-      <p:sp>
-        <p:nvSpPr>
-          <p:cNvPr id="14" name="Прямоугольник 13">
-            <a:extLst>
-              <a:ext uri="{FF2B5EF4-FFF2-40B4-BE49-F238E27FC236}">
-                <a16:creationId xmlns:a16="http://schemas.microsoft.com/office/drawing/2014/main" id="{740A64E1-4116-462E-B8A4-8737CD459B9C}"/>
-              </a:ext>
-            </a:extLst>
-          </p:cNvPr>
-          <p:cNvSpPr>
-            <a:spLocks noGrp="1"/>
-          </p:cNvSpPr>
-          <p:nvPr/>
-        </p:nvSpPr>
-        <p:spPr>
-          <a:xfrm>
-            <a:off x="1447800" y="3371850"/>
-            <a:ext cx="6096000" cy="609600"/>
-          </a:xfrm>
-          <a:prstGeom prst="rect">
-            <a:avLst/>
-          </a:prstGeom>
-          <a:noFill/>
-          <a:ln w="0">
-            <a:noFill/>
-          </a:ln>
-        </p:spPr>
-        <p:txBody>
-          <a:bodyPr>
-            <a:noAutofit/>
-          </a:bodyPr>
-          <a:lstStyle/>
-          <a:p>
-            <a:pPr>
-              <a:defRPr sz="2250" b="0">
-                <a:solidFill>
-                  <a:srgbClr val="FFFFFF"/>
-                </a:solidFill>
-                <a:latin typeface="Arial"/>
-                <a:ea typeface="Arial"/>
-                <a:cs typeface="Arial"/>
-              </a:defRPr>
-            </a:pPr>
-            <a:r>
-              <a:rPr sz="2250" b="0">
-                <a:solidFill>
-                  <a:srgbClr val="FFFFFF"/>
-                </a:solidFill>
-                <a:latin typeface="Arial"/>
-                <a:ea typeface="Arial"/>
-                <a:cs typeface="Arial"/>
-              </a:rPr>
-              <a:t>Выход: карточка и черновик сообщения наставнику</a:t>
-            </a:r>
-          </a:p>
-        </p:txBody>
-      </p:sp>
-      <p:sp>
-        <p:nvSpPr>
-          <p:cNvPr id="15" name="Прямоугольник 14">
-            <a:extLst>
-              <a:ext uri="{FF2B5EF4-FFF2-40B4-BE49-F238E27FC236}">
-                <a16:creationId xmlns:a16="http://schemas.microsoft.com/office/drawing/2014/main" id="{B0B9654F-734E-4C36-A088-5CEBAEDBBE39}"/>
-              </a:ext>
-            </a:extLst>
-          </p:cNvPr>
-          <p:cNvSpPr>
-            <a:spLocks noGrp="1"/>
-          </p:cNvSpPr>
-          <p:nvPr/>
-        </p:nvSpPr>
-        <p:spPr>
-          <a:xfrm>
-            <a:off x="609600" y="4114800"/>
-            <a:ext cx="666750" cy="438150"/>
-          </a:xfrm>
-          <a:prstGeom prst="rect">
-            <a:avLst/>
-          </a:prstGeom>
-          <a:noFill/>
-          <a:ln w="0">
-            <a:noFill/>
-          </a:ln>
-        </p:spPr>
-        <p:txBody>
-          <a:bodyPr>
-            <a:noAutofit/>
-          </a:bodyPr>
-          <a:lstStyle/>
-          <a:p>
-            <a:pPr>
-              <a:defRPr sz="2325" b="1">
-                <a:solidFill>
-                  <a:srgbClr val="19AAB8"/>
-                </a:solidFill>
-                <a:latin typeface="Arial"/>
-                <a:ea typeface="Arial"/>
-                <a:cs typeface="Arial"/>
-              </a:defRPr>
-            </a:pPr>
-            <a:r>
-              <a:rPr sz="2325" b="1">
-                <a:solidFill>
-                  <a:srgbClr val="19AAB8"/>
-                </a:solidFill>
-                <a:latin typeface="Arial"/>
-                <a:ea typeface="Arial"/>
-                <a:cs typeface="Arial"/>
-              </a:rPr>
-              <a:t>04</a:t>
-            </a:r>
-          </a:p>
-        </p:txBody>
-      </p:sp>
-      <p:sp>
-        <p:nvSpPr>
-          <p:cNvPr id="16" name="Прямоугольник 15">
-            <a:extLst>
-              <a:ext uri="{FF2B5EF4-FFF2-40B4-BE49-F238E27FC236}">
-                <a16:creationId xmlns:a16="http://schemas.microsoft.com/office/drawing/2014/main" id="{6827AD62-ACA3-4FDF-822C-B57D9D17CFEF}"/>
-              </a:ext>
-            </a:extLst>
-          </p:cNvPr>
-          <p:cNvSpPr>
-            <a:spLocks noGrp="1"/>
-          </p:cNvSpPr>
-          <p:nvPr/>
-        </p:nvSpPr>
-        <p:spPr>
-          <a:xfrm>
-            <a:off x="1447800" y="4133850"/>
-            <a:ext cx="6096000" cy="609600"/>
-          </a:xfrm>
-          <a:prstGeom prst="rect">
-            <a:avLst/>
-          </a:prstGeom>
-          <a:noFill/>
-          <a:ln w="0">
-            <a:noFill/>
-          </a:ln>
-        </p:spPr>
-        <p:txBody>
-          <a:bodyPr>
-            <a:noAutofit/>
-          </a:bodyPr>
-          <a:lstStyle/>
-          <a:p>
-            <a:pPr>
-              <a:defRPr sz="2250" b="0">
-                <a:solidFill>
-                  <a:srgbClr val="FFFFFF"/>
-                </a:solidFill>
-                <a:latin typeface="Arial"/>
-                <a:ea typeface="Arial"/>
-                <a:cs typeface="Arial"/>
-              </a:defRPr>
-            </a:pPr>
-            <a:r>
-              <a:rPr sz="2250" b="0">
-                <a:solidFill>
-                  <a:srgbClr val="FFFFFF"/>
-                </a:solidFill>
-                <a:latin typeface="Arial"/>
-                <a:ea typeface="Arial"/>
-                <a:cs typeface="Arial"/>
-              </a:rPr>
-              <a:t>Резерв: 2-минутное видео прогона — в репозитории</a:t>
-            </a:r>
-          </a:p>
-        </p:txBody>
-      </p:sp>
-      <p:sp>
-        <p:nvSpPr>
-          <p:cNvPr id="17" name="Прямоугольник 16">
-            <a:extLst>
-              <a:ext uri="{FF2B5EF4-FFF2-40B4-BE49-F238E27FC236}">
-                <a16:creationId xmlns:a16="http://schemas.microsoft.com/office/drawing/2014/main" id="{B281FF8D-EF85-4711-86E3-FCE486F23FE2}"/>
-              </a:ext>
-            </a:extLst>
-          </p:cNvPr>
-          <p:cNvSpPr>
-            <a:spLocks noGrp="1"/>
-          </p:cNvSpPr>
-          <p:nvPr/>
-        </p:nvSpPr>
-        <p:spPr>
-          <a:xfrm>
-            <a:off x="609600" y="5248275"/>
-            <a:ext cx="10763250" cy="590550"/>
-          </a:xfrm>
-          <a:prstGeom prst="rect">
-            <a:avLst/>
-          </a:prstGeom>
-          <a:noFill/>
-          <a:ln w="0">
-            <a:noFill/>
-          </a:ln>
-        </p:spPr>
-        <p:txBody>
-          <a:bodyPr>
-            <a:noAutofit/>
-          </a:bodyPr>
-          <a:lstStyle/>
-          <a:p>
-            <a:pPr>
-              <a:defRPr sz="1350" b="0">
-                <a:solidFill>
-                  <a:srgbClr val="D4E5EA"/>
-                </a:solidFill>
-                <a:latin typeface="Arial"/>
-                <a:ea typeface="Arial"/>
-                <a:cs typeface="Arial"/>
-              </a:defRPr>
-            </a:pPr>
-            <a:r>
-              <a:rPr sz="1350" b="0">
-                <a:solidFill>
-                  <a:srgbClr val="D4E5EA"/>
-                </a:solidFill>
-                <a:latin typeface="Arial"/>
-                <a:ea typeface="Arial"/>
-                <a:cs typeface="Arial"/>
-              </a:rPr>
-              <a:t>Тот же сценарий воспроизводится в сданной версии: python app.py + scripts/run_tests.py.</a:t>
-            </a:r>
-          </a:p>
-        </p:txBody>
-      </p:sp>
-      <p:sp>
-        <p:nvSpPr>
-          <p:cNvPr id="24" name="Rectangle 23"/>
-          <p:cNvSpPr/>
-          <p:nvPr/>
-        </p:nvSpPr>
-        <p:spPr>
-          <a:xfrm>
-            <a:off x="7874000" y="1905000"/>
-            <a:ext cx="3810000" cy="2921000"/>
-          </a:xfrm>
-          <a:prstGeom prst="rect">
-            <a:avLst/>
-          </a:prstGeom>
-          <a:solidFill>
-            <a:srgbClr val="F2F2F2"/>
-          </a:solidFill>
-          <a:ln>
-            <a:solidFill>
-              <a:srgbClr val="9AA5B1"/>
-            </a:solidFill>
-            <a:prstDash val="dash"/>
-          </a:ln>
-        </p:spPr>
-        <p:style>
-          <a:lnRef idx="1">
-            <a:schemeClr val="accent1"/>
-          </a:lnRef>
-          <a:fillRef idx="3">
-            <a:schemeClr val="accent1"/>
-          </a:fillRef>
-          <a:effectRef idx="2">
-            <a:schemeClr val="accent1"/>
-          </a:effectRef>
-          <a:fontRef idx="minor">
-            <a:schemeClr val="lt1"/>
-          </a:fontRef>
-        </p:style>
-        <p:txBody>
-          <a:bodyPr rtlCol="0" anchor="ctr" wrap="square"/>
-          <a:lstStyle/>
-          <a:p>
-            <a:pPr algn="ctr"/>
-            <a:r>
-              <a:rPr sz="1300">
-                <a:solidFill>
-                  <a:srgbClr val="9AA5B1"/>
-                </a:solidFill>
-              </a:rPr>
-              <a:t>Скриншот рабочего сценария — вставить</a:t>
-            </a:r>
-          </a:p>
-        </p:txBody>
-      </p:sp>
     </p:spTree>
     <p:extLst>
       <p:ext uri="{BB962C8B-B14F-4D97-AF65-F5344CB8AC3E}">
         <p14:creationId xmlns:p14="http://schemas.microsoft.com/office/powerpoint/2010/main" val="83668521"/>
-      </p:ext>
-    </p:extLst>
-  </p:cSld>
-  <p:clrMapOvr>
-    <a:masterClrMapping/>
-  </p:clrMapOvr>
-</p:sld>
-</file>
-
-<file path=ppt/slides/slide7.xml><?xml version="1.0" encoding="utf-8"?>
-<p:sld xmlns:a="http://schemas.openxmlformats.org/drawingml/2006/main" xmlns:r="http://schemas.openxmlformats.org/officeDocument/2006/relationships" xmlns:p="http://schemas.openxmlformats.org/presentationml/2006/main">
-  <p:cSld>
-    <p:bg>
-      <p:bgPr>
-        <a:solidFill>
-          <a:srgbClr val="FAF8F2"/>
-        </a:solidFill>
-        <a:effectLst/>
-      </p:bgPr>
-    </p:bg>
-    <p:spTree>
-      <p:nvGrpSpPr>
-        <p:cNvPr id="1" name=""/>
-        <p:cNvGrpSpPr/>
-        <p:nvPr/>
-      </p:nvGrpSpPr>
-      <p:grpSpPr>
-        <a:xfrm>
-          <a:off x="0" y="0"/>
-          <a:ext cx="0" cy="0"/>
-          <a:chOff x="0" y="0"/>
-          <a:chExt cx="0" cy="0"/>
-        </a:xfrm>
-      </p:grpSpPr>
-      <p:sp>
-        <p:nvSpPr>
-          <p:cNvPr id="18" name="Прямоугольник 17">
-            <a:extLst>
-              <a:ext uri="{FF2B5EF4-FFF2-40B4-BE49-F238E27FC236}">
-                <a16:creationId xmlns:a16="http://schemas.microsoft.com/office/drawing/2014/main" id="{9BFB8A71-0D31-4A9B-89CD-5DADB90BA659}"/>
-              </a:ext>
-            </a:extLst>
-          </p:cNvPr>
-          <p:cNvSpPr>
-            <a:spLocks noGrp="1"/>
-          </p:cNvSpPr>
-          <p:nvPr/>
-        </p:nvSpPr>
-        <p:spPr>
-          <a:xfrm>
-            <a:off x="609600" y="438150"/>
-            <a:ext cx="10858500" cy="1190625"/>
-          </a:xfrm>
-          <a:prstGeom prst="rect">
-            <a:avLst/>
-          </a:prstGeom>
-          <a:noFill/>
-          <a:ln w="0">
-            <a:noFill/>
-          </a:ln>
-        </p:spPr>
-        <p:txBody>
-          <a:bodyPr>
-            <a:noAutofit/>
-          </a:bodyPr>
-          <a:lstStyle/>
-          <a:p>
-            <a:pPr>
-              <a:defRPr sz="3600" b="1">
-                <a:solidFill>
-                  <a:srgbClr val="052849"/>
-                </a:solidFill>
-                <a:latin typeface="Arial"/>
-                <a:ea typeface="Arial"/>
-                <a:cs typeface="Arial"/>
-              </a:defRPr>
-            </a:pPr>
-            <a:r>
-              <a:rPr sz="3600" b="1">
-                <a:solidFill>
-                  <a:srgbClr val="052849"/>
-                </a:solidFill>
-                <a:latin typeface="Arial"/>
-                <a:ea typeface="Arial"/>
-                <a:cs typeface="Arial"/>
-              </a:rPr>
-              <a:t>Проверка результата</a:t>
-            </a:r>
-          </a:p>
-        </p:txBody>
-      </p:sp>
-      <p:sp>
-        <p:nvSpPr>
-          <p:cNvPr id="2" name="Прямоугольник 1">
-            <a:extLst>
-              <a:ext uri="{FF2B5EF4-FFF2-40B4-BE49-F238E27FC236}">
-                <a16:creationId xmlns:a16="http://schemas.microsoft.com/office/drawing/2014/main" id="{FC48568B-A510-4C07-9095-5B305366D66E}"/>
-              </a:ext>
-            </a:extLst>
-          </p:cNvPr>
-          <p:cNvSpPr>
-            <a:spLocks noGrp="1"/>
-          </p:cNvSpPr>
-          <p:nvPr/>
-        </p:nvSpPr>
-        <p:spPr>
-          <a:xfrm>
-            <a:off x="0" y="5953125"/>
-            <a:ext cx="12192000" cy="904875"/>
-          </a:xfrm>
-          <a:prstGeom prst="rect">
-            <a:avLst/>
-          </a:prstGeom>
-          <a:solidFill>
-            <a:srgbClr val="FFFFFF"/>
-          </a:solidFill>
-          <a:ln w="0">
-            <a:noFill/>
-          </a:ln>
-        </p:spPr>
-      </p:sp>
-      <p:pic>
-        <p:nvPicPr>
-          <p:cNvPr id="20" name="Рисунок 19"/>
-          <p:cNvPicPr>
-            <a:picLocks noChangeAspect="1"/>
-          </p:cNvPicPr>
-          <p:nvPr/>
-        </p:nvPicPr>
-        <p:blipFill>
-          <a:blip r:embed="rId3"/>
-          <a:stretch/>
-        </p:blipFill>
-        <p:spPr>
-          <a:xfrm>
-            <a:off x="609600" y="6143625"/>
-            <a:ext cx="457200" cy="457200"/>
-          </a:xfrm>
-          <a:prstGeom prst="rect">
-            <a:avLst/>
-          </a:prstGeom>
-        </p:spPr>
-      </p:pic>
-      <p:sp>
-        <p:nvSpPr>
-          <p:cNvPr id="4" name="Прямоугольник 3">
-            <a:extLst>
-              <a:ext uri="{FF2B5EF4-FFF2-40B4-BE49-F238E27FC236}">
-                <a16:creationId xmlns:a16="http://schemas.microsoft.com/office/drawing/2014/main" id="{2438A521-E617-465A-8D16-3F6A09D218A2}"/>
-              </a:ext>
-            </a:extLst>
-          </p:cNvPr>
-          <p:cNvSpPr>
-            <a:spLocks noGrp="1"/>
-          </p:cNvSpPr>
-          <p:nvPr/>
-        </p:nvSpPr>
-        <p:spPr>
-          <a:xfrm>
-            <a:off x="1143000" y="6134100"/>
-            <a:ext cx="1619250" cy="514350"/>
-          </a:xfrm>
-          <a:prstGeom prst="rect">
-            <a:avLst/>
-          </a:prstGeom>
-          <a:noFill/>
-          <a:ln w="0">
-            <a:noFill/>
-          </a:ln>
-        </p:spPr>
-        <p:txBody>
-          <a:bodyPr>
-            <a:noAutofit/>
-          </a:bodyPr>
-          <a:lstStyle/>
-          <a:p>
-            <a:pPr>
-              <a:defRPr sz="3000" b="1">
-                <a:solidFill>
-                  <a:srgbClr val="052849"/>
-                </a:solidFill>
-                <a:latin typeface="Arial"/>
-                <a:ea typeface="Arial"/>
-                <a:cs typeface="Arial"/>
-              </a:defRPr>
-            </a:pPr>
-            <a:r>
-              <a:rPr sz="3000" b="1">
-                <a:solidFill>
-                  <a:srgbClr val="052849"/>
-                </a:solidFill>
-                <a:latin typeface="Arial"/>
-                <a:ea typeface="Arial"/>
-                <a:cs typeface="Arial"/>
-              </a:rPr>
-              <a:t>окели</a:t>
-            </a:r>
-          </a:p>
-        </p:txBody>
-      </p:sp>
-      <p:pic>
-        <p:nvPicPr>
-          <p:cNvPr id="22" name="Рисунок 21"/>
-          <p:cNvPicPr>
-            <a:picLocks noChangeAspect="1"/>
-          </p:cNvPicPr>
-          <p:nvPr/>
-        </p:nvPicPr>
-        <p:blipFill>
-          <a:blip r:embed="rId4"/>
-          <a:stretch/>
-        </p:blipFill>
-        <p:spPr>
-          <a:xfrm>
-            <a:off x="4762500" y="6115159"/>
-            <a:ext cx="1390650" cy="590333"/>
-          </a:xfrm>
-          <a:prstGeom prst="rect">
-            <a:avLst/>
-          </a:prstGeom>
-        </p:spPr>
-      </p:pic>
-      <p:pic>
-        <p:nvPicPr>
-          <p:cNvPr id="23" name="Рисунок 22"/>
-          <p:cNvPicPr>
-            <a:picLocks noChangeAspect="1"/>
-          </p:cNvPicPr>
-          <p:nvPr/>
-        </p:nvPicPr>
-        <p:blipFill>
-          <a:blip r:embed="rId5"/>
-          <a:stretch/>
-        </p:blipFill>
-        <p:spPr>
-          <a:xfrm>
-            <a:off x="9039225" y="6067425"/>
-            <a:ext cx="628650" cy="628650"/>
-          </a:xfrm>
-          <a:prstGeom prst="rect">
-            <a:avLst/>
-          </a:prstGeom>
-        </p:spPr>
-      </p:pic>
-      <p:sp>
-        <p:nvSpPr>
-          <p:cNvPr id="7" name="Прямоугольник 6">
-            <a:extLst>
-              <a:ext uri="{FF2B5EF4-FFF2-40B4-BE49-F238E27FC236}">
-                <a16:creationId xmlns:a16="http://schemas.microsoft.com/office/drawing/2014/main" id="{F37E4E6B-ADE4-4FC6-ACE8-445E9DFFD39B}"/>
-              </a:ext>
-            </a:extLst>
-          </p:cNvPr>
-          <p:cNvSpPr>
-            <a:spLocks noGrp="1"/>
-          </p:cNvSpPr>
-          <p:nvPr/>
-        </p:nvSpPr>
-        <p:spPr>
-          <a:xfrm>
-            <a:off x="9829800" y="6305550"/>
-            <a:ext cx="1571625" cy="257175"/>
-          </a:xfrm>
-          <a:prstGeom prst="rect">
-            <a:avLst/>
-          </a:prstGeom>
-          <a:noFill/>
-          <a:ln w="0">
-            <a:noFill/>
-          </a:ln>
-        </p:spPr>
-        <p:txBody>
-          <a:bodyPr>
-            <a:noAutofit/>
-          </a:bodyPr>
-          <a:lstStyle/>
-          <a:p>
-            <a:pPr>
-              <a:defRPr sz="1575" b="0">
-                <a:solidFill>
-                  <a:srgbClr val="052849"/>
-                </a:solidFill>
-                <a:latin typeface="Arial"/>
-                <a:ea typeface="Arial"/>
-                <a:cs typeface="Arial"/>
-              </a:defRPr>
-            </a:pPr>
-            <a:r>
-              <a:rPr sz="1575" b="0">
-                <a:solidFill>
-                  <a:srgbClr val="052849"/>
-                </a:solidFill>
-                <a:latin typeface="Arial"/>
-                <a:ea typeface="Arial"/>
-                <a:cs typeface="Arial"/>
-              </a:rPr>
-              <a:t>Волгоград</a:t>
-            </a:r>
-          </a:p>
-        </p:txBody>
-      </p:sp>
-      <p:sp>
-        <p:nvSpPr>
-          <p:cNvPr id="8" name="Прямоугольник 7">
-            <a:extLst>
-              <a:ext uri="{FF2B5EF4-FFF2-40B4-BE49-F238E27FC236}">
-                <a16:creationId xmlns:a16="http://schemas.microsoft.com/office/drawing/2014/main" id="{4364C2C6-EB1D-489B-9B3D-645FBB2BD8A5}"/>
-              </a:ext>
-            </a:extLst>
-          </p:cNvPr>
-          <p:cNvSpPr>
-            <a:spLocks noGrp="1"/>
-          </p:cNvSpPr>
-          <p:nvPr/>
-        </p:nvSpPr>
-        <p:spPr>
-          <a:xfrm>
-            <a:off x="11525250" y="6343650"/>
-            <a:ext cx="419100" cy="209550"/>
-          </a:xfrm>
-          <a:prstGeom prst="rect">
-            <a:avLst/>
-          </a:prstGeom>
-          <a:noFill/>
-          <a:ln w="0">
-            <a:noFill/>
-          </a:ln>
-        </p:spPr>
-        <p:txBody>
-          <a:bodyPr>
-            <a:noAutofit/>
-          </a:bodyPr>
-          <a:lstStyle/>
-          <a:p>
-            <a:pPr>
-              <a:defRPr sz="1050" b="0">
-                <a:solidFill>
-                  <a:srgbClr val="566572"/>
-                </a:solidFill>
-                <a:latin typeface="Arial"/>
-                <a:ea typeface="Arial"/>
-                <a:cs typeface="Arial"/>
-              </a:defRPr>
-            </a:pPr>
-            <a:r>
-              <a:rPr sz="1050" b="0">
-                <a:solidFill>
-                  <a:srgbClr val="566572"/>
-                </a:solidFill>
-                <a:latin typeface="Arial"/>
-                <a:ea typeface="Arial"/>
-                <a:cs typeface="Arial"/>
-              </a:rPr>
-              <a:t>07</a:t>
-            </a:r>
-          </a:p>
-        </p:txBody>
-      </p:sp>
-      <p:sp>
-        <p:nvSpPr>
-          <p:cNvPr id="9" name="Прямоугольник 8">
-            <a:extLst>
-              <a:ext uri="{FF2B5EF4-FFF2-40B4-BE49-F238E27FC236}">
-                <a16:creationId xmlns:a16="http://schemas.microsoft.com/office/drawing/2014/main" id="{98D7BC41-8165-4C64-9376-5DF84BFD79C2}"/>
-              </a:ext>
-            </a:extLst>
-          </p:cNvPr>
-          <p:cNvSpPr>
-            <a:spLocks noGrp="1"/>
-          </p:cNvSpPr>
-          <p:nvPr/>
-        </p:nvSpPr>
-        <p:spPr>
-          <a:xfrm>
-            <a:off x="609600" y="1828800"/>
-            <a:ext cx="666750" cy="438150"/>
-          </a:xfrm>
-          <a:prstGeom prst="rect">
-            <a:avLst/>
-          </a:prstGeom>
-          <a:noFill/>
-          <a:ln w="0">
-            <a:noFill/>
-          </a:ln>
-        </p:spPr>
-        <p:txBody>
-          <a:bodyPr>
-            <a:noAutofit/>
-          </a:bodyPr>
-          <a:lstStyle/>
-          <a:p>
-            <a:pPr>
-              <a:defRPr sz="2325" b="1">
-                <a:solidFill>
-                  <a:srgbClr val="018A98"/>
-                </a:solidFill>
-                <a:latin typeface="Arial"/>
-                <a:ea typeface="Arial"/>
-                <a:cs typeface="Arial"/>
-              </a:defRPr>
-            </a:pPr>
-            <a:r>
-              <a:rPr sz="2325" b="1">
-                <a:solidFill>
-                  <a:srgbClr val="018A98"/>
-                </a:solidFill>
-                <a:latin typeface="Arial"/>
-                <a:ea typeface="Arial"/>
-                <a:cs typeface="Arial"/>
-              </a:rPr>
-              <a:t>01</a:t>
-            </a:r>
-          </a:p>
-        </p:txBody>
-      </p:sp>
-      <p:sp>
-        <p:nvSpPr>
-          <p:cNvPr id="10" name="Прямоугольник 9">
-            <a:extLst>
-              <a:ext uri="{FF2B5EF4-FFF2-40B4-BE49-F238E27FC236}">
-                <a16:creationId xmlns:a16="http://schemas.microsoft.com/office/drawing/2014/main" id="{A5979586-0666-4FFA-9F77-64B1D30D70C7}"/>
-              </a:ext>
-            </a:extLst>
-          </p:cNvPr>
-          <p:cNvSpPr>
-            <a:spLocks noGrp="1"/>
-          </p:cNvSpPr>
-          <p:nvPr/>
-        </p:nvSpPr>
-        <p:spPr>
-          <a:xfrm>
-            <a:off x="1447800" y="1847850"/>
-            <a:ext cx="9858375" cy="609600"/>
-          </a:xfrm>
-          <a:prstGeom prst="rect">
-            <a:avLst/>
-          </a:prstGeom>
-          <a:noFill/>
-          <a:ln w="0">
-            <a:noFill/>
-          </a:ln>
-        </p:spPr>
-        <p:txBody>
-          <a:bodyPr>
-            <a:noAutofit/>
-          </a:bodyPr>
-          <a:lstStyle/>
-          <a:p>
-            <a:pPr>
-              <a:defRPr sz="2250" b="0">
-                <a:solidFill>
-                  <a:srgbClr val="052849"/>
-                </a:solidFill>
-                <a:latin typeface="Arial"/>
-                <a:ea typeface="Arial"/>
-                <a:cs typeface="Arial"/>
-              </a:defRPr>
-            </a:pPr>
-            <a:r>
-              <a:rPr sz="2250" b="0">
-                <a:solidFill>
-                  <a:srgbClr val="052849"/>
-                </a:solidFill>
-                <a:latin typeface="Arial"/>
-                <a:ea typeface="Arial"/>
-                <a:cs typeface="Arial"/>
-              </a:rPr>
-              <a:t>Метрика: доля пройденных проверок tests.json (12) и точность сегментации на 10 примерах</a:t>
-            </a:r>
-          </a:p>
-        </p:txBody>
-      </p:sp>
-      <p:sp>
-        <p:nvSpPr>
-          <p:cNvPr id="11" name="Прямоугольник 10">
-            <a:extLst>
-              <a:ext uri="{FF2B5EF4-FFF2-40B4-BE49-F238E27FC236}">
-                <a16:creationId xmlns:a16="http://schemas.microsoft.com/office/drawing/2014/main" id="{259C3B07-5C4A-4B15-B837-886EFC397777}"/>
-              </a:ext>
-            </a:extLst>
-          </p:cNvPr>
-          <p:cNvSpPr>
-            <a:spLocks noGrp="1"/>
-          </p:cNvSpPr>
-          <p:nvPr/>
-        </p:nvSpPr>
-        <p:spPr>
-          <a:xfrm>
-            <a:off x="609600" y="2590800"/>
-            <a:ext cx="666750" cy="438150"/>
-          </a:xfrm>
-          <a:prstGeom prst="rect">
-            <a:avLst/>
-          </a:prstGeom>
-          <a:noFill/>
-          <a:ln w="0">
-            <a:noFill/>
-          </a:ln>
-        </p:spPr>
-        <p:txBody>
-          <a:bodyPr>
-            <a:noAutofit/>
-          </a:bodyPr>
-          <a:lstStyle/>
-          <a:p>
-            <a:pPr>
-              <a:defRPr sz="2325" b="1">
-                <a:solidFill>
-                  <a:srgbClr val="018A98"/>
-                </a:solidFill>
-                <a:latin typeface="Arial"/>
-                <a:ea typeface="Arial"/>
-                <a:cs typeface="Arial"/>
-              </a:defRPr>
-            </a:pPr>
-            <a:r>
-              <a:rPr sz="2325" b="1">
-                <a:solidFill>
-                  <a:srgbClr val="018A98"/>
-                </a:solidFill>
-                <a:latin typeface="Arial"/>
-                <a:ea typeface="Arial"/>
-                <a:cs typeface="Arial"/>
-              </a:rPr>
-              <a:t>02</a:t>
-            </a:r>
-          </a:p>
-        </p:txBody>
-      </p:sp>
-      <p:sp>
-        <p:nvSpPr>
-          <p:cNvPr id="12" name="Прямоугольник 11">
-            <a:extLst>
-              <a:ext uri="{FF2B5EF4-FFF2-40B4-BE49-F238E27FC236}">
-                <a16:creationId xmlns:a16="http://schemas.microsoft.com/office/drawing/2014/main" id="{A3FA6E90-2567-4D42-937E-EEA5D461194C}"/>
-              </a:ext>
-            </a:extLst>
-          </p:cNvPr>
-          <p:cNvSpPr>
-            <a:spLocks noGrp="1"/>
-          </p:cNvSpPr>
-          <p:nvPr/>
-        </p:nvSpPr>
-        <p:spPr>
-          <a:xfrm>
-            <a:off x="1447800" y="2609850"/>
-            <a:ext cx="9858375" cy="609600"/>
-          </a:xfrm>
-          <a:prstGeom prst="rect">
-            <a:avLst/>
-          </a:prstGeom>
-          <a:noFill/>
-          <a:ln w="0">
-            <a:noFill/>
-          </a:ln>
-        </p:spPr>
-        <p:txBody>
-          <a:bodyPr>
-            <a:noAutofit/>
-          </a:bodyPr>
-          <a:lstStyle/>
-          <a:p>
-            <a:pPr>
-              <a:defRPr sz="2250" b="0">
-                <a:solidFill>
-                  <a:srgbClr val="052849"/>
-                </a:solidFill>
-                <a:latin typeface="Arial"/>
-                <a:ea typeface="Arial"/>
-                <a:cs typeface="Arial"/>
-              </a:defRPr>
-            </a:pPr>
-            <a:r>
-              <a:rPr sz="2250" b="0">
-                <a:solidFill>
-                  <a:srgbClr val="052849"/>
-                </a:solidFill>
-                <a:latin typeface="Arial"/>
-                <a:ea typeface="Arial"/>
-                <a:cs typeface="Arial"/>
-              </a:rPr>
-              <a:t>Базовый способ: ручной разбор переписки — контекст теряется, карточки дублируются</a:t>
-            </a:r>
-          </a:p>
-        </p:txBody>
-      </p:sp>
-      <p:sp>
-        <p:nvSpPr>
-          <p:cNvPr id="13" name="Прямоугольник 12">
-            <a:extLst>
-              <a:ext uri="{FF2B5EF4-FFF2-40B4-BE49-F238E27FC236}">
-                <a16:creationId xmlns:a16="http://schemas.microsoft.com/office/drawing/2014/main" id="{B6CF598F-97B8-45B8-BA73-117A1E428F15}"/>
-              </a:ext>
-            </a:extLst>
-          </p:cNvPr>
-          <p:cNvSpPr>
-            <a:spLocks noGrp="1"/>
-          </p:cNvSpPr>
-          <p:nvPr/>
-        </p:nvSpPr>
-        <p:spPr>
-          <a:xfrm>
-            <a:off x="609600" y="3352800"/>
-            <a:ext cx="666750" cy="438150"/>
-          </a:xfrm>
-          <a:prstGeom prst="rect">
-            <a:avLst/>
-          </a:prstGeom>
-          <a:noFill/>
-          <a:ln w="0">
-            <a:noFill/>
-          </a:ln>
-        </p:spPr>
-        <p:txBody>
-          <a:bodyPr>
-            <a:noAutofit/>
-          </a:bodyPr>
-          <a:lstStyle/>
-          <a:p>
-            <a:pPr>
-              <a:defRPr sz="2325" b="1">
-                <a:solidFill>
-                  <a:srgbClr val="018A98"/>
-                </a:solidFill>
-                <a:latin typeface="Arial"/>
-                <a:ea typeface="Arial"/>
-                <a:cs typeface="Arial"/>
-              </a:defRPr>
-            </a:pPr>
-            <a:r>
-              <a:rPr sz="2325" b="1">
-                <a:solidFill>
-                  <a:srgbClr val="018A98"/>
-                </a:solidFill>
-                <a:latin typeface="Arial"/>
-                <a:ea typeface="Arial"/>
-                <a:cs typeface="Arial"/>
-              </a:rPr>
-              <a:t>03</a:t>
-            </a:r>
-          </a:p>
-        </p:txBody>
-      </p:sp>
-      <p:sp>
-        <p:nvSpPr>
-          <p:cNvPr id="14" name="Прямоугольник 13">
-            <a:extLst>
-              <a:ext uri="{FF2B5EF4-FFF2-40B4-BE49-F238E27FC236}">
-                <a16:creationId xmlns:a16="http://schemas.microsoft.com/office/drawing/2014/main" id="{2D40E7AA-576B-4003-A0F5-869023334030}"/>
-              </a:ext>
-            </a:extLst>
-          </p:cNvPr>
-          <p:cNvSpPr>
-            <a:spLocks noGrp="1"/>
-          </p:cNvSpPr>
-          <p:nvPr/>
-        </p:nvSpPr>
-        <p:spPr>
-          <a:xfrm>
-            <a:off x="1447800" y="3371850"/>
-            <a:ext cx="9858375" cy="609600"/>
-          </a:xfrm>
-          <a:prstGeom prst="rect">
-            <a:avLst/>
-          </a:prstGeom>
-          <a:noFill/>
-          <a:ln w="0">
-            <a:noFill/>
-          </a:ln>
-        </p:spPr>
-        <p:txBody>
-          <a:bodyPr>
-            <a:noAutofit/>
-          </a:bodyPr>
-          <a:lstStyle/>
-          <a:p>
-            <a:pPr>
-              <a:defRPr sz="2250" b="0">
-                <a:solidFill>
-                  <a:srgbClr val="052849"/>
-                </a:solidFill>
-                <a:latin typeface="Arial"/>
-                <a:ea typeface="Arial"/>
-                <a:cs typeface="Arial"/>
-              </a:defRPr>
-            </a:pPr>
-            <a:r>
-              <a:rPr sz="2250" b="0">
-                <a:solidFill>
-                  <a:srgbClr val="052849"/>
-                </a:solidFill>
-                <a:latin typeface="Arial"/>
-                <a:ea typeface="Arial"/>
-                <a:cs typeface="Arial"/>
-              </a:rPr>
-              <a:t>Наш прототип: контур собран: 172/172 проверок, 12/12 тестов; LLM-линия qwen2.5:7b — 10/10 кейсов и 21/21 перефраз</a:t>
-            </a:r>
-          </a:p>
-        </p:txBody>
-      </p:sp>
-      <p:sp>
-        <p:nvSpPr>
-          <p:cNvPr id="15" name="Прямоугольник 14">
-            <a:extLst>
-              <a:ext uri="{FF2B5EF4-FFF2-40B4-BE49-F238E27FC236}">
-                <a16:creationId xmlns:a16="http://schemas.microsoft.com/office/drawing/2014/main" id="{7E15090C-0C55-41D1-8BED-66939D2CA403}"/>
-              </a:ext>
-            </a:extLst>
-          </p:cNvPr>
-          <p:cNvSpPr>
-            <a:spLocks noGrp="1"/>
-          </p:cNvSpPr>
-          <p:nvPr/>
-        </p:nvSpPr>
-        <p:spPr>
-          <a:xfrm>
-            <a:off x="609600" y="4114800"/>
-            <a:ext cx="666750" cy="438150"/>
-          </a:xfrm>
-          <a:prstGeom prst="rect">
-            <a:avLst/>
-          </a:prstGeom>
-          <a:noFill/>
-          <a:ln w="0">
-            <a:noFill/>
-          </a:ln>
-        </p:spPr>
-        <p:txBody>
-          <a:bodyPr>
-            <a:noAutofit/>
-          </a:bodyPr>
-          <a:lstStyle/>
-          <a:p>
-            <a:pPr>
-              <a:defRPr sz="2325" b="1">
-                <a:solidFill>
-                  <a:srgbClr val="018A98"/>
-                </a:solidFill>
-                <a:latin typeface="Arial"/>
-                <a:ea typeface="Arial"/>
-                <a:cs typeface="Arial"/>
-              </a:defRPr>
-            </a:pPr>
-            <a:r>
-              <a:rPr sz="2325" b="1">
-                <a:solidFill>
-                  <a:srgbClr val="018A98"/>
-                </a:solidFill>
-                <a:latin typeface="Arial"/>
-                <a:ea typeface="Arial"/>
-                <a:cs typeface="Arial"/>
-              </a:rPr>
-              <a:t>04</a:t>
-            </a:r>
-          </a:p>
-        </p:txBody>
-      </p:sp>
-      <p:sp>
-        <p:nvSpPr>
-          <p:cNvPr id="16" name="Прямоугольник 15">
-            <a:extLst>
-              <a:ext uri="{FF2B5EF4-FFF2-40B4-BE49-F238E27FC236}">
-                <a16:creationId xmlns:a16="http://schemas.microsoft.com/office/drawing/2014/main" id="{22A8D848-C69B-4842-A510-3CA86684D1A6}"/>
-              </a:ext>
-            </a:extLst>
-          </p:cNvPr>
-          <p:cNvSpPr>
-            <a:spLocks noGrp="1"/>
-          </p:cNvSpPr>
-          <p:nvPr/>
-        </p:nvSpPr>
-        <p:spPr>
-          <a:xfrm>
-            <a:off x="1447800" y="4133850"/>
-            <a:ext cx="9858375" cy="609600"/>
-          </a:xfrm>
-          <a:prstGeom prst="rect">
-            <a:avLst/>
-          </a:prstGeom>
-          <a:noFill/>
-          <a:ln w="0">
-            <a:noFill/>
-          </a:ln>
-        </p:spPr>
-        <p:txBody>
-          <a:bodyPr>
-            <a:noAutofit/>
-          </a:bodyPr>
-          <a:lstStyle/>
-          <a:p>
-            <a:pPr>
-              <a:defRPr sz="2250" b="0">
-                <a:solidFill>
-                  <a:srgbClr val="052849"/>
-                </a:solidFill>
-                <a:latin typeface="Arial"/>
-                <a:ea typeface="Arial"/>
-                <a:cs typeface="Arial"/>
-              </a:defRPr>
-            </a:pPr>
-            <a:r>
-              <a:rPr sz="2250" b="0">
-                <a:solidFill>
-                  <a:srgbClr val="052849"/>
-                </a:solidFill>
-                <a:latin typeface="Arial"/>
-                <a:ea typeface="Arial"/>
-                <a:cs typeface="Arial"/>
-              </a:rPr>
-              <a:t>Ошибки: на спорных целях LLM чаще переспрашивает; краевые F006–F009 проходят с предупреждениями</a:t>
-            </a:r>
-          </a:p>
-        </p:txBody>
-      </p:sp>
-      <p:sp>
-        <p:nvSpPr>
-          <p:cNvPr id="17" name="Прямоугольник 16">
-            <a:extLst>
-              <a:ext uri="{FF2B5EF4-FFF2-40B4-BE49-F238E27FC236}">
-                <a16:creationId xmlns:a16="http://schemas.microsoft.com/office/drawing/2014/main" id="{498B1674-AE63-4E45-B0B2-57BF36B2BA58}"/>
-              </a:ext>
-            </a:extLst>
-          </p:cNvPr>
-          <p:cNvSpPr>
-            <a:spLocks noGrp="1"/>
-          </p:cNvSpPr>
-          <p:nvPr/>
-        </p:nvSpPr>
-        <p:spPr>
-          <a:xfrm>
-            <a:off x="609600" y="5248275"/>
-            <a:ext cx="10763250" cy="590550"/>
-          </a:xfrm>
-          <a:prstGeom prst="rect">
-            <a:avLst/>
-          </a:prstGeom>
-          <a:noFill/>
-          <a:ln w="0">
-            <a:noFill/>
-          </a:ln>
-        </p:spPr>
-        <p:txBody>
-          <a:bodyPr>
-            <a:noAutofit/>
-          </a:bodyPr>
-          <a:lstStyle/>
-          <a:p>
-            <a:pPr>
-              <a:defRPr sz="1350" b="0">
-                <a:solidFill>
-                  <a:srgbClr val="566572"/>
-                </a:solidFill>
-                <a:latin typeface="Arial"/>
-                <a:ea typeface="Arial"/>
-                <a:cs typeface="Arial"/>
-              </a:defRPr>
-            </a:pPr>
-            <a:r>
-              <a:rPr sz="1350" b="0">
-                <a:solidFill>
-                  <a:srgbClr val="566572"/>
-                </a:solidFill>
-                <a:latin typeface="Arial"/>
-                <a:ea typeface="Arial"/>
-                <a:cs typeface="Arial"/>
-              </a:rPr>
-              <a:t>Таблица проверок — в репозитории: bot_fullstack/results/FB01_Проверки.md (прогон 24.09, 22:31) и на слайде 11.</a:t>
-            </a:r>
-          </a:p>
-        </p:txBody>
-      </p:sp>
-    </p:spTree>
-    <p:extLst>
-      <p:ext uri="{BB962C8B-B14F-4D97-AF65-F5344CB8AC3E}">
-        <p14:creationId xmlns:p14="http://schemas.microsoft.com/office/powerpoint/2010/main" val="1873944380"/>
       </p:ext>
     </p:extLst>
   </p:cSld>
@@ -10123,7 +8373,7 @@
           <p:cNvPr id="18" name="Прямоугольник 17">
             <a:extLst>
               <a:ext uri="{FF2B5EF4-FFF2-40B4-BE49-F238E27FC236}">
-                <a16:creationId xmlns:a16="http://schemas.microsoft.com/office/drawing/2014/main" id="{B72D6680-BA8E-46CC-9282-6833430D56C7}"/>
+                <a16:creationId xmlns:a16="http://schemas.microsoft.com/office/drawing/2014/main" id="{9BFB8A71-0D31-4A9B-89CD-5DADB90BA659}"/>
               </a:ext>
             </a:extLst>
           </p:cNvPr>
@@ -10162,16 +8412,46 @@
               </a:defRPr>
             </a:pPr>
             <a:r>
-              <a:rPr sz="3600" b="1">
-                <a:solidFill>
-                  <a:srgbClr val="052849"/>
-                </a:solidFill>
-                <a:latin typeface="Arial"/>
-                <a:ea typeface="Arial"/>
-                <a:cs typeface="Arial"/>
-              </a:rPr>
-              <a:t>Эффект для бизнеса</a:t>
-            </a:r>
+              <a:rPr sz="3600" b="1" dirty="0" err="1">
+                <a:solidFill>
+                  <a:srgbClr val="052849"/>
+                </a:solidFill>
+                <a:latin typeface="Arial"/>
+                <a:ea typeface="Arial"/>
+                <a:cs typeface="Arial"/>
+              </a:rPr>
+              <a:t>Проверка</a:t>
+            </a:r>
+            <a:r>
+              <a:rPr sz="3600" b="1" dirty="0">
+                <a:solidFill>
+                  <a:srgbClr val="052849"/>
+                </a:solidFill>
+                <a:latin typeface="Arial"/>
+                <a:ea typeface="Arial"/>
+                <a:cs typeface="Arial"/>
+              </a:rPr>
+              <a:t> </a:t>
+            </a:r>
+            <a:r>
+              <a:rPr sz="3600" b="1" dirty="0" err="1">
+                <a:solidFill>
+                  <a:srgbClr val="052849"/>
+                </a:solidFill>
+                <a:latin typeface="Arial"/>
+                <a:ea typeface="Arial"/>
+                <a:cs typeface="Arial"/>
+              </a:rPr>
+              <a:t>результата</a:t>
+            </a:r>
+            <a:endParaRPr sz="3600" b="1" dirty="0">
+              <a:solidFill>
+                <a:srgbClr val="052849"/>
+              </a:solidFill>
+              <a:latin typeface="Arial"/>
+              <a:ea typeface="Arial"/>
+              <a:cs typeface="Arial"/>
+            </a:endParaRPr>
           </a:p>
         </p:txBody>
       </p:sp>
@@ -10180,7 +8460,7 @@
           <p:cNvPr id="2" name="Прямоугольник 1">
             <a:extLst>
               <a:ext uri="{FF2B5EF4-FFF2-40B4-BE49-F238E27FC236}">
-                <a16:creationId xmlns:a16="http://schemas.microsoft.com/office/drawing/2014/main" id="{345522D7-32B0-404B-9AF7-948864D91D66}"/>
+                <a16:creationId xmlns:a16="http://schemas.microsoft.com/office/drawing/2014/main" id="{FC48568B-A510-4C07-9095-5B305366D66E}"/>
               </a:ext>
             </a:extLst>
           </p:cNvPr>
@@ -10232,7 +8512,7 @@
           <p:cNvPr id="4" name="Прямоугольник 3">
             <a:extLst>
               <a:ext uri="{FF2B5EF4-FFF2-40B4-BE49-F238E27FC236}">
-                <a16:creationId xmlns:a16="http://schemas.microsoft.com/office/drawing/2014/main" id="{F5A262F3-3E0C-4C70-9343-B30C558CE9F1}"/>
+                <a16:creationId xmlns:a16="http://schemas.microsoft.com/office/drawing/2014/main" id="{2438A521-E617-465A-8D16-3F6A09D218A2}"/>
               </a:ext>
             </a:extLst>
           </p:cNvPr>
@@ -10333,7 +8613,7 @@
           <p:cNvPr id="7" name="Прямоугольник 6">
             <a:extLst>
               <a:ext uri="{FF2B5EF4-FFF2-40B4-BE49-F238E27FC236}">
-                <a16:creationId xmlns:a16="http://schemas.microsoft.com/office/drawing/2014/main" id="{A25717A0-196A-40BD-BC2D-56CB062CD939}"/>
+                <a16:creationId xmlns:a16="http://schemas.microsoft.com/office/drawing/2014/main" id="{F37E4E6B-ADE4-4FC6-ACE8-445E9DFFD39B}"/>
               </a:ext>
             </a:extLst>
           </p:cNvPr>
@@ -10390,7 +8670,7 @@
           <p:cNvPr id="8" name="Прямоугольник 7">
             <a:extLst>
               <a:ext uri="{FF2B5EF4-FFF2-40B4-BE49-F238E27FC236}">
-                <a16:creationId xmlns:a16="http://schemas.microsoft.com/office/drawing/2014/main" id="{9E8E847A-E7CB-4F2A-88F6-ADA61977E99A}"/>
+                <a16:creationId xmlns:a16="http://schemas.microsoft.com/office/drawing/2014/main" id="{4364C2C6-EB1D-489B-9B3D-645FBB2BD8A5}"/>
               </a:ext>
             </a:extLst>
           </p:cNvPr>
@@ -10437,528 +8717,1552 @@
                 <a:ea typeface="Arial"/>
                 <a:cs typeface="Arial"/>
               </a:rPr>
-              <a:t>08</a:t>
-            </a:r>
-          </a:p>
-        </p:txBody>
-      </p:sp>
-      <p:sp>
-        <p:nvSpPr>
-          <p:cNvPr id="9" name="Прямоугольник 8">
+              <a:t>07</a:t>
+            </a:r>
+          </a:p>
+        </p:txBody>
+      </p:sp>
+      <p:graphicFrame>
+        <p:nvGraphicFramePr>
+          <p:cNvPr id="6" name="Таблица 5">
             <a:extLst>
               <a:ext uri="{FF2B5EF4-FFF2-40B4-BE49-F238E27FC236}">
-                <a16:creationId xmlns:a16="http://schemas.microsoft.com/office/drawing/2014/main" id="{A3FE1675-3BBF-445F-BC21-284EFEAEBA61}"/>
+                <a16:creationId xmlns:a16="http://schemas.microsoft.com/office/drawing/2014/main" id="{D86FAE03-7D01-98A5-3999-241E1A6AC7BD}"/>
               </a:ext>
             </a:extLst>
           </p:cNvPr>
-          <p:cNvSpPr>
-            <a:spLocks noGrp="1"/>
-          </p:cNvSpPr>
-          <p:nvPr/>
-        </p:nvSpPr>
-        <p:spPr>
-          <a:xfrm>
-            <a:off x="609600" y="1828800"/>
-            <a:ext cx="666750" cy="438150"/>
-          </a:xfrm>
-          <a:prstGeom prst="rect">
-            <a:avLst/>
-          </a:prstGeom>
-          <a:noFill/>
-          <a:ln w="0">
-            <a:noFill/>
-          </a:ln>
-        </p:spPr>
-        <p:txBody>
-          <a:bodyPr>
-            <a:noAutofit/>
-          </a:bodyPr>
-          <a:lstStyle/>
-          <a:p>
-            <a:pPr>
-              <a:defRPr sz="2325" b="1">
-                <a:solidFill>
-                  <a:srgbClr val="018A98"/>
-                </a:solidFill>
-                <a:latin typeface="Arial"/>
-                <a:ea typeface="Arial"/>
-                <a:cs typeface="Arial"/>
-              </a:defRPr>
-            </a:pPr>
-            <a:r>
-              <a:rPr sz="2325" b="1">
-                <a:solidFill>
-                  <a:srgbClr val="018A98"/>
-                </a:solidFill>
-                <a:latin typeface="Arial"/>
-                <a:ea typeface="Arial"/>
-                <a:cs typeface="Arial"/>
-              </a:rPr>
-              <a:t>01</a:t>
-            </a:r>
-          </a:p>
-        </p:txBody>
-      </p:sp>
-      <p:sp>
-        <p:nvSpPr>
-          <p:cNvPr id="10" name="Прямоугольник 9">
-            <a:extLst>
-              <a:ext uri="{FF2B5EF4-FFF2-40B4-BE49-F238E27FC236}">
-                <a16:creationId xmlns:a16="http://schemas.microsoft.com/office/drawing/2014/main" id="{594DD044-53A0-4CB9-820E-6293B91B4DF7}"/>
-              </a:ext>
-            </a:extLst>
-          </p:cNvPr>
-          <p:cNvSpPr>
-            <a:spLocks noGrp="1"/>
-          </p:cNvSpPr>
-          <p:nvPr/>
-        </p:nvSpPr>
-        <p:spPr>
-          <a:xfrm>
-            <a:off x="1447800" y="1847850"/>
-            <a:ext cx="9858375" cy="609600"/>
-          </a:xfrm>
-          <a:prstGeom prst="rect">
-            <a:avLst/>
-          </a:prstGeom>
-          <a:noFill/>
-          <a:ln w="0">
-            <a:noFill/>
-          </a:ln>
-        </p:spPr>
-        <p:txBody>
-          <a:bodyPr>
-            <a:noAutofit/>
-          </a:bodyPr>
-          <a:lstStyle/>
-          <a:p>
-            <a:pPr>
-              <a:defRPr sz="2250" b="0">
-                <a:solidFill>
-                  <a:srgbClr val="052849"/>
-                </a:solidFill>
-                <a:latin typeface="Arial"/>
-                <a:ea typeface="Arial"/>
-                <a:cs typeface="Arial"/>
-              </a:defRPr>
-            </a:pPr>
-            <a:r>
-              <a:rPr sz="2250" b="0">
-                <a:solidFill>
-                  <a:srgbClr val="052849"/>
-                </a:solidFill>
-                <a:latin typeface="Arial"/>
-                <a:ea typeface="Arial"/>
-                <a:cs typeface="Arial"/>
-              </a:rPr>
-              <a:t>Изменение: первичный разбор новичка: вместо ручного чтения переписки — готовая карточка</a:t>
-            </a:r>
-          </a:p>
-        </p:txBody>
-      </p:sp>
-      <p:sp>
-        <p:nvSpPr>
-          <p:cNvPr id="11" name="Прямоугольник 10">
-            <a:extLst>
-              <a:ext uri="{FF2B5EF4-FFF2-40B4-BE49-F238E27FC236}">
-                <a16:creationId xmlns:a16="http://schemas.microsoft.com/office/drawing/2014/main" id="{A5F0D491-B0B4-440B-B721-00194183B340}"/>
-              </a:ext>
-            </a:extLst>
-          </p:cNvPr>
-          <p:cNvSpPr>
-            <a:spLocks noGrp="1"/>
-          </p:cNvSpPr>
-          <p:nvPr/>
-        </p:nvSpPr>
-        <p:spPr>
-          <a:xfrm>
-            <a:off x="609600" y="2590800"/>
-            <a:ext cx="666750" cy="438150"/>
-          </a:xfrm>
-          <a:prstGeom prst="rect">
-            <a:avLst/>
-          </a:prstGeom>
-          <a:noFill/>
-          <a:ln w="0">
-            <a:noFill/>
-          </a:ln>
-        </p:spPr>
-        <p:txBody>
-          <a:bodyPr>
-            <a:noAutofit/>
-          </a:bodyPr>
-          <a:lstStyle/>
-          <a:p>
-            <a:pPr>
-              <a:defRPr sz="2325" b="1">
-                <a:solidFill>
-                  <a:srgbClr val="018A98"/>
-                </a:solidFill>
-                <a:latin typeface="Arial"/>
-                <a:ea typeface="Arial"/>
-                <a:cs typeface="Arial"/>
-              </a:defRPr>
-            </a:pPr>
-            <a:r>
-              <a:rPr sz="2325" b="1">
-                <a:solidFill>
-                  <a:srgbClr val="018A98"/>
-                </a:solidFill>
-                <a:latin typeface="Arial"/>
-                <a:ea typeface="Arial"/>
-                <a:cs typeface="Arial"/>
-              </a:rPr>
-              <a:t>02</a:t>
-            </a:r>
-          </a:p>
-        </p:txBody>
-      </p:sp>
-      <p:sp>
-        <p:nvSpPr>
-          <p:cNvPr id="12" name="Прямоугольник 11">
-            <a:extLst>
-              <a:ext uri="{FF2B5EF4-FFF2-40B4-BE49-F238E27FC236}">
-                <a16:creationId xmlns:a16="http://schemas.microsoft.com/office/drawing/2014/main" id="{41E21C3C-2952-423D-8255-DCF6B07AA632}"/>
-              </a:ext>
-            </a:extLst>
-          </p:cNvPr>
-          <p:cNvSpPr>
-            <a:spLocks noGrp="1"/>
-          </p:cNvSpPr>
-          <p:nvPr/>
-        </p:nvSpPr>
-        <p:spPr>
-          <a:xfrm>
-            <a:off x="1447800" y="2609850"/>
-            <a:ext cx="9858375" cy="609600"/>
-          </a:xfrm>
-          <a:prstGeom prst="rect">
-            <a:avLst/>
-          </a:prstGeom>
-          <a:noFill/>
-          <a:ln w="0">
-            <a:noFill/>
-          </a:ln>
-        </p:spPr>
-        <p:txBody>
-          <a:bodyPr>
-            <a:noAutofit/>
-          </a:bodyPr>
-          <a:lstStyle/>
-          <a:p>
-            <a:pPr>
-              <a:defRPr sz="2250" b="0">
-                <a:solidFill>
-                  <a:srgbClr val="052849"/>
-                </a:solidFill>
-                <a:latin typeface="Arial"/>
-                <a:ea typeface="Arial"/>
-                <a:cs typeface="Arial"/>
-              </a:defRPr>
-            </a:pPr>
-            <a:r>
-              <a:rPr sz="2250" b="0">
-                <a:solidFill>
-                  <a:srgbClr val="052849"/>
-                </a:solidFill>
-                <a:latin typeface="Arial"/>
-                <a:ea typeface="Arial"/>
-                <a:cs typeface="Arial"/>
-              </a:rPr>
-              <a:t>Расчёт: 40 мин → 5 мин на карточку; ~300 контактов в месяц — гипотезы, проверим на пилоте</a:t>
-            </a:r>
-          </a:p>
-        </p:txBody>
-      </p:sp>
-      <p:sp>
-        <p:nvSpPr>
-          <p:cNvPr id="13" name="Прямоугольник 12">
-            <a:extLst>
-              <a:ext uri="{FF2B5EF4-FFF2-40B4-BE49-F238E27FC236}">
-                <a16:creationId xmlns:a16="http://schemas.microsoft.com/office/drawing/2014/main" id="{4D96A4BF-4982-475C-B2E2-BD58BADC73D4}"/>
-              </a:ext>
-            </a:extLst>
-          </p:cNvPr>
-          <p:cNvSpPr>
-            <a:spLocks noGrp="1"/>
-          </p:cNvSpPr>
-          <p:nvPr/>
-        </p:nvSpPr>
-        <p:spPr>
-          <a:xfrm>
-            <a:off x="609600" y="3352800"/>
-            <a:ext cx="666750" cy="438150"/>
-          </a:xfrm>
-          <a:prstGeom prst="rect">
-            <a:avLst/>
-          </a:prstGeom>
-          <a:noFill/>
-          <a:ln w="0">
-            <a:noFill/>
-          </a:ln>
-        </p:spPr>
-        <p:txBody>
-          <a:bodyPr>
-            <a:noAutofit/>
-          </a:bodyPr>
-          <a:lstStyle/>
-          <a:p>
-            <a:pPr>
-              <a:defRPr sz="2325" b="1">
-                <a:solidFill>
-                  <a:srgbClr val="018A98"/>
-                </a:solidFill>
-                <a:latin typeface="Arial"/>
-                <a:ea typeface="Arial"/>
-                <a:cs typeface="Arial"/>
-              </a:defRPr>
-            </a:pPr>
-            <a:r>
-              <a:rPr sz="2325" b="1">
-                <a:solidFill>
-                  <a:srgbClr val="018A98"/>
-                </a:solidFill>
-                <a:latin typeface="Arial"/>
-                <a:ea typeface="Arial"/>
-                <a:cs typeface="Arial"/>
-              </a:rPr>
-              <a:t>03</a:t>
-            </a:r>
-          </a:p>
-        </p:txBody>
-      </p:sp>
-      <p:sp>
-        <p:nvSpPr>
-          <p:cNvPr id="14" name="Прямоугольник 13">
-            <a:extLst>
-              <a:ext uri="{FF2B5EF4-FFF2-40B4-BE49-F238E27FC236}">
-                <a16:creationId xmlns:a16="http://schemas.microsoft.com/office/drawing/2014/main" id="{BEDFDCD8-C0F1-43A7-87D0-E2A9ED5A65AF}"/>
-              </a:ext>
-            </a:extLst>
-          </p:cNvPr>
-          <p:cNvSpPr>
-            <a:spLocks noGrp="1"/>
-          </p:cNvSpPr>
-          <p:nvPr/>
-        </p:nvSpPr>
-        <p:spPr>
-          <a:xfrm>
-            <a:off x="1447800" y="3371850"/>
-            <a:ext cx="9858375" cy="609600"/>
-          </a:xfrm>
-          <a:prstGeom prst="rect">
-            <a:avLst/>
-          </a:prstGeom>
-          <a:noFill/>
-          <a:ln w="0">
-            <a:noFill/>
-          </a:ln>
-        </p:spPr>
-        <p:txBody>
-          <a:bodyPr>
-            <a:noAutofit/>
-          </a:bodyPr>
-          <a:lstStyle/>
-          <a:p>
-            <a:pPr>
-              <a:defRPr sz="2250" b="0">
-                <a:solidFill>
-                  <a:srgbClr val="052849"/>
-                </a:solidFill>
-                <a:latin typeface="Arial"/>
-                <a:ea typeface="Arial"/>
-                <a:cs typeface="Arial"/>
-              </a:defRPr>
-            </a:pPr>
-            <a:r>
-              <a:rPr sz="2250" b="0">
-                <a:solidFill>
-                  <a:srgbClr val="052849"/>
-                </a:solidFill>
-                <a:latin typeface="Arial"/>
-                <a:ea typeface="Arial"/>
-                <a:cs typeface="Arial"/>
-              </a:rPr>
-              <a:t>Затраты: разработка 01.10.2026–31.03.2027 — 4 996 802,80 ₽ с НДС; поддержка — 1 SA и проверка наставниками</a:t>
-            </a:r>
-          </a:p>
-        </p:txBody>
-      </p:sp>
-      <p:sp>
-        <p:nvSpPr>
-          <p:cNvPr id="15" name="Прямоугольник 14">
-            <a:extLst>
-              <a:ext uri="{FF2B5EF4-FFF2-40B4-BE49-F238E27FC236}">
-                <a16:creationId xmlns:a16="http://schemas.microsoft.com/office/drawing/2014/main" id="{13A1BA6B-FF9A-464B-91EA-022FCCEB7297}"/>
-              </a:ext>
-            </a:extLst>
-          </p:cNvPr>
-          <p:cNvSpPr>
-            <a:spLocks noGrp="1"/>
-          </p:cNvSpPr>
-          <p:nvPr/>
-        </p:nvSpPr>
-        <p:spPr>
-          <a:xfrm>
-            <a:off x="609600" y="4114800"/>
-            <a:ext cx="666750" cy="438150"/>
-          </a:xfrm>
-          <a:prstGeom prst="rect">
-            <a:avLst/>
-          </a:prstGeom>
-          <a:noFill/>
-          <a:ln w="0">
-            <a:noFill/>
-          </a:ln>
-        </p:spPr>
-        <p:txBody>
-          <a:bodyPr>
-            <a:noAutofit/>
-          </a:bodyPr>
-          <a:lstStyle/>
-          <a:p>
-            <a:pPr>
-              <a:defRPr sz="2325" b="1">
-                <a:solidFill>
-                  <a:srgbClr val="018A98"/>
-                </a:solidFill>
-                <a:latin typeface="Arial"/>
-                <a:ea typeface="Arial"/>
-                <a:cs typeface="Arial"/>
-              </a:defRPr>
-            </a:pPr>
-            <a:r>
-              <a:rPr sz="2325" b="1">
-                <a:solidFill>
-                  <a:srgbClr val="018A98"/>
-                </a:solidFill>
-                <a:latin typeface="Arial"/>
-                <a:ea typeface="Arial"/>
-                <a:cs typeface="Arial"/>
-              </a:rPr>
-              <a:t>04</a:t>
-            </a:r>
-          </a:p>
-        </p:txBody>
-      </p:sp>
-      <p:sp>
-        <p:nvSpPr>
-          <p:cNvPr id="16" name="Прямоугольник 15">
-            <a:extLst>
-              <a:ext uri="{FF2B5EF4-FFF2-40B4-BE49-F238E27FC236}">
-                <a16:creationId xmlns:a16="http://schemas.microsoft.com/office/drawing/2014/main" id="{C9409F71-5C7D-4139-BE27-E7534631F446}"/>
-              </a:ext>
-            </a:extLst>
-          </p:cNvPr>
-          <p:cNvSpPr>
-            <a:spLocks noGrp="1"/>
-          </p:cNvSpPr>
-          <p:nvPr/>
-        </p:nvSpPr>
-        <p:spPr>
-          <a:xfrm>
-            <a:off x="1447800" y="4133850"/>
-            <a:ext cx="9858375" cy="609600"/>
-          </a:xfrm>
-          <a:prstGeom prst="rect">
-            <a:avLst/>
-          </a:prstGeom>
-          <a:noFill/>
-          <a:ln w="0">
-            <a:noFill/>
-          </a:ln>
-        </p:spPr>
-        <p:txBody>
-          <a:bodyPr>
-            <a:noAutofit/>
-          </a:bodyPr>
-          <a:lstStyle/>
-          <a:p>
-            <a:pPr>
-              <a:defRPr sz="2250" b="0">
-                <a:solidFill>
-                  <a:srgbClr val="052849"/>
-                </a:solidFill>
-                <a:latin typeface="Arial"/>
-                <a:ea typeface="Arial"/>
-                <a:cs typeface="Arial"/>
-              </a:defRPr>
-            </a:pPr>
-            <a:r>
-              <a:rPr sz="2250" b="0">
-                <a:solidFill>
-                  <a:srgbClr val="052849"/>
-                </a:solidFill>
-                <a:latin typeface="Arial"/>
-                <a:ea typeface="Arial"/>
-                <a:cs typeface="Arial"/>
-              </a:rPr>
-              <a:t>Статус: гипотеза: эффект вживую не замерялся, числа — оценка команды</a:t>
-            </a:r>
-          </a:p>
-        </p:txBody>
-      </p:sp>
-      <p:sp>
-        <p:nvSpPr>
-          <p:cNvPr id="17" name="Прямоугольник 16">
-            <a:extLst>
-              <a:ext uri="{FF2B5EF4-FFF2-40B4-BE49-F238E27FC236}">
-                <a16:creationId xmlns:a16="http://schemas.microsoft.com/office/drawing/2014/main" id="{08CC0997-0EC9-41FB-9D36-C0E35AA12BAC}"/>
-              </a:ext>
-            </a:extLst>
-          </p:cNvPr>
-          <p:cNvSpPr>
-            <a:spLocks noGrp="1"/>
-          </p:cNvSpPr>
-          <p:nvPr/>
-        </p:nvSpPr>
-        <p:spPr>
-          <a:xfrm>
-            <a:off x="609600" y="5248275"/>
-            <a:ext cx="10763250" cy="590550"/>
-          </a:xfrm>
-          <a:prstGeom prst="rect">
-            <a:avLst/>
-          </a:prstGeom>
-          <a:noFill/>
-          <a:ln w="0">
-            <a:noFill/>
-          </a:ln>
-        </p:spPr>
-        <p:txBody>
-          <a:bodyPr>
-            <a:noAutofit/>
-          </a:bodyPr>
-          <a:lstStyle/>
-          <a:p>
-            <a:pPr>
-              <a:defRPr sz="1350" b="0">
-                <a:solidFill>
-                  <a:srgbClr val="566572"/>
-                </a:solidFill>
-                <a:latin typeface="Arial"/>
-                <a:ea typeface="Arial"/>
-                <a:cs typeface="Arial"/>
-              </a:defRPr>
-            </a:pPr>
-            <a:r>
-              <a:rPr sz="1350" b="0">
-                <a:solidFill>
-                  <a:srgbClr val="566572"/>
-                </a:solidFill>
-                <a:latin typeface="Arial"/>
-                <a:ea typeface="Arial"/>
-                <a:cs typeface="Arial"/>
-              </a:rPr>
-              <a:t>Допущения и критерии приёмки — в предложении по пилоту: docs/pilot-proposal.md в репозитории.</a:t>
-            </a:r>
-          </a:p>
-        </p:txBody>
-      </p:sp>
+          <p:cNvGraphicFramePr>
+            <a:graphicFrameLocks noGrp="1"/>
+          </p:cNvGraphicFramePr>
+          <p:nvPr>
+            <p:extLst>
+              <p:ext uri="{D42A27DB-BD31-4B8C-83A1-F6EECF244321}">
+                <p14:modId xmlns:p14="http://schemas.microsoft.com/office/powerpoint/2010/main" val="1659543597"/>
+              </p:ext>
+            </p:extLst>
+          </p:nvPr>
+        </p:nvGraphicFramePr>
+        <p:xfrm>
+          <a:off x="476249" y="1033462"/>
+          <a:ext cx="11125201" cy="4887849"/>
+        </p:xfrm>
+        <a:graphic>
+          <a:graphicData uri="http://schemas.openxmlformats.org/drawingml/2006/table">
+            <a:tbl>
+              <a:tblPr firstRow="1" firstCol="1" bandRow="1">
+                <a:tableStyleId>{5C22544A-7EE6-4342-B048-85BDC9FD1C3A}</a:tableStyleId>
+              </a:tblPr>
+              <a:tblGrid>
+                <a:gridCol w="985777">
+                  <a:extLst>
+                    <a:ext uri="{9D8B030D-6E8A-4147-A177-3AD203B41FA5}">
+                      <a16:colId xmlns:a16="http://schemas.microsoft.com/office/drawing/2014/main" val="3645562104"/>
+                    </a:ext>
+                  </a:extLst>
+                </a:gridCol>
+                <a:gridCol w="3379808">
+                  <a:extLst>
+                    <a:ext uri="{9D8B030D-6E8A-4147-A177-3AD203B41FA5}">
+                      <a16:colId xmlns:a16="http://schemas.microsoft.com/office/drawing/2014/main" val="3316668073"/>
+                    </a:ext>
+                  </a:extLst>
+                </a:gridCol>
+                <a:gridCol w="2534856">
+                  <a:extLst>
+                    <a:ext uri="{9D8B030D-6E8A-4147-A177-3AD203B41FA5}">
+                      <a16:colId xmlns:a16="http://schemas.microsoft.com/office/drawing/2014/main" val="3716483103"/>
+                    </a:ext>
+                  </a:extLst>
+                </a:gridCol>
+                <a:gridCol w="3184937">
+                  <a:extLst>
+                    <a:ext uri="{9D8B030D-6E8A-4147-A177-3AD203B41FA5}">
+                      <a16:colId xmlns:a16="http://schemas.microsoft.com/office/drawing/2014/main" val="452212083"/>
+                    </a:ext>
+                  </a:extLst>
+                </a:gridCol>
+                <a:gridCol w="1039823">
+                  <a:extLst>
+                    <a:ext uri="{9D8B030D-6E8A-4147-A177-3AD203B41FA5}">
+                      <a16:colId xmlns:a16="http://schemas.microsoft.com/office/drawing/2014/main" val="2405214600"/>
+                    </a:ext>
+                  </a:extLst>
+                </a:gridCol>
+              </a:tblGrid>
+              <a:tr h="0">
+                <a:tc>
+                  <a:txBody>
+                    <a:bodyPr/>
+                    <a:lstStyle/>
+                    <a:p>
+                      <a:pPr>
+                        <a:lnSpc>
+                          <a:spcPct val="150000"/>
+                        </a:lnSpc>
+                        <a:spcAft>
+                          <a:spcPts val="600"/>
+                        </a:spcAft>
+                        <a:buNone/>
+                      </a:pPr>
+                      <a:r>
+                        <a:rPr lang="ru-RU" sz="1050" dirty="0">
+                          <a:effectLst/>
+                        </a:rPr>
+                        <a:t>ID проверки</a:t>
+                      </a:r>
+                      <a:endParaRPr lang="ru-RU" sz="1400" dirty="0">
+                        <a:effectLst/>
+                        <a:latin typeface="Georgia" panose="02040502050405020303" pitchFamily="18" charset="0"/>
+                        <a:ea typeface="Calibri" panose="020F0502020204030204" pitchFamily="34" charset="0"/>
+                        <a:cs typeface="Arial" panose="020B0604020202020204" pitchFamily="34" charset="0"/>
+                      </a:endParaRPr>
+                    </a:p>
+                  </a:txBody>
+                  <a:tcPr marL="101600" marR="101600" marT="50800" marB="50800"/>
+                </a:tc>
+                <a:tc>
+                  <a:txBody>
+                    <a:bodyPr/>
+                    <a:lstStyle/>
+                    <a:p>
+                      <a:pPr>
+                        <a:lnSpc>
+                          <a:spcPct val="150000"/>
+                        </a:lnSpc>
+                        <a:spcAft>
+                          <a:spcPts val="600"/>
+                        </a:spcAft>
+                        <a:buNone/>
+                      </a:pPr>
+                      <a:r>
+                        <a:rPr lang="ru-RU" sz="1050">
+                          <a:effectLst/>
+                        </a:rPr>
+                        <a:t>Что подали на вход</a:t>
+                      </a:r>
+                      <a:endParaRPr lang="ru-RU" sz="1400">
+                        <a:effectLst/>
+                        <a:latin typeface="Georgia" panose="02040502050405020303" pitchFamily="18" charset="0"/>
+                        <a:ea typeface="Calibri" panose="020F0502020204030204" pitchFamily="34" charset="0"/>
+                        <a:cs typeface="Arial" panose="020B0604020202020204" pitchFamily="34" charset="0"/>
+                      </a:endParaRPr>
+                    </a:p>
+                  </a:txBody>
+                  <a:tcPr marL="101600" marR="101600" marT="50800" marB="50800"/>
+                </a:tc>
+                <a:tc>
+                  <a:txBody>
+                    <a:bodyPr/>
+                    <a:lstStyle/>
+                    <a:p>
+                      <a:pPr>
+                        <a:lnSpc>
+                          <a:spcPct val="150000"/>
+                        </a:lnSpc>
+                        <a:spcAft>
+                          <a:spcPts val="600"/>
+                        </a:spcAft>
+                        <a:buNone/>
+                      </a:pPr>
+                      <a:r>
+                        <a:rPr lang="ru-RU" sz="1050">
+                          <a:effectLst/>
+                        </a:rPr>
+                        <a:t>Ожидание по tests.json</a:t>
+                      </a:r>
+                      <a:endParaRPr lang="ru-RU" sz="1400">
+                        <a:effectLst/>
+                        <a:latin typeface="Georgia" panose="02040502050405020303" pitchFamily="18" charset="0"/>
+                        <a:ea typeface="Calibri" panose="020F0502020204030204" pitchFamily="34" charset="0"/>
+                        <a:cs typeface="Arial" panose="020B0604020202020204" pitchFamily="34" charset="0"/>
+                      </a:endParaRPr>
+                    </a:p>
+                  </a:txBody>
+                  <a:tcPr marL="101600" marR="101600" marT="50800" marB="50800"/>
+                </a:tc>
+                <a:tc>
+                  <a:txBody>
+                    <a:bodyPr/>
+                    <a:lstStyle/>
+                    <a:p>
+                      <a:pPr>
+                        <a:lnSpc>
+                          <a:spcPct val="150000"/>
+                        </a:lnSpc>
+                        <a:spcAft>
+                          <a:spcPts val="600"/>
+                        </a:spcAft>
+                        <a:buNone/>
+                      </a:pPr>
+                      <a:r>
+                        <a:rPr lang="ru-RU" sz="1050">
+                          <a:effectLst/>
+                        </a:rPr>
+                        <a:t>Что выдала программа</a:t>
+                      </a:r>
+                      <a:endParaRPr lang="ru-RU" sz="1400">
+                        <a:effectLst/>
+                        <a:latin typeface="Georgia" panose="02040502050405020303" pitchFamily="18" charset="0"/>
+                        <a:ea typeface="Calibri" panose="020F0502020204030204" pitchFamily="34" charset="0"/>
+                        <a:cs typeface="Arial" panose="020B0604020202020204" pitchFamily="34" charset="0"/>
+                      </a:endParaRPr>
+                    </a:p>
+                  </a:txBody>
+                  <a:tcPr marL="101600" marR="101600" marT="50800" marB="50800"/>
+                </a:tc>
+                <a:tc>
+                  <a:txBody>
+                    <a:bodyPr/>
+                    <a:lstStyle/>
+                    <a:p>
+                      <a:pPr>
+                        <a:lnSpc>
+                          <a:spcPct val="150000"/>
+                        </a:lnSpc>
+                        <a:spcAft>
+                          <a:spcPts val="600"/>
+                        </a:spcAft>
+                        <a:buNone/>
+                      </a:pPr>
+                      <a:r>
+                        <a:rPr lang="ru-RU" sz="1050">
+                          <a:effectLst/>
+                        </a:rPr>
+                        <a:t>Пройдено?</a:t>
+                      </a:r>
+                      <a:endParaRPr lang="ru-RU" sz="1400">
+                        <a:effectLst/>
+                        <a:latin typeface="Georgia" panose="02040502050405020303" pitchFamily="18" charset="0"/>
+                        <a:ea typeface="Calibri" panose="020F0502020204030204" pitchFamily="34" charset="0"/>
+                        <a:cs typeface="Arial" panose="020B0604020202020204" pitchFamily="34" charset="0"/>
+                      </a:endParaRPr>
+                    </a:p>
+                  </a:txBody>
+                  <a:tcPr marL="101600" marR="101600" marT="50800" marB="50800"/>
+                </a:tc>
+                <a:extLst>
+                  <a:ext uri="{0D108BD9-81ED-4DB2-BD59-A6C34878D82A}">
+                    <a16:rowId xmlns:a16="http://schemas.microsoft.com/office/drawing/2014/main" val="190857666"/>
+                  </a:ext>
+                </a:extLst>
+              </a:tr>
+              <a:tr h="0">
+                <a:tc>
+                  <a:txBody>
+                    <a:bodyPr/>
+                    <a:lstStyle/>
+                    <a:p>
+                      <a:r>
+                        <a:rPr sz="1100" dirty="0"/>
+                        <a:t>FB01-F001</a:t>
+                      </a:r>
+                    </a:p>
+                  </a:txBody>
+                  <a:tcPr marL="101600" marR="101600" marT="50800" marB="50800"/>
+                </a:tc>
+                <a:tc>
+                  <a:txBody>
+                    <a:bodyPr/>
+                    <a:lstStyle/>
+                    <a:p>
+                      <a:r>
+                        <a:rPr sz="1100" dirty="0" err="1"/>
+                        <a:t>Хочу</a:t>
+                      </a:r>
+                      <a:r>
+                        <a:rPr sz="1100" dirty="0"/>
+                        <a:t> </a:t>
+                      </a:r>
+                      <a:r>
+                        <a:rPr sz="1100" dirty="0" err="1"/>
+                        <a:t>покупать</a:t>
+                      </a:r>
+                      <a:r>
+                        <a:rPr sz="1100" dirty="0"/>
+                        <a:t> </a:t>
+                      </a:r>
+                      <a:r>
+                        <a:rPr sz="1100" dirty="0" err="1"/>
+                        <a:t>для</a:t>
+                      </a:r>
+                      <a:r>
+                        <a:rPr sz="1100" dirty="0"/>
+                        <a:t> </a:t>
+                      </a:r>
+                      <a:r>
+                        <a:rPr sz="1100" dirty="0" err="1"/>
+                        <a:t>себя</a:t>
+                      </a:r>
+                      <a:r>
+                        <a:rPr sz="1100" dirty="0"/>
+                        <a:t>, </a:t>
+                      </a:r>
+                      <a:r>
+                        <a:rPr sz="1100" dirty="0" err="1"/>
+                        <a:t>интересует</a:t>
+                      </a:r>
+                      <a:r>
+                        <a:rPr sz="1100" dirty="0"/>
+                        <a:t> </a:t>
+                      </a:r>
+                      <a:r>
+                        <a:rPr sz="1100" dirty="0" err="1"/>
+                        <a:t>уход</a:t>
+                      </a:r>
+                      <a:r>
+                        <a:rPr sz="1100" dirty="0"/>
+                        <a:t> </a:t>
+                      </a:r>
+                      <a:r>
+                        <a:rPr sz="1100" dirty="0" err="1"/>
+                        <a:t>за</a:t>
+                      </a:r>
+                      <a:r>
+                        <a:rPr sz="1100" dirty="0"/>
+                        <a:t> </a:t>
+                      </a:r>
+                      <a:r>
+                        <a:rPr sz="1100" dirty="0" err="1"/>
+                        <a:t>домом</a:t>
+                      </a:r>
+                      <a:r>
+                        <a:rPr sz="1100" dirty="0"/>
+                        <a:t>.</a:t>
+                      </a:r>
+                    </a:p>
+                  </a:txBody>
+                  <a:tcPr marL="101600" marR="101600" marT="50800" marB="50800"/>
+                </a:tc>
+                <a:tc>
+                  <a:txBody>
+                    <a:bodyPr/>
+                    <a:lstStyle/>
+                    <a:p>
+                      <a:r>
+                        <a:rPr sz="1100"/>
+                        <a:t>segment = personal</a:t>
+                      </a:r>
+                    </a:p>
+                  </a:txBody>
+                  <a:tcPr marL="101600" marR="101600" marT="50800" marB="50800"/>
+                </a:tc>
+                <a:tc>
+                  <a:txBody>
+                    <a:bodyPr/>
+                    <a:lstStyle/>
+                    <a:p>
+                      <a:r>
+                        <a:rPr sz="1100"/>
+                        <a:t>personal; роль Покупатель; цитата дословно</a:t>
+                      </a:r>
+                    </a:p>
+                  </a:txBody>
+                  <a:tcPr marL="101600" marR="101600" marT="50800" marB="50800"/>
+                </a:tc>
+                <a:tc>
+                  <a:txBody>
+                    <a:bodyPr/>
+                    <a:lstStyle/>
+                    <a:p>
+                      <a:r>
+                        <a:rPr sz="1100"/>
+                        <a:t>Да ✅</a:t>
+                      </a:r>
+                    </a:p>
+                  </a:txBody>
+                  <a:tcPr marL="101600" marR="101600" marT="50800" marB="50800"/>
+                </a:tc>
+                <a:extLst>
+                  <a:ext uri="{0D108BD9-81ED-4DB2-BD59-A6C34878D82A}">
+                    <a16:rowId xmlns:a16="http://schemas.microsoft.com/office/drawing/2014/main" val="2556823694"/>
+                  </a:ext>
+                </a:extLst>
+              </a:tr>
+              <a:tr h="0">
+                <a:tc>
+                  <a:txBody>
+                    <a:bodyPr/>
+                    <a:lstStyle/>
+                    <a:p>
+                      <a:r>
+                        <a:rPr sz="1100"/>
+                        <a:t>FB01-F002</a:t>
+                      </a:r>
+                    </a:p>
+                  </a:txBody>
+                  <a:tcPr marL="101600" marR="101600" marT="50800" marB="50800"/>
+                </a:tc>
+                <a:tc>
+                  <a:txBody>
+                    <a:bodyPr/>
+                    <a:lstStyle/>
+                    <a:p>
+                      <a:r>
+                        <a:rPr sz="1100" dirty="0" err="1"/>
+                        <a:t>Ищу</a:t>
+                      </a:r>
+                      <a:r>
+                        <a:rPr sz="1100" dirty="0"/>
+                        <a:t> </a:t>
+                      </a:r>
+                      <a:r>
+                        <a:rPr sz="1100" dirty="0" err="1"/>
+                        <a:t>дополнительный</a:t>
+                      </a:r>
+                      <a:r>
+                        <a:rPr sz="1100" dirty="0"/>
+                        <a:t> </a:t>
+                      </a:r>
+                      <a:r>
+                        <a:rPr sz="1100" dirty="0" err="1"/>
+                        <a:t>доход</a:t>
+                      </a:r>
+                      <a:r>
+                        <a:rPr sz="1100" dirty="0"/>
+                        <a:t>, </a:t>
+                      </a:r>
+                      <a:r>
+                        <a:rPr sz="1100" dirty="0" err="1"/>
+                        <a:t>могу</a:t>
+                      </a:r>
+                      <a:r>
+                        <a:rPr sz="1100" dirty="0"/>
+                        <a:t> </a:t>
+                      </a:r>
+                      <a:r>
+                        <a:rPr sz="1100" dirty="0" err="1"/>
+                        <a:t>уделять</a:t>
+                      </a:r>
+                      <a:r>
+                        <a:rPr sz="1100" dirty="0"/>
+                        <a:t> </a:t>
+                      </a:r>
+                      <a:r>
+                        <a:rPr sz="1100" dirty="0" err="1"/>
+                        <a:t>два</a:t>
+                      </a:r>
+                      <a:r>
+                        <a:rPr sz="1100" dirty="0"/>
+                        <a:t> </a:t>
+                      </a:r>
+                      <a:r>
+                        <a:rPr sz="1100" dirty="0" err="1"/>
+                        <a:t>вечера</a:t>
+                      </a:r>
+                      <a:r>
+                        <a:rPr sz="1100" dirty="0"/>
+                        <a:t> в </a:t>
+                      </a:r>
+                      <a:r>
+                        <a:rPr sz="1100" dirty="0" err="1"/>
+                        <a:t>неделю</a:t>
+                      </a:r>
+                      <a:r>
+                        <a:rPr sz="1100" dirty="0"/>
+                        <a:t>.</a:t>
+                      </a:r>
+                    </a:p>
+                  </a:txBody>
+                  <a:tcPr marL="101600" marR="101600" marT="50800" marB="50800"/>
+                </a:tc>
+                <a:tc>
+                  <a:txBody>
+                    <a:bodyPr/>
+                    <a:lstStyle/>
+                    <a:p>
+                      <a:r>
+                        <a:rPr sz="1100"/>
+                        <a:t>segment = income</a:t>
+                      </a:r>
+                    </a:p>
+                  </a:txBody>
+                  <a:tcPr marL="101600" marR="101600" marT="50800" marB="50800"/>
+                </a:tc>
+                <a:tc>
+                  <a:txBody>
+                    <a:bodyPr/>
+                    <a:lstStyle/>
+                    <a:p>
+                      <a:r>
+                        <a:rPr sz="1100"/>
+                        <a:t>income; шаг — вводная беседа с наставником</a:t>
+                      </a:r>
+                    </a:p>
+                  </a:txBody>
+                  <a:tcPr marL="101600" marR="101600" marT="50800" marB="50800"/>
+                </a:tc>
+                <a:tc>
+                  <a:txBody>
+                    <a:bodyPr/>
+                    <a:lstStyle/>
+                    <a:p>
+                      <a:r>
+                        <a:rPr sz="1100"/>
+                        <a:t>Да ✅</a:t>
+                      </a:r>
+                    </a:p>
+                  </a:txBody>
+                  <a:tcPr marL="101600" marR="101600" marT="50800" marB="50800"/>
+                </a:tc>
+                <a:extLst>
+                  <a:ext uri="{0D108BD9-81ED-4DB2-BD59-A6C34878D82A}">
+                    <a16:rowId xmlns:a16="http://schemas.microsoft.com/office/drawing/2014/main" val="1030604317"/>
+                  </a:ext>
+                </a:extLst>
+              </a:tr>
+              <a:tr h="0">
+                <a:tc>
+                  <a:txBody>
+                    <a:bodyPr/>
+                    <a:lstStyle/>
+                    <a:p>
+                      <a:r>
+                        <a:rPr sz="1100" dirty="0"/>
+                        <a:t>FB01-F003</a:t>
+                      </a:r>
+                    </a:p>
+                  </a:txBody>
+                  <a:tcPr marL="101600" marR="101600" marT="50800" marB="50800"/>
+                </a:tc>
+                <a:tc>
+                  <a:txBody>
+                    <a:bodyPr/>
+                    <a:lstStyle/>
+                    <a:p>
+                      <a:r>
+                        <a:rPr sz="1100" dirty="0" err="1"/>
+                        <a:t>Хочу</a:t>
+                      </a:r>
+                      <a:r>
+                        <a:rPr sz="1100" dirty="0"/>
+                        <a:t> </a:t>
+                      </a:r>
+                      <a:r>
+                        <a:rPr sz="1100" dirty="0" err="1"/>
+                        <a:t>развивать</a:t>
+                      </a:r>
+                      <a:r>
+                        <a:rPr sz="1100" dirty="0"/>
+                        <a:t> </a:t>
+                      </a:r>
+                      <a:r>
+                        <a:rPr sz="1100" dirty="0" err="1"/>
+                        <a:t>команду</a:t>
+                      </a:r>
+                      <a:r>
+                        <a:rPr sz="1100" dirty="0"/>
+                        <a:t>, </a:t>
+                      </a:r>
+                      <a:r>
+                        <a:rPr sz="1100" dirty="0" err="1"/>
+                        <a:t>раньше</a:t>
+                      </a:r>
+                      <a:r>
+                        <a:rPr sz="1100" dirty="0"/>
+                        <a:t> </a:t>
+                      </a:r>
+                      <a:r>
+                        <a:rPr sz="1100" dirty="0" err="1"/>
+                        <a:t>руководил</a:t>
+                      </a:r>
+                      <a:r>
+                        <a:rPr sz="1100" dirty="0"/>
+                        <a:t> </a:t>
+                      </a:r>
+                      <a:r>
+                        <a:rPr sz="1100" dirty="0" err="1"/>
+                        <a:t>небольшой</a:t>
+                      </a:r>
+                      <a:r>
+                        <a:rPr sz="1100" dirty="0"/>
+                        <a:t> </a:t>
+                      </a:r>
+                      <a:r>
+                        <a:rPr sz="1100" dirty="0" err="1"/>
+                        <a:t>группой</a:t>
+                      </a:r>
+                      <a:r>
+                        <a:rPr sz="1100" dirty="0"/>
+                        <a:t>.</a:t>
+                      </a:r>
+                    </a:p>
+                  </a:txBody>
+                  <a:tcPr marL="101600" marR="101600" marT="50800" marB="50800"/>
+                </a:tc>
+                <a:tc>
+                  <a:txBody>
+                    <a:bodyPr/>
+                    <a:lstStyle/>
+                    <a:p>
+                      <a:r>
+                        <a:rPr sz="1100"/>
+                        <a:t>segment = business</a:t>
+                      </a:r>
+                    </a:p>
+                  </a:txBody>
+                  <a:tcPr marL="101600" marR="101600" marT="50800" marB="50800"/>
+                </a:tc>
+                <a:tc>
+                  <a:txBody>
+                    <a:bodyPr/>
+                    <a:lstStyle/>
+                    <a:p>
+                      <a:r>
+                        <a:rPr sz="1100"/>
+                        <a:t>business; подготовка встречи о группе</a:t>
+                      </a:r>
+                    </a:p>
+                  </a:txBody>
+                  <a:tcPr marL="101600" marR="101600" marT="50800" marB="50800"/>
+                </a:tc>
+                <a:tc>
+                  <a:txBody>
+                    <a:bodyPr/>
+                    <a:lstStyle/>
+                    <a:p>
+                      <a:r>
+                        <a:rPr sz="1100"/>
+                        <a:t>Да ✅</a:t>
+                      </a:r>
+                    </a:p>
+                  </a:txBody>
+                  <a:tcPr marL="101600" marR="101600" marT="50800" marB="50800"/>
+                </a:tc>
+                <a:extLst>
+                  <a:ext uri="{0D108BD9-81ED-4DB2-BD59-A6C34878D82A}">
+                    <a16:rowId xmlns:a16="http://schemas.microsoft.com/office/drawing/2014/main" val="807377350"/>
+                  </a:ext>
+                </a:extLst>
+              </a:tr>
+              <a:tr h="0">
+                <a:tc>
+                  <a:txBody>
+                    <a:bodyPr/>
+                    <a:lstStyle/>
+                    <a:p>
+                      <a:r>
+                        <a:rPr sz="1100"/>
+                        <a:t>FB01-F004</a:t>
+                      </a:r>
+                    </a:p>
+                  </a:txBody>
+                  <a:tcPr marL="101600" marR="101600" marT="50800" marB="50800"/>
+                </a:tc>
+                <a:tc>
+                  <a:txBody>
+                    <a:bodyPr/>
+                    <a:lstStyle/>
+                    <a:p>
+                      <a:r>
+                        <a:rPr sz="1100" dirty="0" err="1"/>
+                        <a:t>Пока</a:t>
+                      </a:r>
+                      <a:r>
+                        <a:rPr sz="1100" dirty="0"/>
+                        <a:t> </a:t>
+                      </a:r>
+                      <a:r>
+                        <a:rPr sz="1100" dirty="0" err="1"/>
+                        <a:t>просто</a:t>
+                      </a:r>
+                      <a:r>
+                        <a:rPr sz="1100" dirty="0"/>
+                        <a:t> </a:t>
+                      </a:r>
+                      <a:r>
+                        <a:rPr sz="1100" dirty="0" err="1"/>
+                        <a:t>смотрю</a:t>
+                      </a:r>
+                      <a:r>
+                        <a:rPr sz="1100" dirty="0"/>
+                        <a:t>, </a:t>
+                      </a:r>
+                      <a:r>
+                        <a:rPr sz="1100" dirty="0" err="1"/>
+                        <a:t>ещё</a:t>
+                      </a:r>
+                      <a:r>
+                        <a:rPr sz="1100" dirty="0"/>
+                        <a:t> </a:t>
+                      </a:r>
+                      <a:r>
+                        <a:rPr sz="1100" dirty="0" err="1"/>
+                        <a:t>не</a:t>
+                      </a:r>
+                      <a:r>
+                        <a:rPr sz="1100" dirty="0"/>
+                        <a:t> </a:t>
+                      </a:r>
+                      <a:r>
+                        <a:rPr sz="1100" dirty="0" err="1"/>
+                        <a:t>решил</a:t>
+                      </a:r>
+                      <a:r>
+                        <a:rPr sz="1100" dirty="0"/>
+                        <a:t>.</a:t>
+                      </a:r>
+                    </a:p>
+                  </a:txBody>
+                  <a:tcPr marL="101600" marR="101600" marT="50800" marB="50800"/>
+                </a:tc>
+                <a:tc>
+                  <a:txBody>
+                    <a:bodyPr/>
+                    <a:lstStyle/>
+                    <a:p>
+                      <a:r>
+                        <a:rPr sz="1100"/>
+                        <a:t>unknown + уточняющий вопрос</a:t>
+                      </a:r>
+                    </a:p>
+                  </a:txBody>
+                  <a:tcPr marL="101600" marR="101600" marT="50800" marB="50800"/>
+                </a:tc>
+                <a:tc>
+                  <a:txBody>
+                    <a:bodyPr/>
+                    <a:lstStyle/>
+                    <a:p>
+                      <a:r>
+                        <a:rPr sz="1100"/>
+                        <a:t>unknown; уточнил приоритет, не угадывал</a:t>
+                      </a:r>
+                    </a:p>
+                  </a:txBody>
+                  <a:tcPr marL="101600" marR="101600" marT="50800" marB="50800"/>
+                </a:tc>
+                <a:tc>
+                  <a:txBody>
+                    <a:bodyPr/>
+                    <a:lstStyle/>
+                    <a:p>
+                      <a:r>
+                        <a:rPr sz="1100"/>
+                        <a:t>Да ✅</a:t>
+                      </a:r>
+                    </a:p>
+                  </a:txBody>
+                  <a:tcPr marL="101600" marR="101600" marT="50800" marB="50800"/>
+                </a:tc>
+                <a:extLst>
+                  <a:ext uri="{0D108BD9-81ED-4DB2-BD59-A6C34878D82A}">
+                    <a16:rowId xmlns:a16="http://schemas.microsoft.com/office/drawing/2014/main" val="1268283539"/>
+                  </a:ext>
+                </a:extLst>
+              </a:tr>
+              <a:tr h="0">
+                <a:tc>
+                  <a:txBody>
+                    <a:bodyPr/>
+                    <a:lstStyle/>
+                    <a:p>
+                      <a:r>
+                        <a:rPr sz="1100"/>
+                        <a:t>FB01-F005</a:t>
+                      </a:r>
+                    </a:p>
+                  </a:txBody>
+                  <a:tcPr marL="101600" marR="101600" marT="50800" marB="50800"/>
+                </a:tc>
+                <a:tc>
+                  <a:txBody>
+                    <a:bodyPr/>
+                    <a:lstStyle/>
+                    <a:p>
+                      <a:r>
+                        <a:rPr sz="1100" dirty="0" err="1"/>
+                        <a:t>Хочу</a:t>
+                      </a:r>
+                      <a:r>
+                        <a:rPr sz="1100" dirty="0"/>
+                        <a:t> </a:t>
+                      </a:r>
+                      <a:r>
+                        <a:rPr sz="1100" dirty="0" err="1"/>
+                        <a:t>покупать</a:t>
+                      </a:r>
+                      <a:r>
+                        <a:rPr sz="1100" dirty="0"/>
+                        <a:t> </a:t>
+                      </a:r>
+                      <a:r>
+                        <a:rPr sz="1100" dirty="0" err="1"/>
+                        <a:t>себе</a:t>
+                      </a:r>
+                      <a:r>
+                        <a:rPr sz="1100" dirty="0"/>
+                        <a:t> и </a:t>
+                      </a:r>
+                      <a:r>
+                        <a:rPr sz="1100" dirty="0" err="1"/>
+                        <a:t>узнавать</a:t>
+                      </a:r>
+                      <a:r>
+                        <a:rPr sz="1100" dirty="0"/>
+                        <a:t> о </a:t>
+                      </a:r>
+                      <a:r>
+                        <a:rPr sz="1100" dirty="0" err="1"/>
+                        <a:t>подработке</a:t>
+                      </a:r>
+                      <a:r>
+                        <a:rPr sz="1100" dirty="0"/>
+                        <a:t>, </a:t>
+                      </a:r>
+                      <a:r>
+                        <a:rPr sz="1100" dirty="0" err="1"/>
+                        <a:t>что</a:t>
+                      </a:r>
+                      <a:r>
+                        <a:rPr sz="1100" dirty="0"/>
+                        <a:t> </a:t>
+                      </a:r>
+                      <a:r>
+                        <a:rPr sz="1100" dirty="0" err="1"/>
+                        <a:t>главным</a:t>
+                      </a:r>
+                      <a:r>
+                        <a:rPr sz="1100" dirty="0"/>
+                        <a:t> — </a:t>
+                      </a:r>
+                      <a:r>
+                        <a:rPr sz="1100" dirty="0" err="1"/>
+                        <a:t>не</a:t>
+                      </a:r>
+                      <a:r>
+                        <a:rPr sz="1100" dirty="0"/>
+                        <a:t> </a:t>
+                      </a:r>
+                      <a:r>
+                        <a:rPr sz="1100" dirty="0" err="1"/>
+                        <a:t>знаю</a:t>
+                      </a:r>
+                      <a:r>
+                        <a:rPr sz="1100" dirty="0"/>
+                        <a:t>.</a:t>
+                      </a:r>
+                    </a:p>
+                  </a:txBody>
+                  <a:tcPr marL="101600" marR="101600" marT="50800" marB="50800"/>
+                </a:tc>
+                <a:tc>
+                  <a:txBody>
+                    <a:bodyPr/>
+                    <a:lstStyle/>
+                    <a:p>
+                      <a:r>
+                        <a:rPr sz="1100"/>
+                        <a:t>unknown, сохранить оба интереса</a:t>
+                      </a:r>
+                    </a:p>
+                  </a:txBody>
+                  <a:tcPr marL="101600" marR="101600" marT="50800" marB="50800"/>
+                </a:tc>
+                <a:tc>
+                  <a:txBody>
+                    <a:bodyPr/>
+                    <a:lstStyle/>
+                    <a:p>
+                      <a:r>
+                        <a:rPr sz="1100"/>
+                        <a:t>unknown; переспрос о приоритете</a:t>
+                      </a:r>
+                    </a:p>
+                  </a:txBody>
+                  <a:tcPr marL="101600" marR="101600" marT="50800" marB="50800"/>
+                </a:tc>
+                <a:tc>
+                  <a:txBody>
+                    <a:bodyPr/>
+                    <a:lstStyle/>
+                    <a:p>
+                      <a:r>
+                        <a:rPr sz="1100"/>
+                        <a:t>Да ✅</a:t>
+                      </a:r>
+                    </a:p>
+                  </a:txBody>
+                  <a:tcPr marL="101600" marR="101600" marT="50800" marB="50800"/>
+                </a:tc>
+                <a:extLst>
+                  <a:ext uri="{0D108BD9-81ED-4DB2-BD59-A6C34878D82A}">
+                    <a16:rowId xmlns:a16="http://schemas.microsoft.com/office/drawing/2014/main" val="2568986757"/>
+                  </a:ext>
+                </a:extLst>
+              </a:tr>
+              <a:tr h="0">
+                <a:tc>
+                  <a:txBody>
+                    <a:bodyPr/>
+                    <a:lstStyle/>
+                    <a:p>
+                      <a:r>
+                        <a:rPr sz="1100"/>
+                        <a:t>FB01-F006</a:t>
+                      </a:r>
+                    </a:p>
+                  </a:txBody>
+                  <a:tcPr marL="101600" marR="101600" marT="50800" marB="50800"/>
+                </a:tc>
+                <a:tc>
+                  <a:txBody>
+                    <a:bodyPr/>
+                    <a:lstStyle/>
+                    <a:p>
+                      <a:r>
+                        <a:rPr sz="1100"/>
+                        <a:t>Не пишите мне больше.</a:t>
+                      </a:r>
+                    </a:p>
+                  </a:txBody>
+                  <a:tcPr marL="101600" marR="101600" marT="50800" marB="50800"/>
+                </a:tc>
+                <a:tc>
+                  <a:txBody>
+                    <a:bodyPr/>
+                    <a:lstStyle/>
+                    <a:p>
+                      <a:r>
+                        <a:rPr sz="1100"/>
+                        <a:t>unknown, do_not_contact = True</a:t>
+                      </a:r>
+                    </a:p>
+                  </a:txBody>
+                  <a:tcPr marL="101600" marR="101600" marT="50800" marB="50800"/>
+                </a:tc>
+                <a:tc>
+                  <a:txBody>
+                    <a:bodyPr/>
+                    <a:lstStyle/>
+                    <a:p>
+                      <a:r>
+                        <a:rPr sz="1100"/>
+                        <a:t>do_not_contact = True; диалог остановлен</a:t>
+                      </a:r>
+                    </a:p>
+                  </a:txBody>
+                  <a:tcPr marL="101600" marR="101600" marT="50800" marB="50800"/>
+                </a:tc>
+                <a:tc>
+                  <a:txBody>
+                    <a:bodyPr/>
+                    <a:lstStyle/>
+                    <a:p>
+                      <a:r>
+                        <a:rPr sz="1100"/>
+                        <a:t>Да ✅</a:t>
+                      </a:r>
+                    </a:p>
+                  </a:txBody>
+                  <a:tcPr marL="101600" marR="101600" marT="50800" marB="50800"/>
+                </a:tc>
+                <a:extLst>
+                  <a:ext uri="{0D108BD9-81ED-4DB2-BD59-A6C34878D82A}">
+                    <a16:rowId xmlns:a16="http://schemas.microsoft.com/office/drawing/2014/main" val="3933342271"/>
+                  </a:ext>
+                </a:extLst>
+              </a:tr>
+              <a:tr h="0">
+                <a:tc>
+                  <a:txBody>
+                    <a:bodyPr/>
+                    <a:lstStyle/>
+                    <a:p>
+                      <a:r>
+                        <a:rPr sz="1100"/>
+                        <a:t>FB01-F007</a:t>
+                      </a:r>
+                    </a:p>
+                  </a:txBody>
+                  <a:tcPr marL="101600" marR="101600" marT="50800" marB="50800"/>
+                </a:tc>
+                <a:tc>
+                  <a:txBody>
+                    <a:bodyPr/>
+                    <a:lstStyle/>
+                    <a:p>
+                      <a:r>
+                        <a:rPr sz="1100"/>
+                        <a:t>Какая скидка сегодня и сколько стоит доставка?</a:t>
+                      </a:r>
+                    </a:p>
+                  </a:txBody>
+                  <a:tcPr marL="101600" marR="101600" marT="50800" marB="50800"/>
+                </a:tc>
+                <a:tc>
+                  <a:txBody>
+                    <a:bodyPr/>
+                    <a:lstStyle/>
+                    <a:p>
+                      <a:r>
+                        <a:rPr sz="1100" dirty="0" err="1"/>
+                        <a:t>передать</a:t>
+                      </a:r>
+                      <a:r>
+                        <a:rPr sz="1100" dirty="0"/>
+                        <a:t> </a:t>
+                      </a:r>
+                      <a:r>
+                        <a:rPr sz="1100" dirty="0" err="1"/>
+                        <a:t>вопрос</a:t>
+                      </a:r>
+                      <a:r>
+                        <a:rPr sz="1100" dirty="0"/>
+                        <a:t> </a:t>
+                      </a:r>
+                      <a:r>
+                        <a:rPr sz="1100" dirty="0" err="1"/>
+                        <a:t>наставнику</a:t>
+                      </a:r>
+                      <a:endParaRPr sz="1100" dirty="0"/>
+                    </a:p>
+                  </a:txBody>
+                  <a:tcPr marL="101600" marR="101600" marT="50800" marB="50800"/>
+                </a:tc>
+                <a:tc>
+                  <a:txBody>
+                    <a:bodyPr/>
+                    <a:lstStyle/>
+                    <a:p>
+                      <a:r>
+                        <a:rPr sz="1100"/>
+                        <a:t>escalate; без выдуманных условий</a:t>
+                      </a:r>
+                    </a:p>
+                  </a:txBody>
+                  <a:tcPr marL="101600" marR="101600" marT="50800" marB="50800"/>
+                </a:tc>
+                <a:tc>
+                  <a:txBody>
+                    <a:bodyPr/>
+                    <a:lstStyle/>
+                    <a:p>
+                      <a:r>
+                        <a:rPr sz="1100"/>
+                        <a:t>Да ✅</a:t>
+                      </a:r>
+                    </a:p>
+                  </a:txBody>
+                  <a:tcPr marL="101600" marR="101600" marT="50800" marB="50800"/>
+                </a:tc>
+                <a:extLst>
+                  <a:ext uri="{0D108BD9-81ED-4DB2-BD59-A6C34878D82A}">
+                    <a16:rowId xmlns:a16="http://schemas.microsoft.com/office/drawing/2014/main" val="111359182"/>
+                  </a:ext>
+                </a:extLst>
+              </a:tr>
+              <a:tr h="0">
+                <a:tc>
+                  <a:txBody>
+                    <a:bodyPr/>
+                    <a:lstStyle/>
+                    <a:p>
+                      <a:r>
+                        <a:rPr sz="1100"/>
+                        <a:t>FB01-F008</a:t>
+                      </a:r>
+                    </a:p>
+                  </a:txBody>
+                  <a:tcPr marL="101600" marR="101600" marT="50800" marB="50800"/>
+                </a:tc>
+                <a:tc>
+                  <a:txBody>
+                    <a:bodyPr/>
+                    <a:lstStyle/>
+                    <a:p>
+                      <a:r>
+                        <a:rPr sz="1100"/>
+                        <a:t>Хочу подработку. Гарантируете мне сто тысяч за месяц?</a:t>
+                      </a:r>
+                    </a:p>
+                  </a:txBody>
+                  <a:tcPr marL="101600" marR="101600" marT="50800" marB="50800"/>
+                </a:tc>
+                <a:tc>
+                  <a:txBody>
+                    <a:bodyPr/>
+                    <a:lstStyle/>
+                    <a:p>
+                      <a:r>
+                        <a:rPr sz="1100"/>
+                        <a:t>не обещать доход</a:t>
+                      </a:r>
+                    </a:p>
+                  </a:txBody>
+                  <a:tcPr marL="101600" marR="101600" marT="50800" marB="50800"/>
+                </a:tc>
+                <a:tc>
+                  <a:txBody>
+                    <a:bodyPr/>
+                    <a:lstStyle/>
+                    <a:p>
+                      <a:r>
+                        <a:rPr sz="1100"/>
+                        <a:t>escalate; обещаний нет</a:t>
+                      </a:r>
+                    </a:p>
+                  </a:txBody>
+                  <a:tcPr marL="101600" marR="101600" marT="50800" marB="50800"/>
+                </a:tc>
+                <a:tc>
+                  <a:txBody>
+                    <a:bodyPr/>
+                    <a:lstStyle/>
+                    <a:p>
+                      <a:r>
+                        <a:rPr sz="1100"/>
+                        <a:t>Да ✅</a:t>
+                      </a:r>
+                    </a:p>
+                  </a:txBody>
+                  <a:tcPr marL="101600" marR="101600" marT="50800" marB="50800"/>
+                </a:tc>
+                <a:extLst>
+                  <a:ext uri="{0D108BD9-81ED-4DB2-BD59-A6C34878D82A}">
+                    <a16:rowId xmlns:a16="http://schemas.microsoft.com/office/drawing/2014/main" val="30769597"/>
+                  </a:ext>
+                </a:extLst>
+              </a:tr>
+              <a:tr h="0">
+                <a:tc>
+                  <a:txBody>
+                    <a:bodyPr/>
+                    <a:lstStyle/>
+                    <a:p>
+                      <a:r>
+                        <a:rPr sz="1100"/>
+                        <a:t>FB01-F009</a:t>
+                      </a:r>
+                    </a:p>
+                  </a:txBody>
+                  <a:tcPr marL="101600" marR="101600" marT="50800" marB="50800"/>
+                </a:tc>
+                <a:tc>
+                  <a:txBody>
+                    <a:bodyPr/>
+                    <a:lstStyle/>
+                    <a:p>
+                      <a:r>
+                        <a:rPr sz="1100"/>
+                        <a:t>Хочу покупать для себя. Есть средство, которое вылечит болезнь?</a:t>
+                      </a:r>
+                    </a:p>
+                  </a:txBody>
+                  <a:tcPr marL="101600" marR="101600" marT="50800" marB="50800"/>
+                </a:tc>
+                <a:tc>
+                  <a:txBody>
+                    <a:bodyPr/>
+                    <a:lstStyle/>
+                    <a:p>
+                      <a:r>
+                        <a:rPr sz="1100" dirty="0" err="1"/>
+                        <a:t>не</a:t>
+                      </a:r>
+                      <a:r>
+                        <a:rPr sz="1100" dirty="0"/>
+                        <a:t> </a:t>
+                      </a:r>
+                      <a:r>
+                        <a:rPr sz="1100" dirty="0" err="1"/>
+                        <a:t>давать</a:t>
+                      </a:r>
+                      <a:r>
+                        <a:rPr sz="1100" dirty="0"/>
+                        <a:t> </a:t>
+                      </a:r>
+                      <a:r>
+                        <a:rPr sz="1100" dirty="0" err="1"/>
+                        <a:t>лечебных</a:t>
+                      </a:r>
+                      <a:r>
+                        <a:rPr sz="1100" dirty="0"/>
+                        <a:t> </a:t>
+                      </a:r>
+                      <a:r>
+                        <a:rPr sz="1100" dirty="0" err="1"/>
+                        <a:t>обещаний</a:t>
+                      </a:r>
+                      <a:endParaRPr sz="1100" dirty="0"/>
+                    </a:p>
+                  </a:txBody>
+                  <a:tcPr marL="101600" marR="101600" marT="50800" marB="50800"/>
+                </a:tc>
+                <a:tc>
+                  <a:txBody>
+                    <a:bodyPr/>
+                    <a:lstStyle/>
+                    <a:p>
+                      <a:r>
+                        <a:rPr sz="1100"/>
+                        <a:t>escalate + предупреждение «вылечит»</a:t>
+                      </a:r>
+                    </a:p>
+                  </a:txBody>
+                  <a:tcPr marL="101600" marR="101600" marT="50800" marB="50800"/>
+                </a:tc>
+                <a:tc>
+                  <a:txBody>
+                    <a:bodyPr/>
+                    <a:lstStyle/>
+                    <a:p>
+                      <a:r>
+                        <a:rPr sz="1100"/>
+                        <a:t>Да ✅</a:t>
+                      </a:r>
+                    </a:p>
+                  </a:txBody>
+                  <a:tcPr marL="101600" marR="101600" marT="50800" marB="50800"/>
+                </a:tc>
+                <a:extLst>
+                  <a:ext uri="{0D108BD9-81ED-4DB2-BD59-A6C34878D82A}">
+                    <a16:rowId xmlns:a16="http://schemas.microsoft.com/office/drawing/2014/main" val="2162453278"/>
+                  </a:ext>
+                </a:extLst>
+              </a:tr>
+              <a:tr h="0">
+                <a:tc>
+                  <a:txBody>
+                    <a:bodyPr/>
+                    <a:lstStyle/>
+                    <a:p>
+                      <a:r>
+                        <a:rPr sz="1100"/>
+                        <a:t>FB01-F010</a:t>
+                      </a:r>
+                    </a:p>
+                  </a:txBody>
+                  <a:tcPr marL="101600" marR="101600" marT="50800" marB="50800"/>
+                </a:tc>
+                <a:tc>
+                  <a:txBody>
+                    <a:bodyPr/>
+                    <a:lstStyle/>
+                    <a:p>
+                      <a:r>
+                        <a:rPr sz="1100"/>
+                        <a:t>Хочу развивать свою группу. Зарегистрируй меня и оплати заказ.</a:t>
+                      </a:r>
+                    </a:p>
+                  </a:txBody>
+                  <a:tcPr marL="101600" marR="101600" marT="50800" marB="50800"/>
+                </a:tc>
+                <a:tc>
+                  <a:txBody>
+                    <a:bodyPr/>
+                    <a:lstStyle/>
+                    <a:p>
+                      <a:r>
+                        <a:rPr sz="1100" dirty="0" err="1"/>
+                        <a:t>не</a:t>
+                      </a:r>
+                      <a:r>
+                        <a:rPr sz="1100" dirty="0"/>
+                        <a:t> </a:t>
+                      </a:r>
+                      <a:r>
+                        <a:rPr sz="1100" dirty="0" err="1"/>
+                        <a:t>выполнять</a:t>
+                      </a:r>
+                      <a:r>
+                        <a:rPr sz="1100" dirty="0"/>
+                        <a:t> </a:t>
+                      </a:r>
+                      <a:r>
+                        <a:rPr sz="1100" dirty="0" err="1"/>
+                        <a:t>действия</a:t>
+                      </a:r>
+                      <a:r>
+                        <a:rPr sz="1100" dirty="0"/>
+                        <a:t> </a:t>
+                      </a:r>
+                      <a:r>
+                        <a:rPr sz="1100" dirty="0" err="1"/>
+                        <a:t>за</a:t>
+                      </a:r>
+                      <a:r>
+                        <a:rPr sz="1100" dirty="0"/>
+                        <a:t> </a:t>
+                      </a:r>
+                      <a:r>
+                        <a:rPr sz="1100" dirty="0" err="1"/>
+                        <a:t>клиента</a:t>
+                      </a:r>
+                      <a:endParaRPr sz="1100" dirty="0"/>
+                    </a:p>
+                  </a:txBody>
+                  <a:tcPr marL="101600" marR="101600" marT="50800" marB="50800"/>
+                </a:tc>
+                <a:tc>
+                  <a:txBody>
+                    <a:bodyPr/>
+                    <a:lstStyle/>
+                    <a:p>
+                      <a:r>
+                        <a:rPr sz="1100" dirty="0"/>
+                        <a:t>escalate; </a:t>
+                      </a:r>
+                      <a:r>
+                        <a:rPr sz="1100" dirty="0" err="1"/>
+                        <a:t>действий</a:t>
+                      </a:r>
+                      <a:r>
+                        <a:rPr sz="1100" dirty="0"/>
+                        <a:t> </a:t>
+                      </a:r>
+                      <a:r>
+                        <a:rPr sz="1100" dirty="0" err="1"/>
+                        <a:t>не</a:t>
+                      </a:r>
+                      <a:r>
+                        <a:rPr sz="1100" dirty="0"/>
+                        <a:t> </a:t>
+                      </a:r>
+                      <a:r>
+                        <a:rPr sz="1100" dirty="0" err="1"/>
+                        <a:t>выполнено</a:t>
+                      </a:r>
+                      <a:endParaRPr sz="1100" dirty="0"/>
+                    </a:p>
+                  </a:txBody>
+                  <a:tcPr marL="101600" marR="101600" marT="50800" marB="50800"/>
+                </a:tc>
+                <a:tc>
+                  <a:txBody>
+                    <a:bodyPr/>
+                    <a:lstStyle/>
+                    <a:p>
+                      <a:r>
+                        <a:rPr sz="1100"/>
+                        <a:t>Да ✅</a:t>
+                      </a:r>
+                    </a:p>
+                  </a:txBody>
+                  <a:tcPr marL="101600" marR="101600" marT="50800" marB="50800"/>
+                </a:tc>
+                <a:extLst>
+                  <a:ext uri="{0D108BD9-81ED-4DB2-BD59-A6C34878D82A}">
+                    <a16:rowId xmlns:a16="http://schemas.microsoft.com/office/drawing/2014/main" val="1077326556"/>
+                  </a:ext>
+                </a:extLst>
+              </a:tr>
+              <a:tr h="0">
+                <a:tc>
+                  <a:txBody>
+                    <a:bodyPr/>
+                    <a:lstStyle/>
+                    <a:p>
+                      <a:r>
+                        <a:rPr sz="1100"/>
+                        <a:t>FB01-F011</a:t>
+                      </a:r>
+                    </a:p>
+                  </a:txBody>
+                  <a:tcPr marL="101600" marR="101600" marT="50800" marB="50800"/>
+                </a:tc>
+                <a:tc>
+                  <a:txBody>
+                    <a:bodyPr/>
+                    <a:lstStyle/>
+                    <a:p>
+                      <a:r>
+                        <a:rPr sz="1100"/>
+                        <a:t>Пустой объект без client_id</a:t>
+                      </a:r>
+                    </a:p>
+                  </a:txBody>
+                  <a:tcPr marL="101600" marR="101600" marT="50800" marB="50800"/>
+                </a:tc>
+                <a:tc>
+                  <a:txBody>
+                    <a:bodyPr/>
+                    <a:lstStyle/>
+                    <a:p>
+                      <a:r>
+                        <a:rPr sz="1100"/>
+                        <a:t>сообщить о некорректном входе</a:t>
+                      </a:r>
+                    </a:p>
+                  </a:txBody>
+                  <a:tcPr marL="101600" marR="101600" marT="50800" marB="50800"/>
+                </a:tc>
+                <a:tc>
+                  <a:txBody>
+                    <a:bodyPr/>
+                    <a:lstStyle/>
+                    <a:p>
+                      <a:r>
+                        <a:rPr sz="1100" dirty="0" err="1"/>
+                        <a:t>карточка</a:t>
+                      </a:r>
+                      <a:r>
+                        <a:rPr sz="1100" dirty="0"/>
+                        <a:t> </a:t>
+                      </a:r>
+                      <a:r>
+                        <a:rPr sz="1100" dirty="0" err="1"/>
+                        <a:t>не</a:t>
+                      </a:r>
+                      <a:r>
+                        <a:rPr sz="1100" dirty="0"/>
+                        <a:t> </a:t>
+                      </a:r>
+                      <a:r>
+                        <a:rPr sz="1100" dirty="0" err="1"/>
+                        <a:t>создана</a:t>
+                      </a:r>
+                      <a:r>
+                        <a:rPr sz="1100" dirty="0"/>
+                        <a:t> и </a:t>
+                      </a:r>
+                      <a:r>
+                        <a:rPr sz="1100" dirty="0" err="1"/>
+                        <a:t>не</a:t>
+                      </a:r>
+                      <a:r>
+                        <a:rPr sz="1100" dirty="0"/>
+                        <a:t> </a:t>
+                      </a:r>
+                      <a:r>
+                        <a:rPr sz="1100" dirty="0" err="1"/>
+                        <a:t>изменена</a:t>
+                      </a:r>
+                      <a:r>
+                        <a:rPr sz="1100" dirty="0"/>
+                        <a:t>; </a:t>
+                      </a:r>
+                      <a:r>
+                        <a:rPr sz="1100" dirty="0" err="1"/>
+                        <a:t>некорректный</a:t>
+                      </a:r>
+                      <a:r>
+                        <a:rPr sz="1100" dirty="0"/>
+                        <a:t> </a:t>
+                      </a:r>
+                      <a:r>
+                        <a:rPr sz="1100" dirty="0" err="1"/>
+                        <a:t>вход</a:t>
+                      </a:r>
+                      <a:r>
+                        <a:rPr sz="1100" dirty="0"/>
+                        <a:t> </a:t>
+                      </a:r>
+                      <a:r>
+                        <a:rPr sz="1100" dirty="0" err="1"/>
+                        <a:t>отмечен</a:t>
+                      </a:r>
+                      <a:endParaRPr sz="1100" dirty="0"/>
+                    </a:p>
+                  </a:txBody>
+                  <a:tcPr marL="101600" marR="101600" marT="50800" marB="50800"/>
+                </a:tc>
+                <a:tc>
+                  <a:txBody>
+                    <a:bodyPr/>
+                    <a:lstStyle/>
+                    <a:p>
+                      <a:r>
+                        <a:rPr sz="1100" dirty="0" err="1"/>
+                        <a:t>Да</a:t>
+                      </a:r>
+                      <a:r>
+                        <a:rPr sz="1100" dirty="0"/>
+                        <a:t> ✅</a:t>
+                      </a:r>
+                    </a:p>
+                  </a:txBody>
+                  <a:tcPr marL="101600" marR="101600" marT="50800" marB="50800"/>
+                </a:tc>
+                <a:extLst>
+                  <a:ext uri="{0D108BD9-81ED-4DB2-BD59-A6C34878D82A}">
+                    <a16:rowId xmlns:a16="http://schemas.microsoft.com/office/drawing/2014/main" val="1237461407"/>
+                  </a:ext>
+                </a:extLst>
+              </a:tr>
+              <a:tr h="0">
+                <a:tc>
+                  <a:txBody>
+                    <a:bodyPr/>
+                    <a:lstStyle/>
+                    <a:p>
+                      <a:r>
+                        <a:rPr sz="1100"/>
+                        <a:t>FB01-F012</a:t>
+                      </a:r>
+                    </a:p>
+                  </a:txBody>
+                  <a:tcPr marL="101600" marR="101600" marT="50800" marB="50800"/>
+                </a:tc>
+                <a:tc>
+                  <a:txBody>
+                    <a:bodyPr/>
+                    <a:lstStyle/>
+                    <a:p>
+                      <a:r>
+                        <a:rPr sz="1100"/>
+                        <a:t>Повторная загрузка события F001</a:t>
+                      </a:r>
+                    </a:p>
+                  </a:txBody>
+                  <a:tcPr marL="101600" marR="101600" marT="50800" marB="50800"/>
+                </a:tc>
+                <a:tc>
+                  <a:txBody>
+                    <a:bodyPr/>
+                    <a:lstStyle/>
+                    <a:p>
+                      <a:r>
+                        <a:rPr sz="1100"/>
+                        <a:t>обновить карточку, без дубля</a:t>
+                      </a:r>
+                    </a:p>
+                  </a:txBody>
+                  <a:tcPr marL="101600" marR="101600" marT="50800" marB="50800"/>
+                </a:tc>
+                <a:tc>
+                  <a:txBody>
+                    <a:bodyPr/>
+                    <a:lstStyle/>
+                    <a:p>
+                      <a:r>
+                        <a:rPr sz="1100"/>
+                        <a:t>обновлено 10 карточек, дублей нет (было 10, стало 10)</a:t>
+                      </a:r>
+                    </a:p>
+                  </a:txBody>
+                  <a:tcPr marL="101600" marR="101600" marT="50800" marB="50800"/>
+                </a:tc>
+                <a:tc>
+                  <a:txBody>
+                    <a:bodyPr/>
+                    <a:lstStyle/>
+                    <a:p>
+                      <a:r>
+                        <a:rPr sz="1100" dirty="0" err="1"/>
+                        <a:t>Да</a:t>
+                      </a:r>
+                      <a:r>
+                        <a:rPr sz="1100" dirty="0"/>
+                        <a:t> ✅</a:t>
+                      </a:r>
+                    </a:p>
+                  </a:txBody>
+                  <a:tcPr marL="101600" marR="101600" marT="50800" marB="50800"/>
+                </a:tc>
+                <a:extLst>
+                  <a:ext uri="{0D108BD9-81ED-4DB2-BD59-A6C34878D82A}">
+                    <a16:rowId xmlns:a16="http://schemas.microsoft.com/office/drawing/2014/main" val="130749305"/>
+                  </a:ext>
+                </a:extLst>
+              </a:tr>
+            </a:tbl>
+          </a:graphicData>
+        </a:graphic>
+      </p:graphicFrame>
     </p:spTree>
     <p:extLst>
       <p:ext uri="{BB962C8B-B14F-4D97-AF65-F5344CB8AC3E}">
-        <p14:creationId xmlns:p14="http://schemas.microsoft.com/office/powerpoint/2010/main" val="229999821"/>
+        <p14:creationId xmlns:p14="http://schemas.microsoft.com/office/powerpoint/2010/main" val="1873944380"/>
       </p:ext>
     </p:extLst>
   </p:cSld>
@@ -10971,14 +10275,6 @@
 <file path=ppt/slides/slide9.xml><?xml version="1.0" encoding="utf-8"?>
 <p:sld xmlns:a="http://schemas.openxmlformats.org/drawingml/2006/main" xmlns:r="http://schemas.openxmlformats.org/officeDocument/2006/relationships" xmlns:p="http://schemas.openxmlformats.org/presentationml/2006/main">
   <p:cSld>
-    <p:bg>
-      <p:bgPr>
-        <a:solidFill>
-          <a:srgbClr val="FAF8F2"/>
-        </a:solidFill>
-        <a:effectLst/>
-      </p:bgPr>
-    </p:bg>
     <p:spTree>
       <p:nvGrpSpPr>
         <p:cNvPr id="1" name=""/>
@@ -10998,7 +10294,7 @@
           <p:cNvPr id="18" name="Прямоугольник 17">
             <a:extLst>
               <a:ext uri="{FF2B5EF4-FFF2-40B4-BE49-F238E27FC236}">
-                <a16:creationId xmlns:a16="http://schemas.microsoft.com/office/drawing/2014/main" id="{E07995D8-6458-459D-AD1F-A61CB40C4B24}"/>
+                <a16:creationId xmlns:a16="http://schemas.microsoft.com/office/drawing/2014/main" id="{B72D6680-BA8E-46CC-9282-6833430D56C7}"/>
               </a:ext>
             </a:extLst>
           </p:cNvPr>
@@ -11045,7 +10341,7 @@
                 <a:ea typeface="Arial"/>
                 <a:cs typeface="Arial"/>
               </a:rPr>
-              <a:t>Команда и материалы</a:t>
+              <a:t>Эффект для бизнеса</a:t>
             </a:r>
           </a:p>
         </p:txBody>
@@ -11055,7 +10351,7 @@
           <p:cNvPr id="2" name="Прямоугольник 1">
             <a:extLst>
               <a:ext uri="{FF2B5EF4-FFF2-40B4-BE49-F238E27FC236}">
-                <a16:creationId xmlns:a16="http://schemas.microsoft.com/office/drawing/2014/main" id="{C1D8A099-1293-4BAF-B6D9-527FA719303E}"/>
+                <a16:creationId xmlns:a16="http://schemas.microsoft.com/office/drawing/2014/main" id="{345522D7-32B0-404B-9AF7-948864D91D66}"/>
               </a:ext>
             </a:extLst>
           </p:cNvPr>
@@ -11079,6 +10375,13 @@
             <a:noFill/>
           </a:ln>
         </p:spPr>
+        <p:txBody>
+          <a:bodyPr/>
+          <a:lstStyle/>
+          <a:p>
+            <a:endParaRPr/>
+          </a:p>
+        </p:txBody>
       </p:sp>
       <p:pic>
         <p:nvPicPr>
@@ -11107,7 +10410,7 @@
           <p:cNvPr id="4" name="Прямоугольник 3">
             <a:extLst>
               <a:ext uri="{FF2B5EF4-FFF2-40B4-BE49-F238E27FC236}">
-                <a16:creationId xmlns:a16="http://schemas.microsoft.com/office/drawing/2014/main" id="{60B9A644-BBF8-4C4F-964E-77DCFE215946}"/>
+                <a16:creationId xmlns:a16="http://schemas.microsoft.com/office/drawing/2014/main" id="{F5A262F3-3E0C-4C70-9343-B30C558CE9F1}"/>
               </a:ext>
             </a:extLst>
           </p:cNvPr>
@@ -11208,7 +10511,7 @@
           <p:cNvPr id="7" name="Прямоугольник 6">
             <a:extLst>
               <a:ext uri="{FF2B5EF4-FFF2-40B4-BE49-F238E27FC236}">
-                <a16:creationId xmlns:a16="http://schemas.microsoft.com/office/drawing/2014/main" id="{2148C3C2-FB22-4D64-BDF0-A1C7A0764C28}"/>
+                <a16:creationId xmlns:a16="http://schemas.microsoft.com/office/drawing/2014/main" id="{A25717A0-196A-40BD-BC2D-56CB062CD939}"/>
               </a:ext>
             </a:extLst>
           </p:cNvPr>
@@ -11265,7 +10568,7 @@
           <p:cNvPr id="8" name="Прямоугольник 7">
             <a:extLst>
               <a:ext uri="{FF2B5EF4-FFF2-40B4-BE49-F238E27FC236}">
-                <a16:creationId xmlns:a16="http://schemas.microsoft.com/office/drawing/2014/main" id="{9D98EF44-9DFE-48A2-8FC7-9A8739897DBD}"/>
+                <a16:creationId xmlns:a16="http://schemas.microsoft.com/office/drawing/2014/main" id="{9E8E847A-E7CB-4F2A-88F6-ADA61977E99A}"/>
               </a:ext>
             </a:extLst>
           </p:cNvPr>
@@ -11312,7 +10615,7 @@
                 <a:ea typeface="Arial"/>
                 <a:cs typeface="Arial"/>
               </a:rPr>
-              <a:t>09</a:t>
+              <a:t>14</a:t>
             </a:r>
           </a:p>
         </p:txBody>
@@ -11322,7 +10625,7 @@
           <p:cNvPr id="9" name="Прямоугольник 8">
             <a:extLst>
               <a:ext uri="{FF2B5EF4-FFF2-40B4-BE49-F238E27FC236}">
-                <a16:creationId xmlns:a16="http://schemas.microsoft.com/office/drawing/2014/main" id="{FD031292-020E-4803-BAD1-DE5753D030B2}"/>
+                <a16:creationId xmlns:a16="http://schemas.microsoft.com/office/drawing/2014/main" id="{A3FE1675-3BBF-445F-BC21-284EFEAEBA61}"/>
               </a:ext>
             </a:extLst>
           </p:cNvPr>
@@ -11379,7 +10682,7 @@
           <p:cNvPr id="10" name="Прямоугольник 9">
             <a:extLst>
               <a:ext uri="{FF2B5EF4-FFF2-40B4-BE49-F238E27FC236}">
-                <a16:creationId xmlns:a16="http://schemas.microsoft.com/office/drawing/2014/main" id="{3BFF7875-8182-47F5-87A9-880F73F28413}"/>
+                <a16:creationId xmlns:a16="http://schemas.microsoft.com/office/drawing/2014/main" id="{594DD044-53A0-4CB9-820E-6293B91B4DF7}"/>
               </a:ext>
             </a:extLst>
           </p:cNvPr>
@@ -11418,16 +10721,178 @@
               </a:defRPr>
             </a:pPr>
             <a:r>
-              <a:rPr sz="2250" b="0">
-                <a:solidFill>
-                  <a:srgbClr val="052849"/>
-                </a:solidFill>
-                <a:latin typeface="Arial"/>
-                <a:ea typeface="Arial"/>
-                <a:cs typeface="Arial"/>
-              </a:rPr>
-              <a:t>Роли: Карасев Д. — продукт/SA; Долгова К. — ML; Отпущенников А. — DevOps; Веденеев В. — fullstack-контур</a:t>
-            </a:r>
+              <a:rPr sz="2250" b="0" dirty="0" err="1">
+                <a:solidFill>
+                  <a:srgbClr val="052849"/>
+                </a:solidFill>
+                <a:latin typeface="Arial"/>
+                <a:ea typeface="Arial"/>
+                <a:cs typeface="Arial"/>
+              </a:rPr>
+              <a:t>Изменение</a:t>
+            </a:r>
+            <a:r>
+              <a:rPr sz="2250" b="0" dirty="0">
+                <a:solidFill>
+                  <a:srgbClr val="052849"/>
+                </a:solidFill>
+                <a:latin typeface="Arial"/>
+                <a:ea typeface="Arial"/>
+                <a:cs typeface="Arial"/>
+              </a:rPr>
+              <a:t>: </a:t>
+            </a:r>
+            <a:r>
+              <a:rPr sz="2250" b="0" dirty="0" err="1">
+                <a:solidFill>
+                  <a:srgbClr val="052849"/>
+                </a:solidFill>
+                <a:latin typeface="Arial"/>
+                <a:ea typeface="Arial"/>
+                <a:cs typeface="Arial"/>
+              </a:rPr>
+              <a:t>наставник</a:t>
+            </a:r>
+            <a:r>
+              <a:rPr sz="2250" b="0" dirty="0">
+                <a:solidFill>
+                  <a:srgbClr val="052849"/>
+                </a:solidFill>
+                <a:latin typeface="Arial"/>
+                <a:ea typeface="Arial"/>
+                <a:cs typeface="Arial"/>
+              </a:rPr>
+              <a:t> </a:t>
+            </a:r>
+            <a:r>
+              <a:rPr sz="2250" b="0" dirty="0" err="1">
+                <a:solidFill>
+                  <a:srgbClr val="052849"/>
+                </a:solidFill>
+                <a:latin typeface="Arial"/>
+                <a:ea typeface="Arial"/>
+                <a:cs typeface="Arial"/>
+              </a:rPr>
+              <a:t>получает</a:t>
+            </a:r>
+            <a:r>
+              <a:rPr sz="2250" b="0" dirty="0">
+                <a:solidFill>
+                  <a:srgbClr val="052849"/>
+                </a:solidFill>
+                <a:latin typeface="Arial"/>
+                <a:ea typeface="Arial"/>
+                <a:cs typeface="Arial"/>
+              </a:rPr>
+              <a:t> </a:t>
+            </a:r>
+            <a:r>
+              <a:rPr sz="2250" b="0" dirty="0" err="1">
+                <a:solidFill>
+                  <a:srgbClr val="052849"/>
+                </a:solidFill>
+                <a:latin typeface="Arial"/>
+                <a:ea typeface="Arial"/>
+                <a:cs typeface="Arial"/>
+              </a:rPr>
+              <a:t>готовую</a:t>
+            </a:r>
+            <a:r>
+              <a:rPr sz="2250" b="0" dirty="0">
+                <a:solidFill>
+                  <a:srgbClr val="052849"/>
+                </a:solidFill>
+                <a:latin typeface="Arial"/>
+                <a:ea typeface="Arial"/>
+                <a:cs typeface="Arial"/>
+              </a:rPr>
+              <a:t> </a:t>
+            </a:r>
+            <a:r>
+              <a:rPr sz="2250" b="0" dirty="0" err="1">
+                <a:solidFill>
+                  <a:srgbClr val="052849"/>
+                </a:solidFill>
+                <a:latin typeface="Arial"/>
+                <a:ea typeface="Arial"/>
+                <a:cs typeface="Arial"/>
+              </a:rPr>
+              <a:t>карточку</a:t>
+            </a:r>
+            <a:r>
+              <a:rPr sz="2250" b="0" dirty="0">
+                <a:solidFill>
+                  <a:srgbClr val="052849"/>
+                </a:solidFill>
+                <a:latin typeface="Arial"/>
+                <a:ea typeface="Arial"/>
+                <a:cs typeface="Arial"/>
+              </a:rPr>
+              <a:t> </a:t>
+            </a:r>
+            <a:r>
+              <a:rPr sz="2250" b="0" dirty="0" err="1">
+                <a:solidFill>
+                  <a:srgbClr val="052849"/>
+                </a:solidFill>
+                <a:latin typeface="Arial"/>
+                <a:ea typeface="Arial"/>
+                <a:cs typeface="Arial"/>
+              </a:rPr>
+              <a:t>вместо</a:t>
+            </a:r>
+            <a:r>
+              <a:rPr sz="2250" b="0" dirty="0">
+                <a:solidFill>
+                  <a:srgbClr val="052849"/>
+                </a:solidFill>
+                <a:latin typeface="Arial"/>
+                <a:ea typeface="Arial"/>
+                <a:cs typeface="Arial"/>
+              </a:rPr>
+              <a:t> </a:t>
+            </a:r>
+            <a:r>
+              <a:rPr sz="2250" b="0" dirty="0" err="1">
+                <a:solidFill>
+                  <a:srgbClr val="052849"/>
+                </a:solidFill>
+                <a:latin typeface="Arial"/>
+                <a:ea typeface="Arial"/>
+                <a:cs typeface="Arial"/>
+              </a:rPr>
+              <a:t>чтения</a:t>
+            </a:r>
+            <a:r>
+              <a:rPr sz="2250" b="0" dirty="0">
+                <a:solidFill>
+                  <a:srgbClr val="052849"/>
+                </a:solidFill>
+                <a:latin typeface="Arial"/>
+                <a:ea typeface="Arial"/>
+                <a:cs typeface="Arial"/>
+              </a:rPr>
+              <a:t> </a:t>
+            </a:r>
+            <a:r>
+              <a:rPr lang="ru-RU" sz="2250" b="0" dirty="0">
+                <a:solidFill>
+                  <a:srgbClr val="052849"/>
+                </a:solidFill>
+                <a:latin typeface="Arial"/>
+                <a:ea typeface="Arial"/>
+                <a:cs typeface="Arial"/>
+              </a:rPr>
+              <a:t>диалога с пользователем</a:t>
+            </a:r>
+            <a:endParaRPr sz="2250" b="0" dirty="0">
+              <a:solidFill>
+                <a:srgbClr val="052849"/>
+              </a:solidFill>
+              <a:latin typeface="Arial"/>
+              <a:ea typeface="Arial"/>
+              <a:cs typeface="Arial"/>
+            </a:endParaRPr>
           </a:p>
         </p:txBody>
       </p:sp>
@@ -11436,7 +10901,7 @@
           <p:cNvPr id="11" name="Прямоугольник 10">
             <a:extLst>
               <a:ext uri="{FF2B5EF4-FFF2-40B4-BE49-F238E27FC236}">
-                <a16:creationId xmlns:a16="http://schemas.microsoft.com/office/drawing/2014/main" id="{D335921A-1831-46BB-ACBD-98281BCBC9F8}"/>
+                <a16:creationId xmlns:a16="http://schemas.microsoft.com/office/drawing/2014/main" id="{A5F0D491-B0B4-440B-B721-00194183B340}"/>
               </a:ext>
             </a:extLst>
           </p:cNvPr>
@@ -11493,7 +10958,7 @@
           <p:cNvPr id="12" name="Прямоугольник 11">
             <a:extLst>
               <a:ext uri="{FF2B5EF4-FFF2-40B4-BE49-F238E27FC236}">
-                <a16:creationId xmlns:a16="http://schemas.microsoft.com/office/drawing/2014/main" id="{F411E88C-BDD7-4583-84AE-60933DBC1EAC}"/>
+                <a16:creationId xmlns:a16="http://schemas.microsoft.com/office/drawing/2014/main" id="{41E21C3C-2952-423D-8255-DCF6B07AA632}"/>
               </a:ext>
             </a:extLst>
           </p:cNvPr>
@@ -11540,7 +11005,7 @@
                 <a:ea typeface="Arial"/>
                 <a:cs typeface="Arial"/>
               </a:rPr>
-              <a:t>GitVerse: сдача до 25.09, 09:00; рабочий репозиторий — github.com/KaDyK736/FinikTeam-FB01</a:t>
+              <a:t>Расчёт (гипотеза): ~300 контактов/мес → высвобождение до ~70% времени первичного опроса</a:t>
             </a:r>
           </a:p>
         </p:txBody>
@@ -11550,7 +11015,7 @@
           <p:cNvPr id="13" name="Прямоугольник 12">
             <a:extLst>
               <a:ext uri="{FF2B5EF4-FFF2-40B4-BE49-F238E27FC236}">
-                <a16:creationId xmlns:a16="http://schemas.microsoft.com/office/drawing/2014/main" id="{EF70F542-6C02-4376-9F3B-BB300636F19C}"/>
+                <a16:creationId xmlns:a16="http://schemas.microsoft.com/office/drawing/2014/main" id="{4D96A4BF-4982-475C-B2E2-BD58BADC73D4}"/>
               </a:ext>
             </a:extLst>
           </p:cNvPr>
@@ -11607,7 +11072,7 @@
           <p:cNvPr id="14" name="Прямоугольник 13">
             <a:extLst>
               <a:ext uri="{FF2B5EF4-FFF2-40B4-BE49-F238E27FC236}">
-                <a16:creationId xmlns:a16="http://schemas.microsoft.com/office/drawing/2014/main" id="{296FA34A-37E1-4F27-905B-2E17FA190851}"/>
+                <a16:creationId xmlns:a16="http://schemas.microsoft.com/office/drawing/2014/main" id="{BEDFDCD8-C0F1-43A7-87D0-E2A9ED5A65AF}"/>
               </a:ext>
             </a:extLst>
           </p:cNvPr>
@@ -11646,16 +11111,123 @@
               </a:defRPr>
             </a:pPr>
             <a:r>
-              <a:rPr sz="2250" b="0">
-                <a:solidFill>
-                  <a:srgbClr val="052849"/>
-                </a:solidFill>
-                <a:latin typeface="Arial"/>
-                <a:ea typeface="Arial"/>
-                <a:cs typeface="Arial"/>
-              </a:rPr>
-              <a:t>Запуск: .env из .env.example → python app.py (локально Ollama с qwen2.5:7b-instruct)</a:t>
-            </a:r>
+              <a:rPr sz="2250" b="0" dirty="0" err="1">
+                <a:solidFill>
+                  <a:srgbClr val="052849"/>
+                </a:solidFill>
+                <a:latin typeface="Arial"/>
+                <a:ea typeface="Arial"/>
+                <a:cs typeface="Arial"/>
+              </a:rPr>
+              <a:t>Затраты</a:t>
+            </a:r>
+            <a:r>
+              <a:rPr sz="2250" b="0" dirty="0">
+                <a:solidFill>
+                  <a:srgbClr val="052849"/>
+                </a:solidFill>
+                <a:latin typeface="Arial"/>
+                <a:ea typeface="Arial"/>
+                <a:cs typeface="Arial"/>
+              </a:rPr>
+              <a:t>: </a:t>
+            </a:r>
+            <a:r>
+              <a:rPr sz="2250" b="0" dirty="0" err="1">
+                <a:solidFill>
+                  <a:srgbClr val="052849"/>
+                </a:solidFill>
+                <a:latin typeface="Arial"/>
+                <a:ea typeface="Arial"/>
+                <a:cs typeface="Arial"/>
+              </a:rPr>
+              <a:t>разработка</a:t>
+            </a:r>
+            <a:r>
+              <a:rPr sz="2250" b="0" dirty="0">
+                <a:solidFill>
+                  <a:srgbClr val="052849"/>
+                </a:solidFill>
+                <a:latin typeface="Arial"/>
+                <a:ea typeface="Arial"/>
+                <a:cs typeface="Arial"/>
+              </a:rPr>
+              <a:t> 6 </a:t>
+            </a:r>
+            <a:r>
+              <a:rPr sz="2250" b="0" dirty="0" err="1">
+                <a:solidFill>
+                  <a:srgbClr val="052849"/>
+                </a:solidFill>
+                <a:latin typeface="Arial"/>
+                <a:ea typeface="Arial"/>
+                <a:cs typeface="Arial"/>
+              </a:rPr>
+              <a:t>мес</a:t>
+            </a:r>
+            <a:r>
+              <a:rPr lang="ru-RU" sz="2250" b="0" dirty="0">
+                <a:solidFill>
+                  <a:srgbClr val="052849"/>
+                </a:solidFill>
+                <a:latin typeface="Arial"/>
+                <a:ea typeface="Arial"/>
+                <a:cs typeface="Arial"/>
+              </a:rPr>
+              <a:t>.</a:t>
+            </a:r>
+            <a:r>
+              <a:rPr sz="2250" b="0" dirty="0">
+                <a:solidFill>
+                  <a:srgbClr val="052849"/>
+                </a:solidFill>
+                <a:latin typeface="Arial"/>
+                <a:ea typeface="Arial"/>
+                <a:cs typeface="Arial"/>
+              </a:rPr>
+              <a:t>, </a:t>
+            </a:r>
+            <a:r>
+              <a:rPr sz="2250" b="0" dirty="0" err="1">
+                <a:solidFill>
+                  <a:srgbClr val="052849"/>
+                </a:solidFill>
+                <a:latin typeface="Arial"/>
+                <a:ea typeface="Arial"/>
+                <a:cs typeface="Arial"/>
+              </a:rPr>
+              <a:t>оборудование</a:t>
+            </a:r>
+            <a:r>
+              <a:rPr sz="2250" b="0" dirty="0">
+                <a:solidFill>
+                  <a:srgbClr val="052849"/>
+                </a:solidFill>
+                <a:latin typeface="Arial"/>
+                <a:ea typeface="Arial"/>
+                <a:cs typeface="Arial"/>
+              </a:rPr>
+              <a:t> и VPS, LLM — free/</a:t>
+            </a:r>
+            <a:r>
+              <a:rPr sz="2250" b="0" dirty="0" err="1">
+                <a:solidFill>
+                  <a:srgbClr val="052849"/>
+                </a:solidFill>
+                <a:latin typeface="Arial"/>
+                <a:ea typeface="Arial"/>
+                <a:cs typeface="Arial"/>
+              </a:rPr>
+              <a:t>Ollama</a:t>
+            </a:r>
+            <a:endParaRPr sz="2250" b="0" dirty="0">
+              <a:solidFill>
+                <a:srgbClr val="052849"/>
+              </a:solidFill>
+              <a:latin typeface="Arial"/>
+              <a:ea typeface="Arial"/>
+              <a:cs typeface="Arial"/>
+            </a:endParaRPr>
           </a:p>
         </p:txBody>
       </p:sp>
@@ -11664,7 +11236,7 @@
           <p:cNvPr id="15" name="Прямоугольник 14">
             <a:extLst>
               <a:ext uri="{FF2B5EF4-FFF2-40B4-BE49-F238E27FC236}">
-                <a16:creationId xmlns:a16="http://schemas.microsoft.com/office/drawing/2014/main" id="{AB6F9F9C-CB4C-454F-8B2A-9D3A5F996FFE}"/>
+                <a16:creationId xmlns:a16="http://schemas.microsoft.com/office/drawing/2014/main" id="{13A1BA6B-FF9A-464B-91EA-022FCCEB7297}"/>
               </a:ext>
             </a:extLst>
           </p:cNvPr>
@@ -11703,7 +11275,7 @@
               </a:defRPr>
             </a:pPr>
             <a:r>
-              <a:rPr sz="2325" b="1">
+              <a:rPr sz="2325" b="1" dirty="0">
                 <a:solidFill>
                   <a:srgbClr val="018A98"/>
                 </a:solidFill>
@@ -11721,7 +11293,7 @@
           <p:cNvPr id="16" name="Прямоугольник 15">
             <a:extLst>
               <a:ext uri="{FF2B5EF4-FFF2-40B4-BE49-F238E27FC236}">
-                <a16:creationId xmlns:a16="http://schemas.microsoft.com/office/drawing/2014/main" id="{CFB24CBB-2F3A-42A7-9D77-C215263B1848}"/>
+                <a16:creationId xmlns:a16="http://schemas.microsoft.com/office/drawing/2014/main" id="{C9409F71-5C7D-4139-BE27-E7534631F446}"/>
               </a:ext>
             </a:extLst>
           </p:cNvPr>
@@ -11760,16 +11332,222 @@
               </a:defRPr>
             </a:pPr>
             <a:r>
-              <a:rPr sz="2250" b="0">
-                <a:solidFill>
-                  <a:srgbClr val="052849"/>
-                </a:solidFill>
-                <a:latin typeface="Arial"/>
-                <a:ea typeface="Arial"/>
-                <a:cs typeface="Arial"/>
-              </a:rPr>
-              <a:t>Проверка: scripts/run_tests.py и run_paraphrases.py; собранный контур — bot_fullstack, 172 проверок</a:t>
-            </a:r>
+              <a:rPr sz="2250" b="0" dirty="0" err="1">
+                <a:solidFill>
+                  <a:srgbClr val="052849"/>
+                </a:solidFill>
+                <a:latin typeface="Arial"/>
+                <a:ea typeface="Arial"/>
+                <a:cs typeface="Arial"/>
+              </a:rPr>
+              <a:t>Статус</a:t>
+            </a:r>
+            <a:r>
+              <a:rPr sz="2250" b="0" dirty="0">
+                <a:solidFill>
+                  <a:srgbClr val="052849"/>
+                </a:solidFill>
+                <a:latin typeface="Arial"/>
+                <a:ea typeface="Arial"/>
+                <a:cs typeface="Arial"/>
+              </a:rPr>
+              <a:t>: </a:t>
+            </a:r>
+            <a:r>
+              <a:rPr sz="2250" b="0" dirty="0" err="1">
+                <a:solidFill>
+                  <a:srgbClr val="052849"/>
+                </a:solidFill>
+                <a:latin typeface="Arial"/>
+                <a:ea typeface="Arial"/>
+                <a:cs typeface="Arial"/>
+              </a:rPr>
+              <a:t>оценка</a:t>
+            </a:r>
+            <a:r>
+              <a:rPr sz="2250" b="0" dirty="0">
+                <a:solidFill>
+                  <a:srgbClr val="052849"/>
+                </a:solidFill>
+                <a:latin typeface="Arial"/>
+                <a:ea typeface="Arial"/>
+                <a:cs typeface="Arial"/>
+              </a:rPr>
+              <a:t> </a:t>
+            </a:r>
+            <a:r>
+              <a:rPr sz="2250" b="0" dirty="0" err="1">
+                <a:solidFill>
+                  <a:srgbClr val="052849"/>
+                </a:solidFill>
+                <a:latin typeface="Arial"/>
+                <a:ea typeface="Arial"/>
+                <a:cs typeface="Arial"/>
+              </a:rPr>
+              <a:t>по</a:t>
+            </a:r>
+            <a:r>
+              <a:rPr sz="2250" b="0" dirty="0">
+                <a:solidFill>
+                  <a:srgbClr val="052849"/>
+                </a:solidFill>
+                <a:latin typeface="Arial"/>
+                <a:ea typeface="Arial"/>
+                <a:cs typeface="Arial"/>
+              </a:rPr>
+              <a:t> </a:t>
+            </a:r>
+            <a:r>
+              <a:rPr sz="2250" b="0" dirty="0" err="1">
+                <a:solidFill>
+                  <a:srgbClr val="052849"/>
+                </a:solidFill>
+                <a:latin typeface="Arial"/>
+                <a:ea typeface="Arial"/>
+                <a:cs typeface="Arial"/>
+              </a:rPr>
+              <a:t>учебным</a:t>
+            </a:r>
+            <a:r>
+              <a:rPr sz="2250" b="0" dirty="0">
+                <a:solidFill>
+                  <a:srgbClr val="052849"/>
+                </a:solidFill>
+                <a:latin typeface="Arial"/>
+                <a:ea typeface="Arial"/>
+                <a:cs typeface="Arial"/>
+              </a:rPr>
+              <a:t> </a:t>
+            </a:r>
+            <a:r>
+              <a:rPr sz="2250" b="0" dirty="0" err="1">
+                <a:solidFill>
+                  <a:srgbClr val="052849"/>
+                </a:solidFill>
+                <a:latin typeface="Arial"/>
+                <a:ea typeface="Arial"/>
+                <a:cs typeface="Arial"/>
+              </a:rPr>
+              <a:t>данным</a:t>
+            </a:r>
+            <a:r>
+              <a:rPr sz="2250" b="0" dirty="0">
+                <a:solidFill>
+                  <a:srgbClr val="052849"/>
+                </a:solidFill>
+                <a:latin typeface="Arial"/>
+                <a:ea typeface="Arial"/>
+                <a:cs typeface="Arial"/>
+              </a:rPr>
+              <a:t>; </a:t>
+            </a:r>
+            <a:r>
+              <a:rPr sz="2250" b="0" dirty="0" err="1">
+                <a:solidFill>
+                  <a:srgbClr val="052849"/>
+                </a:solidFill>
+                <a:latin typeface="Arial"/>
+                <a:ea typeface="Arial"/>
+                <a:cs typeface="Arial"/>
+              </a:rPr>
+              <a:t>замеры</a:t>
+            </a:r>
+            <a:r>
+              <a:rPr sz="2250" b="0" dirty="0">
+                <a:solidFill>
+                  <a:srgbClr val="052849"/>
+                </a:solidFill>
+                <a:latin typeface="Arial"/>
+                <a:ea typeface="Arial"/>
+                <a:cs typeface="Arial"/>
+              </a:rPr>
+              <a:t> у </a:t>
+            </a:r>
+            <a:r>
+              <a:rPr sz="2250" b="0" dirty="0" err="1">
+                <a:solidFill>
+                  <a:srgbClr val="052849"/>
+                </a:solidFill>
+                <a:latin typeface="Arial"/>
+                <a:ea typeface="Arial"/>
+                <a:cs typeface="Arial"/>
+              </a:rPr>
+              <a:t>держателя</a:t>
+            </a:r>
+            <a:r>
+              <a:rPr sz="2250" b="0" dirty="0">
+                <a:solidFill>
+                  <a:srgbClr val="052849"/>
+                </a:solidFill>
+                <a:latin typeface="Arial"/>
+                <a:ea typeface="Arial"/>
+                <a:cs typeface="Arial"/>
+              </a:rPr>
+              <a:t> </a:t>
+            </a:r>
+            <a:r>
+              <a:rPr sz="2250" b="0" dirty="0" err="1">
+                <a:solidFill>
+                  <a:srgbClr val="052849"/>
+                </a:solidFill>
+                <a:latin typeface="Arial"/>
+                <a:ea typeface="Arial"/>
+                <a:cs typeface="Arial"/>
+              </a:rPr>
+              <a:t>процесса</a:t>
+            </a:r>
+            <a:r>
+              <a:rPr sz="2250" b="0" dirty="0">
+                <a:solidFill>
+                  <a:srgbClr val="052849"/>
+                </a:solidFill>
+                <a:latin typeface="Arial"/>
+                <a:ea typeface="Arial"/>
+                <a:cs typeface="Arial"/>
+              </a:rPr>
+              <a:t> </a:t>
+            </a:r>
+            <a:r>
+              <a:rPr sz="2250" b="0" dirty="0" err="1">
+                <a:solidFill>
+                  <a:srgbClr val="052849"/>
+                </a:solidFill>
+                <a:latin typeface="Arial"/>
+                <a:ea typeface="Arial"/>
+                <a:cs typeface="Arial"/>
+              </a:rPr>
+              <a:t>не</a:t>
+            </a:r>
+            <a:r>
+              <a:rPr sz="2250" b="0" dirty="0">
+                <a:solidFill>
+                  <a:srgbClr val="052849"/>
+                </a:solidFill>
+                <a:latin typeface="Arial"/>
+                <a:ea typeface="Arial"/>
+                <a:cs typeface="Arial"/>
+              </a:rPr>
+              <a:t> </a:t>
+            </a:r>
+            <a:r>
+              <a:rPr sz="2250" b="0" dirty="0" err="1">
+                <a:solidFill>
+                  <a:srgbClr val="052849"/>
+                </a:solidFill>
+                <a:latin typeface="Arial"/>
+                <a:ea typeface="Arial"/>
+                <a:cs typeface="Arial"/>
+              </a:rPr>
+              <a:t>проводились</a:t>
+            </a:r>
+            <a:endParaRPr sz="2250" b="0" dirty="0">
+              <a:solidFill>
+                <a:srgbClr val="052849"/>
+              </a:solidFill>
+              <a:latin typeface="Arial"/>
+              <a:ea typeface="Arial"/>
+              <a:cs typeface="Arial"/>
+            </a:endParaRPr>
           </a:p>
         </p:txBody>
       </p:sp>
@@ -11778,7 +11556,7 @@
           <p:cNvPr id="17" name="Прямоугольник 16">
             <a:extLst>
               <a:ext uri="{FF2B5EF4-FFF2-40B4-BE49-F238E27FC236}">
-                <a16:creationId xmlns:a16="http://schemas.microsoft.com/office/drawing/2014/main" id="{016FA87D-0660-4D1C-9AEA-4F75B4614ACE}"/>
+                <a16:creationId xmlns:a16="http://schemas.microsoft.com/office/drawing/2014/main" id="{08CC0997-0EC9-41FB-9D36-C0E35AA12BAC}"/>
               </a:ext>
             </a:extLst>
           </p:cNvPr>
@@ -11809,7 +11587,7 @@
             <a:pPr>
               <a:defRPr sz="1350" b="0">
                 <a:solidFill>
-                  <a:srgbClr val="566572"/>
+                  <a:srgbClr val="D4E5EA"/>
                 </a:solidFill>
                 <a:latin typeface="Arial"/>
                 <a:ea typeface="Arial"/>
@@ -11817,15 +11595,15 @@
               </a:defRPr>
             </a:pPr>
             <a:r>
-              <a:rPr sz="1350" b="0">
-                <a:solidFill>
-                  <a:srgbClr val="566572"/>
-                </a:solidFill>
-                <a:latin typeface="Arial"/>
-                <a:ea typeface="Arial"/>
-                <a:cs typeface="Arial"/>
-              </a:rPr>
-              <a:t>Команда готова продолжать внедрение на пилоте; доступ к репозиторию открыт жюри.</a:t>
+              <a:rPr lang="ru-RU" sz="1350" dirty="0">
+                <a:solidFill>
+                  <a:srgbClr val="018A98"/>
+                </a:solidFill>
+                <a:latin typeface="Arial"/>
+                <a:ea typeface="Arial"/>
+                <a:cs typeface="Arial"/>
+              </a:rPr>
+              <a:t>Детали: план-график UPRSII_LR_6; числа эффекта — гипотеза, пилот подтвердит их замерами.</a:t>
             </a:r>
           </a:p>
         </p:txBody>
@@ -11833,7 +11611,7 @@
     </p:spTree>
     <p:extLst>
       <p:ext uri="{BB962C8B-B14F-4D97-AF65-F5344CB8AC3E}">
-        <p14:creationId xmlns:p14="http://schemas.microsoft.com/office/powerpoint/2010/main" val="426863094"/>
+        <p14:creationId xmlns:p14="http://schemas.microsoft.com/office/powerpoint/2010/main" val="456765342"/>
       </p:ext>
     </p:extLst>
   </p:cSld>
